--- a/Clase 1/PPT/Clase01_Intro_ML.pptx
+++ b/Clase 1/PPT/Clase01_Intro_ML.pptx
@@ -4,6 +4,9 @@
   <p:sldMasterIdLst>
     <p:sldMasterId id="2147483648" r:id="rId1"/>
   </p:sldMasterIdLst>
+  <p:notesMasterIdLst>
+    <p:notesMasterId r:id="rId19"/>
+  </p:notesMasterIdLst>
   <p:sldIdLst>
     <p:sldId id="256" r:id="rId2"/>
     <p:sldId id="257" r:id="rId3"/>
@@ -23,9 +26,6 @@
     <p:sldId id="271" r:id="rId17"/>
     <p:sldId id="272" r:id="rId18"/>
   </p:sldIdLst>
-  <p:notesMasterIdLst>
-    <p:notesMasterId r:id="rId19"/>
-  </p:notesMasterIdLst>
   <p:sldSz cx="12192000" cy="6858000"/>
   <p:notesSz cx="6858000" cy="12192000"/>
   <p:defaultTextStyle>
@@ -120,18 +120,26 @@
       </a:defRPr>
     </a:lvl9pPr>
   </p:defaultTextStyle>
+  <p:extLst>
+    <p:ext uri="{EFAFB233-063F-42B5-8137-9DF3F51BA10A}">
+      <p15:sldGuideLst xmlns:p15="http://schemas.microsoft.com/office/powerpoint/2012/main"/>
+    </p:ext>
+  </p:extLst>
 </p:presentation>
 </file>
 
 <file path=ppt/charts/chart1.xml><?xml version="1.0" encoding="utf-8"?>
-<c:chartSpace xmlns:c="http://schemas.openxmlformats.org/drawingml/2006/chart" xmlns:a="http://schemas.openxmlformats.org/drawingml/2006/main" xmlns:r="http://schemas.openxmlformats.org/officeDocument/2006/relationships">
+<c:chartSpace xmlns:c="http://schemas.openxmlformats.org/drawingml/2006/chart" xmlns:a="http://schemas.openxmlformats.org/drawingml/2006/main" xmlns:r="http://schemas.openxmlformats.org/officeDocument/2006/relationships" xmlns:c16r2="http://schemas.microsoft.com/office/drawing/2015/06/chart">
   <c:date1904 val="0"/>
+  <c:lang val="en-US"/>
   <c:roundedCorners val="1"/>
+  <c:style val="2"/>
   <c:chart>
     <c:autoTitleDeleted val="1"/>
     <c:plotArea>
       <c:layout/>
       <c:lineChart>
+        <c:grouping val="standard"/>
         <c:varyColors val="0"/>
         <c:ser>
           <c:idx val="0"/>
@@ -148,9 +156,6 @@
             </c:strRef>
           </c:tx>
           <c:spPr>
-            <a:solidFill>
-              <a:srgbClr val="0A2559"/>
-            </a:solidFill>
             <a:ln w="31750" cap="flat">
               <a:solidFill>
                 <a:srgbClr val="0A2559"/>
@@ -160,31 +165,6 @@
             </a:ln>
             <a:effectLst/>
           </c:spPr>
-          <c:invertIfNegative val="0"/>
-          <c:dLbls>
-            <c:numFmt formatCode="#,##0" sourceLinked="0"/>
-            <c:txPr>
-              <a:bodyPr/>
-              <a:lstStyle/>
-              <a:p>
-                <a:pPr>
-                  <a:defRPr b="0" i="0" strike="noStrike" sz="1200" u="none">
-                    <a:solidFill>
-                      <a:srgbClr val="000000"/>
-                    </a:solidFill>
-                    <a:latin typeface="Arial"/>
-                  </a:defRPr>
-                </a:pPr>
-              </a:p>
-            </c:txPr>
-            <c:showLegendKey val="0"/>
-            <c:showVal val="0"/>
-            <c:showCatName val="0"/>
-            <c:showSerName val="0"/>
-            <c:showPercent val="0"/>
-            <c:showBubbleSize val="0"/>
-            <c:showLeaderLines val="0"/>
-          </c:dLbls>
           <c:marker>
             <c:symbol val="circle"/>
             <c:size val="7"/>
@@ -203,47 +183,45 @@
             </c:spPr>
           </c:marker>
           <c:cat>
-            <c:multiLvlStrRef>
+            <c:strRef>
               <c:f>Sheet1!$A$2:$A$12</c:f>
-              <c:multiLvlStrCache>
+              <c:strCache>
                 <c:ptCount val="11"/>
-                <c:lvl>
-                  <c:pt idx="0">
-                    <c:v>1</c:v>
-                  </c:pt>
-                  <c:pt idx="1">
-                    <c:v>2</c:v>
-                  </c:pt>
-                  <c:pt idx="2">
-                    <c:v>3</c:v>
-                  </c:pt>
-                  <c:pt idx="3">
-                    <c:v>4</c:v>
-                  </c:pt>
-                  <c:pt idx="4">
-                    <c:v>5</c:v>
-                  </c:pt>
-                  <c:pt idx="5">
-                    <c:v>6</c:v>
-                  </c:pt>
-                  <c:pt idx="6">
-                    <c:v>7</c:v>
-                  </c:pt>
-                  <c:pt idx="7">
-                    <c:v>8</c:v>
-                  </c:pt>
-                  <c:pt idx="8">
-                    <c:v>9</c:v>
-                  </c:pt>
-                  <c:pt idx="9">
-                    <c:v>10</c:v>
-                  </c:pt>
-                  <c:pt idx="10">
-                    <c:v>11</c:v>
-                  </c:pt>
-                </c:lvl>
-              </c:multiLvlStrCache>
-            </c:multiLvlStrRef>
+                <c:pt idx="0">
+                  <c:v>1</c:v>
+                </c:pt>
+                <c:pt idx="1">
+                  <c:v>2</c:v>
+                </c:pt>
+                <c:pt idx="2">
+                  <c:v>3</c:v>
+                </c:pt>
+                <c:pt idx="3">
+                  <c:v>4</c:v>
+                </c:pt>
+                <c:pt idx="4">
+                  <c:v>5</c:v>
+                </c:pt>
+                <c:pt idx="5">
+                  <c:v>6</c:v>
+                </c:pt>
+                <c:pt idx="6">
+                  <c:v>7</c:v>
+                </c:pt>
+                <c:pt idx="7">
+                  <c:v>8</c:v>
+                </c:pt>
+                <c:pt idx="8">
+                  <c:v>9</c:v>
+                </c:pt>
+                <c:pt idx="9">
+                  <c:v>10</c:v>
+                </c:pt>
+                <c:pt idx="10">
+                  <c:v>11</c:v>
+                </c:pt>
+              </c:strCache>
+            </c:strRef>
           </c:cat>
           <c:val>
             <c:numRef>
@@ -252,10 +230,10 @@
                 <c:formatCode>General</c:formatCode>
                 <c:ptCount val="11"/>
                 <c:pt idx="0">
-                  <c:v>0.512</c:v>
+                  <c:v>0.51200000000000001</c:v>
                 </c:pt>
                 <c:pt idx="1">
-                  <c:v>0.512</c:v>
+                  <c:v>0.51200000000000001</c:v>
                 </c:pt>
                 <c:pt idx="2">
                   <c:v>0.22</c:v>
@@ -264,19 +242,19 @@
                   <c:v>0.188</c:v>
                 </c:pt>
                 <c:pt idx="4">
-                  <c:v>0.181</c:v>
+                  <c:v>0.18099999999999999</c:v>
                 </c:pt>
                 <c:pt idx="5">
-                  <c:v>0.177</c:v>
+                  <c:v>0.17699999999999999</c:v>
                 </c:pt>
                 <c:pt idx="6">
-                  <c:v>0.176</c:v>
+                  <c:v>0.17599999999999999</c:v>
                 </c:pt>
                 <c:pt idx="7">
-                  <c:v>0.172</c:v>
+                  <c:v>0.17199999999999999</c:v>
                 </c:pt>
                 <c:pt idx="8">
-                  <c:v>0.165</c:v>
+                  <c:v>0.16500000000000001</c:v>
                 </c:pt>
                 <c:pt idx="9">
                   <c:v>0.159</c:v>
@@ -288,6 +266,11 @@
             </c:numRef>
           </c:val>
           <c:smooth val="0"/>
+          <c:extLst>
+            <c:ext xmlns:c16="http://schemas.microsoft.com/office/drawing/2014/chart" uri="{C3380CC4-5D6E-409C-BE32-E72D297353CC}">
+              <c16:uniqueId val="{00000000-0334-D047-9656-059B6CBA7E29}"/>
+            </c:ext>
+          </c:extLst>
         </c:ser>
         <c:ser>
           <c:idx val="1"/>
@@ -304,9 +287,6 @@
             </c:strRef>
           </c:tx>
           <c:spPr>
-            <a:solidFill>
-              <a:srgbClr val="E6115E"/>
-            </a:solidFill>
             <a:ln w="31750" cap="flat">
               <a:solidFill>
                 <a:srgbClr val="E6115E"/>
@@ -316,31 +296,6 @@
             </a:ln>
             <a:effectLst/>
           </c:spPr>
-          <c:invertIfNegative val="0"/>
-          <c:dLbls>
-            <c:numFmt formatCode="#,##0" sourceLinked="0"/>
-            <c:txPr>
-              <a:bodyPr/>
-              <a:lstStyle/>
-              <a:p>
-                <a:pPr>
-                  <a:defRPr b="0" i="0" strike="noStrike" sz="1200" u="none">
-                    <a:solidFill>
-                      <a:srgbClr val="000000"/>
-                    </a:solidFill>
-                    <a:latin typeface="Arial"/>
-                  </a:defRPr>
-                </a:pPr>
-              </a:p>
-            </c:txPr>
-            <c:showLegendKey val="0"/>
-            <c:showVal val="0"/>
-            <c:showCatName val="0"/>
-            <c:showSerName val="0"/>
-            <c:showPercent val="0"/>
-            <c:showBubbleSize val="0"/>
-            <c:showLeaderLines val="0"/>
-          </c:dLbls>
           <c:marker>
             <c:symbol val="circle"/>
             <c:size val="7"/>
@@ -359,47 +314,45 @@
             </c:spPr>
           </c:marker>
           <c:cat>
-            <c:multiLvlStrRef>
+            <c:strRef>
               <c:f>Sheet1!$A$2:$A$12</c:f>
-              <c:multiLvlStrCache>
+              <c:strCache>
                 <c:ptCount val="11"/>
-                <c:lvl>
-                  <c:pt idx="0">
-                    <c:v>1</c:v>
-                  </c:pt>
-                  <c:pt idx="1">
-                    <c:v>2</c:v>
-                  </c:pt>
-                  <c:pt idx="2">
-                    <c:v>3</c:v>
-                  </c:pt>
-                  <c:pt idx="3">
-                    <c:v>4</c:v>
-                  </c:pt>
-                  <c:pt idx="4">
-                    <c:v>5</c:v>
-                  </c:pt>
-                  <c:pt idx="5">
-                    <c:v>6</c:v>
-                  </c:pt>
-                  <c:pt idx="6">
-                    <c:v>7</c:v>
-                  </c:pt>
-                  <c:pt idx="7">
-                    <c:v>8</c:v>
-                  </c:pt>
-                  <c:pt idx="8">
-                    <c:v>9</c:v>
-                  </c:pt>
-                  <c:pt idx="9">
-                    <c:v>10</c:v>
-                  </c:pt>
-                  <c:pt idx="10">
-                    <c:v>11</c:v>
-                  </c:pt>
-                </c:lvl>
-              </c:multiLvlStrCache>
-            </c:multiLvlStrRef>
+                <c:pt idx="0">
+                  <c:v>1</c:v>
+                </c:pt>
+                <c:pt idx="1">
+                  <c:v>2</c:v>
+                </c:pt>
+                <c:pt idx="2">
+                  <c:v>3</c:v>
+                </c:pt>
+                <c:pt idx="3">
+                  <c:v>4</c:v>
+                </c:pt>
+                <c:pt idx="4">
+                  <c:v>5</c:v>
+                </c:pt>
+                <c:pt idx="5">
+                  <c:v>6</c:v>
+                </c:pt>
+                <c:pt idx="6">
+                  <c:v>7</c:v>
+                </c:pt>
+                <c:pt idx="7">
+                  <c:v>8</c:v>
+                </c:pt>
+                <c:pt idx="8">
+                  <c:v>9</c:v>
+                </c:pt>
+                <c:pt idx="9">
+                  <c:v>10</c:v>
+                </c:pt>
+                <c:pt idx="10">
+                  <c:v>11</c:v>
+                </c:pt>
+              </c:strCache>
+            </c:strRef>
           </c:cat>
           <c:val>
             <c:numRef>
@@ -408,13 +361,13 @@
                 <c:formatCode>General</c:formatCode>
                 <c:ptCount val="11"/>
                 <c:pt idx="0">
-                  <c:v>0.531</c:v>
+                  <c:v>0.53100000000000003</c:v>
                 </c:pt>
                 <c:pt idx="1">
-                  <c:v>0.531</c:v>
+                  <c:v>0.53100000000000003</c:v>
                 </c:pt>
                 <c:pt idx="2">
-                  <c:v>0.342</c:v>
+                  <c:v>0.34200000000000003</c:v>
                 </c:pt>
                 <c:pt idx="3">
                   <c:v>0.41</c:v>
@@ -423,56 +376,45 @@
                   <c:v>0.374</c:v>
                 </c:pt>
                 <c:pt idx="5">
-                  <c:v>0.364</c:v>
+                  <c:v>0.36399999999999999</c:v>
                 </c:pt>
                 <c:pt idx="6">
-                  <c:v>0.364</c:v>
+                  <c:v>0.36399999999999999</c:v>
                 </c:pt>
                 <c:pt idx="7">
-                  <c:v>0.406</c:v>
+                  <c:v>0.40600000000000003</c:v>
                 </c:pt>
                 <c:pt idx="8">
-                  <c:v>0.725</c:v>
+                  <c:v>0.72499999999999998</c:v>
                 </c:pt>
                 <c:pt idx="9">
-                  <c:v>0.407</c:v>
+                  <c:v>0.40699999999999997</c:v>
                 </c:pt>
                 <c:pt idx="10">
-                  <c:v>0.567</c:v>
+                  <c:v>0.56699999999999995</c:v>
                 </c:pt>
               </c:numCache>
             </c:numRef>
           </c:val>
           <c:smooth val="0"/>
+          <c:extLst>
+            <c:ext xmlns:c16="http://schemas.microsoft.com/office/drawing/2014/chart" uri="{C3380CC4-5D6E-409C-BE32-E72D297353CC}">
+              <c16:uniqueId val="{00000001-0334-D047-9656-059B6CBA7E29}"/>
+            </c:ext>
+          </c:extLst>
         </c:ser>
         <c:dLbls>
-          <c:numFmt formatCode="#,##0" sourceLinked="0"/>
-          <c:txPr>
-            <a:bodyPr/>
-            <a:lstStyle/>
-            <a:p>
-              <a:pPr>
-                <a:defRPr b="0" i="0" strike="noStrike" sz="1200" u="none">
-                  <a:solidFill>
-                    <a:srgbClr val="000000"/>
-                  </a:solidFill>
-                  <a:latin typeface="Arial"/>
-                </a:defRPr>
-              </a:pPr>
-            </a:p>
-          </c:txPr>
           <c:showLegendKey val="0"/>
           <c:showVal val="0"/>
           <c:showCatName val="0"/>
           <c:showSerName val="0"/>
           <c:showPercent val="0"/>
           <c:showBubbleSize val="0"/>
-          <c:showLeaderLines val="0"/>
         </c:dLbls>
         <c:marker val="1"/>
+        <c:smooth val="0"/>
         <c:axId val="2094734554"/>
         <c:axId val="2094734552"/>
-        <c:axId val="2094734556"/>
       </c:lineChart>
       <c:catAx>
         <c:axId val="2094734554"/>
@@ -507,7 +449,6 @@
               </a:p>
             </c:rich>
           </c:tx>
-          <c:layout/>
           <c:overlay val="0"/>
         </c:title>
         <c:numFmt formatCode="General" sourceLinked="1"/>
@@ -542,6 +483,7 @@
         <c:crosses val="autoZero"/>
         <c:auto val="1"/>
         <c:lblAlgn val="ctr"/>
+        <c:lblOffset val="100"/>
         <c:noMultiLvlLbl val="1"/>
       </c:catAx>
       <c:valAx>
@@ -590,7 +532,6 @@
               </a:p>
             </c:rich>
           </c:tx>
-          <c:layout/>
           <c:overlay val="0"/>
         </c:title>
         <c:numFmt formatCode="0.0" sourceLinked="0"/>
@@ -655,6 +596,7 @@
     </c:legend>
     <c:plotVisOnly val="1"/>
     <c:dispBlanksAs val="span"/>
+    <c:showDLblsOverMax val="1"/>
   </c:chart>
   <c:spPr>
     <a:noFill/>
@@ -670,14 +612,17 @@
 </file>
 
 <file path=ppt/charts/chart2.xml><?xml version="1.0" encoding="utf-8"?>
-<c:chartSpace xmlns:c="http://schemas.openxmlformats.org/drawingml/2006/chart" xmlns:a="http://schemas.openxmlformats.org/drawingml/2006/main" xmlns:r="http://schemas.openxmlformats.org/officeDocument/2006/relationships">
+<c:chartSpace xmlns:c="http://schemas.openxmlformats.org/drawingml/2006/chart" xmlns:a="http://schemas.openxmlformats.org/drawingml/2006/main" xmlns:r="http://schemas.openxmlformats.org/officeDocument/2006/relationships" xmlns:c16r2="http://schemas.microsoft.com/office/drawing/2015/06/chart">
   <c:date1904 val="0"/>
+  <c:lang val="en-US"/>
   <c:roundedCorners val="1"/>
+  <c:style val="2"/>
   <c:chart>
     <c:autoTitleDeleted val="1"/>
     <c:plotArea>
       <c:layout/>
       <c:lineChart>
+        <c:grouping val="standard"/>
         <c:varyColors val="0"/>
         <c:ser>
           <c:idx val="0"/>
@@ -694,9 +639,6 @@
             </c:strRef>
           </c:tx>
           <c:spPr>
-            <a:solidFill>
-              <a:srgbClr val="0A2559"/>
-            </a:solidFill>
             <a:ln w="31750" cap="flat">
               <a:solidFill>
                 <a:srgbClr val="0A2559"/>
@@ -706,31 +648,6 @@
             </a:ln>
             <a:effectLst/>
           </c:spPr>
-          <c:invertIfNegative val="0"/>
-          <c:dLbls>
-            <c:numFmt formatCode="#,##0" sourceLinked="0"/>
-            <c:txPr>
-              <a:bodyPr/>
-              <a:lstStyle/>
-              <a:p>
-                <a:pPr>
-                  <a:defRPr b="0" i="0" strike="noStrike" sz="1200" u="none">
-                    <a:solidFill>
-                      <a:srgbClr val="000000"/>
-                    </a:solidFill>
-                    <a:latin typeface="Arial"/>
-                  </a:defRPr>
-                </a:pPr>
-              </a:p>
-            </c:txPr>
-            <c:showLegendKey val="0"/>
-            <c:showVal val="0"/>
-            <c:showCatName val="0"/>
-            <c:showSerName val="0"/>
-            <c:showPercent val="0"/>
-            <c:showBubbleSize val="0"/>
-            <c:showLeaderLines val="0"/>
-          </c:dLbls>
           <c:marker>
             <c:symbol val="circle"/>
             <c:size val="7"/>
@@ -749,50 +666,48 @@
             </c:spPr>
           </c:marker>
           <c:cat>
-            <c:multiLvlStrRef>
+            <c:strRef>
               <c:f>Sheet1!$A$2:$A$13</c:f>
-              <c:multiLvlStrCache>
+              <c:strCache>
                 <c:ptCount val="12"/>
-                <c:lvl>
-                  <c:pt idx="0">
-                    <c:v>1</c:v>
-                  </c:pt>
-                  <c:pt idx="1">
-                    <c:v>2</c:v>
-                  </c:pt>
-                  <c:pt idx="2">
-                    <c:v>3</c:v>
-                  </c:pt>
-                  <c:pt idx="3">
-                    <c:v>4</c:v>
-                  </c:pt>
-                  <c:pt idx="4">
-                    <c:v>5</c:v>
-                  </c:pt>
-                  <c:pt idx="5">
-                    <c:v>6</c:v>
-                  </c:pt>
-                  <c:pt idx="6">
-                    <c:v>7</c:v>
-                  </c:pt>
-                  <c:pt idx="7">
-                    <c:v>8</c:v>
-                  </c:pt>
-                  <c:pt idx="8">
-                    <c:v>9</c:v>
-                  </c:pt>
-                  <c:pt idx="9">
-                    <c:v>10</c:v>
-                  </c:pt>
-                  <c:pt idx="10">
-                    <c:v>11</c:v>
-                  </c:pt>
-                  <c:pt idx="11">
-                    <c:v>12</c:v>
-                  </c:pt>
-                </c:lvl>
-              </c:multiLvlStrCache>
-            </c:multiLvlStrRef>
+                <c:pt idx="0">
+                  <c:v>1</c:v>
+                </c:pt>
+                <c:pt idx="1">
+                  <c:v>2</c:v>
+                </c:pt>
+                <c:pt idx="2">
+                  <c:v>3</c:v>
+                </c:pt>
+                <c:pt idx="3">
+                  <c:v>4</c:v>
+                </c:pt>
+                <c:pt idx="4">
+                  <c:v>5</c:v>
+                </c:pt>
+                <c:pt idx="5">
+                  <c:v>6</c:v>
+                </c:pt>
+                <c:pt idx="6">
+                  <c:v>7</c:v>
+                </c:pt>
+                <c:pt idx="7">
+                  <c:v>8</c:v>
+                </c:pt>
+                <c:pt idx="8">
+                  <c:v>9</c:v>
+                </c:pt>
+                <c:pt idx="9">
+                  <c:v>10</c:v>
+                </c:pt>
+                <c:pt idx="10">
+                  <c:v>11</c:v>
+                </c:pt>
+                <c:pt idx="11">
+                  <c:v>12</c:v>
+                </c:pt>
+              </c:strCache>
+            </c:strRef>
           </c:cat>
           <c:val>
             <c:numRef>
@@ -801,34 +716,34 @@
                 <c:formatCode>General</c:formatCode>
                 <c:ptCount val="12"/>
                 <c:pt idx="0">
-                  <c:v>0.844</c:v>
+                  <c:v>0.84399999999999997</c:v>
                 </c:pt>
                 <c:pt idx="1">
-                  <c:v>0.863</c:v>
+                  <c:v>0.86299999999999999</c:v>
                 </c:pt>
                 <c:pt idx="2">
                   <c:v>0.877</c:v>
                 </c:pt>
                 <c:pt idx="3">
-                  <c:v>0.894</c:v>
+                  <c:v>0.89400000000000002</c:v>
                 </c:pt>
                 <c:pt idx="4">
-                  <c:v>0.912</c:v>
+                  <c:v>0.91200000000000003</c:v>
                 </c:pt>
                 <c:pt idx="5">
-                  <c:v>0.927</c:v>
+                  <c:v>0.92700000000000005</c:v>
                 </c:pt>
                 <c:pt idx="6">
-                  <c:v>0.949</c:v>
+                  <c:v>0.94899999999999995</c:v>
                 </c:pt>
                 <c:pt idx="7">
-                  <c:v>0.973</c:v>
+                  <c:v>0.97299999999999998</c:v>
                 </c:pt>
                 <c:pt idx="8">
-                  <c:v>0.984</c:v>
+                  <c:v>0.98399999999999999</c:v>
                 </c:pt>
                 <c:pt idx="9">
-                  <c:v>0.991</c:v>
+                  <c:v>0.99099999999999999</c:v>
                 </c:pt>
                 <c:pt idx="10">
                   <c:v>0.998</c:v>
@@ -840,6 +755,11 @@
             </c:numRef>
           </c:val>
           <c:smooth val="0"/>
+          <c:extLst>
+            <c:ext xmlns:c16="http://schemas.microsoft.com/office/drawing/2014/chart" uri="{C3380CC4-5D6E-409C-BE32-E72D297353CC}">
+              <c16:uniqueId val="{00000000-3E2C-9742-BA39-F366A8965C1A}"/>
+            </c:ext>
+          </c:extLst>
         </c:ser>
         <c:ser>
           <c:idx val="1"/>
@@ -856,9 +776,6 @@
             </c:strRef>
           </c:tx>
           <c:spPr>
-            <a:solidFill>
-              <a:srgbClr val="E6115E"/>
-            </a:solidFill>
             <a:ln w="31750" cap="flat">
               <a:solidFill>
                 <a:srgbClr val="E6115E"/>
@@ -868,31 +785,6 @@
             </a:ln>
             <a:effectLst/>
           </c:spPr>
-          <c:invertIfNegative val="0"/>
-          <c:dLbls>
-            <c:numFmt formatCode="#,##0" sourceLinked="0"/>
-            <c:txPr>
-              <a:bodyPr/>
-              <a:lstStyle/>
-              <a:p>
-                <a:pPr>
-                  <a:defRPr b="0" i="0" strike="noStrike" sz="1200" u="none">
-                    <a:solidFill>
-                      <a:srgbClr val="000000"/>
-                    </a:solidFill>
-                    <a:latin typeface="Arial"/>
-                  </a:defRPr>
-                </a:pPr>
-              </a:p>
-            </c:txPr>
-            <c:showLegendKey val="0"/>
-            <c:showVal val="0"/>
-            <c:showCatName val="0"/>
-            <c:showSerName val="0"/>
-            <c:showPercent val="0"/>
-            <c:showBubbleSize val="0"/>
-            <c:showLeaderLines val="0"/>
-          </c:dLbls>
           <c:marker>
             <c:symbol val="circle"/>
             <c:size val="7"/>
@@ -911,50 +803,48 @@
             </c:spPr>
           </c:marker>
           <c:cat>
-            <c:multiLvlStrRef>
+            <c:strRef>
               <c:f>Sheet1!$A$2:$A$13</c:f>
-              <c:multiLvlStrCache>
+              <c:strCache>
                 <c:ptCount val="12"/>
-                <c:lvl>
-                  <c:pt idx="0">
-                    <c:v>1</c:v>
-                  </c:pt>
-                  <c:pt idx="1">
-                    <c:v>2</c:v>
-                  </c:pt>
-                  <c:pt idx="2">
-                    <c:v>3</c:v>
-                  </c:pt>
-                  <c:pt idx="3">
-                    <c:v>4</c:v>
-                  </c:pt>
-                  <c:pt idx="4">
-                    <c:v>5</c:v>
-                  </c:pt>
-                  <c:pt idx="5">
-                    <c:v>6</c:v>
-                  </c:pt>
-                  <c:pt idx="6">
-                    <c:v>7</c:v>
-                  </c:pt>
-                  <c:pt idx="7">
-                    <c:v>8</c:v>
-                  </c:pt>
-                  <c:pt idx="8">
-                    <c:v>9</c:v>
-                  </c:pt>
-                  <c:pt idx="9">
-                    <c:v>10</c:v>
-                  </c:pt>
-                  <c:pt idx="10">
-                    <c:v>11</c:v>
-                  </c:pt>
-                  <c:pt idx="11">
-                    <c:v>12</c:v>
-                  </c:pt>
-                </c:lvl>
-              </c:multiLvlStrCache>
-            </c:multiLvlStrRef>
+                <c:pt idx="0">
+                  <c:v>1</c:v>
+                </c:pt>
+                <c:pt idx="1">
+                  <c:v>2</c:v>
+                </c:pt>
+                <c:pt idx="2">
+                  <c:v>3</c:v>
+                </c:pt>
+                <c:pt idx="3">
+                  <c:v>4</c:v>
+                </c:pt>
+                <c:pt idx="4">
+                  <c:v>5</c:v>
+                </c:pt>
+                <c:pt idx="5">
+                  <c:v>6</c:v>
+                </c:pt>
+                <c:pt idx="6">
+                  <c:v>7</c:v>
+                </c:pt>
+                <c:pt idx="7">
+                  <c:v>8</c:v>
+                </c:pt>
+                <c:pt idx="8">
+                  <c:v>9</c:v>
+                </c:pt>
+                <c:pt idx="9">
+                  <c:v>10</c:v>
+                </c:pt>
+                <c:pt idx="10">
+                  <c:v>11</c:v>
+                </c:pt>
+                <c:pt idx="11">
+                  <c:v>12</c:v>
+                </c:pt>
+              </c:strCache>
+            </c:strRef>
           </c:cat>
           <c:val>
             <c:numRef>
@@ -963,13 +853,13 @@
                 <c:formatCode>General</c:formatCode>
                 <c:ptCount val="12"/>
                 <c:pt idx="0">
-                  <c:v>0.843</c:v>
+                  <c:v>0.84299999999999997</c:v>
                 </c:pt>
                 <c:pt idx="1">
-                  <c:v>0.845</c:v>
+                  <c:v>0.84499999999999997</c:v>
                 </c:pt>
                 <c:pt idx="2">
-                  <c:v>0.863</c:v>
+                  <c:v>0.86299999999999999</c:v>
                 </c:pt>
                 <c:pt idx="3">
                   <c:v>0.877</c:v>
@@ -978,59 +868,48 @@
                   <c:v>0.88</c:v>
                 </c:pt>
                 <c:pt idx="5">
-                  <c:v>0.853</c:v>
+                  <c:v>0.85299999999999998</c:v>
                 </c:pt>
                 <c:pt idx="6">
-                  <c:v>0.863</c:v>
+                  <c:v>0.86299999999999999</c:v>
                 </c:pt>
                 <c:pt idx="7">
-                  <c:v>0.848</c:v>
+                  <c:v>0.84799999999999998</c:v>
                 </c:pt>
                 <c:pt idx="8">
-                  <c:v>0.848</c:v>
+                  <c:v>0.84799999999999998</c:v>
                 </c:pt>
                 <c:pt idx="9">
-                  <c:v>0.848</c:v>
+                  <c:v>0.84799999999999998</c:v>
                 </c:pt>
                 <c:pt idx="10">
-                  <c:v>0.845</c:v>
+                  <c:v>0.84499999999999997</c:v>
                 </c:pt>
                 <c:pt idx="11">
-                  <c:v>0.845</c:v>
+                  <c:v>0.84499999999999997</c:v>
                 </c:pt>
               </c:numCache>
             </c:numRef>
           </c:val>
           <c:smooth val="0"/>
+          <c:extLst>
+            <c:ext xmlns:c16="http://schemas.microsoft.com/office/drawing/2014/chart" uri="{C3380CC4-5D6E-409C-BE32-E72D297353CC}">
+              <c16:uniqueId val="{00000001-3E2C-9742-BA39-F366A8965C1A}"/>
+            </c:ext>
+          </c:extLst>
         </c:ser>
         <c:dLbls>
-          <c:numFmt formatCode="#,##0" sourceLinked="0"/>
-          <c:txPr>
-            <a:bodyPr/>
-            <a:lstStyle/>
-            <a:p>
-              <a:pPr>
-                <a:defRPr b="0" i="0" strike="noStrike" sz="1200" u="none">
-                  <a:solidFill>
-                    <a:srgbClr val="000000"/>
-                  </a:solidFill>
-                  <a:latin typeface="Arial"/>
-                </a:defRPr>
-              </a:pPr>
-            </a:p>
-          </c:txPr>
           <c:showLegendKey val="0"/>
           <c:showVal val="0"/>
           <c:showCatName val="0"/>
           <c:showSerName val="0"/>
           <c:showPercent val="0"/>
           <c:showBubbleSize val="0"/>
-          <c:showLeaderLines val="0"/>
         </c:dLbls>
         <c:marker val="1"/>
+        <c:smooth val="0"/>
         <c:axId val="2094734554"/>
         <c:axId val="2094734552"/>
-        <c:axId val="2094734556"/>
       </c:lineChart>
       <c:catAx>
         <c:axId val="2094734554"/>
@@ -1065,7 +944,6 @@
               </a:p>
             </c:rich>
           </c:tx>
-          <c:layout/>
           <c:overlay val="0"/>
         </c:title>
         <c:numFmt formatCode="General" sourceLinked="1"/>
@@ -1100,6 +978,7 @@
         <c:crosses val="autoZero"/>
         <c:auto val="1"/>
         <c:lblAlgn val="ctr"/>
+        <c:lblOffset val="100"/>
         <c:noMultiLvlLbl val="1"/>
       </c:catAx>
       <c:valAx>
@@ -1148,7 +1027,6 @@
               </a:p>
             </c:rich>
           </c:tx>
-          <c:layout/>
           <c:overlay val="0"/>
         </c:title>
         <c:numFmt formatCode="0.00" sourceLinked="0"/>
@@ -1213,6 +1091,7 @@
     </c:legend>
     <c:plotVisOnly val="1"/>
     <c:dispBlanksAs val="span"/>
+    <c:showDLblsOverMax val="1"/>
   </c:chart>
   <c:spPr>
     <a:noFill/>
@@ -1249,234 +1128,10 @@
           <a:chExt cx="0" cy="0"/>
         </a:xfrm>
       </p:grpSpPr>
-      <p:sp>
-        <p:nvSpPr>
-          <p:cNvPr id="2" name="Header Placeholder 1"/>
-          <p:cNvSpPr>
-            <a:spLocks noGrp="1"/>
-          </p:cNvSpPr>
-          <p:nvPr>
-            <p:ph type="hdr" sz="quarter"/>
-          </p:nvPr>
-        </p:nvSpPr>
-        <p:spPr>
-          <a:xfrm>
-            <a:off x="0" y="0"/>
-            <a:ext cx="2971800" cy="458788"/>
-          </a:xfrm>
-          <a:prstGeom prst="rect">
-            <a:avLst/>
-          </a:prstGeom>
-        </p:spPr>
-        <p:txBody>
-          <a:bodyPr vert="horz" lIns="91440" tIns="45720" rIns="91440" bIns="45720" rtlCol="0"/>
-          <a:lstStyle>
-            <a:lvl1pPr algn="l">
-              <a:defRPr sz="1200"/>
-            </a:lvl1pPr>
-          </a:lstStyle>
-          <a:p>
-            <a:endParaRPr lang="en-US"/>
-          </a:p>
-        </p:txBody>
-      </p:sp>
-      <p:sp>
-        <p:nvSpPr>
-          <p:cNvPr id="3" name="Date Placeholder 2"/>
-          <p:cNvSpPr>
-            <a:spLocks noGrp="1"/>
-          </p:cNvSpPr>
-          <p:nvPr>
-            <p:ph type="dt" idx="1"/>
-          </p:nvPr>
-        </p:nvSpPr>
-        <p:spPr>
-          <a:xfrm>
-            <a:off x="3884613" y="0"/>
-            <a:ext cx="2971800" cy="458788"/>
-          </a:xfrm>
-          <a:prstGeom prst="rect">
-            <a:avLst/>
-          </a:prstGeom>
-        </p:spPr>
-        <p:txBody>
-          <a:bodyPr vert="horz" lIns="91440" tIns="45720" rIns="91440" bIns="45720" rtlCol="0"/>
-          <a:lstStyle>
-            <a:lvl1pPr algn="r">
-              <a:defRPr sz="1200"/>
-            </a:lvl1pPr>
-          </a:lstStyle>
-          <a:p>
-            <a:fld id="{5282F153-3F37-0F45-9E97-73ACFA13230C}" type="datetimeFigureOut">
-              <a:rPr lang="en-US"/>
-              <a:t>7/23/19</a:t>
-            </a:fld>
-            <a:endParaRPr lang="en-US"/>
-          </a:p>
-        </p:txBody>
-      </p:sp>
-      <p:sp>
-        <p:nvSpPr>
-          <p:cNvPr id="4" name="Slide Image Placeholder 3"/>
-          <p:cNvSpPr>
-            <a:spLocks noGrp="1" noRot="1" noChangeAspect="1"/>
-          </p:cNvSpPr>
-          <p:nvPr>
-            <p:ph type="sldImg" idx="2"/>
-          </p:nvPr>
-        </p:nvSpPr>
-        <p:spPr>
-          <a:xfrm>
-            <a:off x="685800" y="1143000"/>
-            <a:ext cx="5486400" cy="3086100"/>
-          </a:xfrm>
-          <a:prstGeom prst="rect">
-            <a:avLst/>
-          </a:prstGeom>
-          <a:noFill/>
-          <a:ln w="12700">
-            <a:solidFill>
-              <a:prstClr val="black"/>
-            </a:solidFill>
-          </a:ln>
-        </p:spPr>
-        <p:txBody>
-          <a:bodyPr vert="horz" lIns="91440" tIns="45720" rIns="91440" bIns="45720" rtlCol="0" anchor="ctr"/>
-          <a:lstStyle/>
-          <a:p>
-            <a:endParaRPr lang="en-US"/>
-          </a:p>
-        </p:txBody>
-      </p:sp>
-      <p:sp>
-        <p:nvSpPr>
-          <p:cNvPr id="5" name="Notes Placeholder 4"/>
-          <p:cNvSpPr>
-            <a:spLocks noGrp="1"/>
-          </p:cNvSpPr>
-          <p:nvPr>
-            <p:ph type="body" sz="quarter" idx="3"/>
-          </p:nvPr>
-        </p:nvSpPr>
-        <p:spPr>
-          <a:xfrm>
-            <a:off x="685800" y="4400550"/>
-            <a:ext cx="5486400" cy="3600450"/>
-          </a:xfrm>
-          <a:prstGeom prst="rect">
-            <a:avLst/>
-          </a:prstGeom>
-        </p:spPr>
-        <p:txBody>
-          <a:bodyPr vert="horz" lIns="91440" tIns="45720" rIns="91440" bIns="45720" rtlCol="0"/>
-          <a:lstStyle/>
-          <a:p>
-            <a:pPr lvl="0"/>
-            <a:r>
-              <a:rPr lang="en-US"/>
-              <a:t>Click to edit Master text styles</a:t>
-            </a:r>
-          </a:p>
-          <a:p>
-            <a:pPr lvl="1"/>
-            <a:r>
-              <a:rPr lang="en-US"/>
-              <a:t>Second level</a:t>
-            </a:r>
-          </a:p>
-          <a:p>
-            <a:pPr lvl="2"/>
-            <a:r>
-              <a:rPr lang="en-US"/>
-              <a:t>Third level</a:t>
-            </a:r>
-          </a:p>
-          <a:p>
-            <a:pPr lvl="3"/>
-            <a:r>
-              <a:rPr lang="en-US"/>
-              <a:t>Fourth level</a:t>
-            </a:r>
-          </a:p>
-          <a:p>
-            <a:pPr lvl="4"/>
-            <a:r>
-              <a:rPr lang="en-US"/>
-              <a:t>Fifth level</a:t>
-            </a:r>
-          </a:p>
-        </p:txBody>
-      </p:sp>
-      <p:sp>
-        <p:nvSpPr>
-          <p:cNvPr id="6" name="Footer Placeholder 5"/>
-          <p:cNvSpPr>
-            <a:spLocks noGrp="1"/>
-          </p:cNvSpPr>
-          <p:nvPr>
-            <p:ph type="ftr" sz="quarter" idx="4"/>
-          </p:nvPr>
-        </p:nvSpPr>
-        <p:spPr>
-          <a:xfrm>
-            <a:off x="0" y="8685213"/>
-            <a:ext cx="2971800" cy="458787"/>
-          </a:xfrm>
-          <a:prstGeom prst="rect">
-            <a:avLst/>
-          </a:prstGeom>
-        </p:spPr>
-        <p:txBody>
-          <a:bodyPr vert="horz" lIns="91440" tIns="45720" rIns="91440" bIns="45720" rtlCol="0" anchor="b"/>
-          <a:lstStyle>
-            <a:lvl1pPr algn="l">
-              <a:defRPr sz="1200"/>
-            </a:lvl1pPr>
-          </a:lstStyle>
-          <a:p>
-            <a:endParaRPr lang="en-US"/>
-          </a:p>
-        </p:txBody>
-      </p:sp>
-      <p:sp>
-        <p:nvSpPr>
-          <p:cNvPr id="7" name="Slide Number Placeholder 6"/>
-          <p:cNvSpPr>
-            <a:spLocks noGrp="1"/>
-          </p:cNvSpPr>
-          <p:nvPr>
-            <p:ph type="sldNum" sz="quarter" idx="5"/>
-          </p:nvPr>
-        </p:nvSpPr>
-        <p:spPr>
-          <a:xfrm>
-            <a:off x="3884613" y="8685213"/>
-            <a:ext cx="2971800" cy="458787"/>
-          </a:xfrm>
-          <a:prstGeom prst="rect">
-            <a:avLst/>
-          </a:prstGeom>
-        </p:spPr>
-        <p:txBody>
-          <a:bodyPr vert="horz" lIns="91440" tIns="45720" rIns="91440" bIns="45720" rtlCol="0" anchor="b"/>
-          <a:lstStyle>
-            <a:lvl1pPr algn="r">
-              <a:defRPr sz="1200"/>
-            </a:lvl1pPr>
-          </a:lstStyle>
-          <a:p>
-            <a:fld id="{CE5E9CC1-C706-0F49-92D6-E571CC5EEA8F}" type="slidenum">
-              <a:rPr lang="en-US"/>
-              <a:t>‹#›</a:t>
-            </a:fld>
-            <a:endParaRPr lang="en-US"/>
-          </a:p>
-        </p:txBody>
-      </p:sp>
     </p:spTree>
     <p:extLst>
       <p:ext uri="{BB962C8B-B14F-4D97-AF65-F5344CB8AC3E}">
-        <p14:creationId xmlns:p14="http://schemas.microsoft.com/office/powerpoint/2010/main" val="1024086991"/>
+        <p14:creationId xmlns:p14="http://schemas.microsoft.com/office/powerpoint/2010/main" val="624100263"/>
       </p:ext>
     </p:extLst>
   </p:cSld>
@@ -1624,7 +1279,6 @@
               <a:rPr lang="en-US" dirty="0"/>
               <a:t>Presentación personal breve y del curso. Engancha con la pregunta: ¿cuántos de ustedes han escrito alguna vez un IF para tomar una decisión de negocio? Eso es programación tradicional. Hoy vemos qué cambia cuando la regla la escribe la máquina. La imagen de la derecha es la idea de todo el curso: una curva que captura la forma de los datos sin pasar por cada punto.</a:t>
             </a:r>
-            <a:endParaRPr lang="en-US" dirty="0"/>
           </a:p>
         </p:txBody>
       </p:sp>
@@ -1712,7 +1366,6 @@
               <a:rPr lang="en-US" dirty="0"/>
               <a:t>Punto clave para gente de negocio: el paso 1 es el más importante y el que más se salta. Un modelo excelente para la pregunta equivocada no vale nada. La flecha roja de regreso es real: la mayoría de proyectos da varias vueltas.</a:t>
             </a:r>
-            <a:endParaRPr lang="en-US" dirty="0"/>
           </a:p>
         </p:txBody>
       </p:sp>
@@ -1800,7 +1453,6 @@
               <a:rPr lang="en-US" dirty="0"/>
               <a:t>Muestra primero solo la línea azul: el error de entrenamiento baja siempre. Pregunta: ¿entonces elijo el grado 15? Luego la roja. El notebook tiene el gráfico de las tres curvas; vale la pena proyectarlo aquí si hay tiempo: el grado 15 pasa exactamente por los puntos y entre ellos hace locuras.</a:t>
             </a:r>
-            <a:endParaRPr lang="en-US" dirty="0"/>
           </a:p>
         </p:txBody>
       </p:sp>
@@ -1888,7 +1540,6 @@
               <a:rPr lang="en-US" dirty="0"/>
               <a:t>La analogía del examen funciona muy bien: si el profesor te deja ver el examen final antes, tu nota ya no mide lo que sabes. Lo mismo con la prueba. El error más común en la práctica no es malicioso: es mirar la prueba, ajustar 'solo un poquito' y volver a medir. Eso contamina la prueba.</a:t>
             </a:r>
-            <a:endParaRPr lang="en-US" dirty="0"/>
           </a:p>
         </p:txBody>
       </p:sp>
@@ -1976,7 +1627,6 @@
               <a:rPr lang="en-US" dirty="0"/>
               <a:t>Este gráfico lo construyen ellos en el ejercicio 3.4. Remarca que la profundidad se eligió con validación, no con prueba. Y compara con el bloque 1: allí dijimos que el árbol sacaba 0.870 midiendo con los mismos datos. Un árbol sin límite llega a 1.000 en entrenamiento: perfecto y engañoso. Con 180 hojas para 1 400 clientes, se aprendió a cada grupito de memoria.</a:t>
             </a:r>
-            <a:endParaRPr lang="en-US" dirty="0"/>
           </a:p>
         </p:txBody>
       </p:sp>
@@ -2064,7 +1714,6 @@
               <a:rPr lang="en-US" dirty="0"/>
               <a:t>Buen caso porque viene de una empresa con toda la data y el talento del mundo: el overfitting no es un error de principiantes. Lazer y coautores describieron el modelo como parte detector de gripe y parte detector de invierno. Google dejó de publicar las estimaciones en 2015.</a:t>
             </a:r>
-            <a:endParaRPr lang="en-US" dirty="0"/>
           </a:p>
         </p:txBody>
       </p:sp>
@@ -2152,7 +1801,6 @@
               <a:rPr lang="en-US" dirty="0"/>
               <a:t>No hace falta explicar cada modelo: los veremos uno por uno. Lo que importa hoy es que el código es el mismo. Que gane la logística no significa que siempre gane: aquí los datos siguen una relación suave y la logística encaja justo con eso. El cliente nuevo es el ejercicio 4.2.</a:t>
             </a:r>
-            <a:endParaRPr lang="en-US" dirty="0"/>
           </a:p>
         </p:txBody>
       </p:sp>
@@ -2240,7 +1888,6 @@
               <a:rPr lang="en-US" dirty="0"/>
               <a:t>Si el grupo va lento, el bloque 2 se puede hacer en voz alta todos juntos (ya lo discutimos en la slide 9). El bloque 3 es el que no se recorta. Quien termine antes: que cambie el test_size a 0.1 y a 0.5 y vea cómo cambian los números.</a:t>
             </a:r>
-            <a:endParaRPr lang="en-US" dirty="0"/>
           </a:p>
         </p:txBody>
       </p:sp>
@@ -2328,7 +1975,6 @@
               <a:rPr lang="en-US" dirty="0"/>
               <a:t>Cierra con la frase de arriba y pide que cada uno diga en voz alta cuál de los números del día le sorprendió más. Normalmente es el 546 del grado 15 o que no hacer nada acierte el 80 %.</a:t>
             </a:r>
-            <a:endParaRPr lang="en-US" dirty="0"/>
           </a:p>
         </p:txBody>
       </p:sp>
@@ -2416,7 +2062,6 @@
               <a:rPr lang="en-US" dirty="0"/>
               <a:t>Recorrido rápido, un minuto. Lo importante: el curso va de lo supervisado (M1 y M2) a lo no supervisado (M3) y termina con cómo mejorar y desplegar modelos (M4). El parcial cae justo cuando se termina lo supervisado. Menciona que Random Forest y XGBoost aparecen en tres módulos a propósito: cada vez se ven desde un ángulo distinto.</a:t>
             </a:r>
-            <a:endParaRPr lang="en-US" dirty="0"/>
           </a:p>
         </p:txBody>
       </p:sp>
@@ -2504,7 +2149,6 @@
               <a:rPr lang="en-US" dirty="0"/>
               <a:t>Si vas retrasado, el bloque 4 se puede reducir a mostrar el código: se practica en el laboratorio. El bloque 3 no se toca.</a:t>
             </a:r>
-            <a:endParaRPr lang="en-US" dirty="0"/>
           </a:p>
         </p:txBody>
       </p:sp>
@@ -2592,7 +2236,6 @@
               <a:rPr lang="en-US" dirty="0"/>
               <a:t>Este diagrama es la definición más útil de ML para alguien de negocio. Subraya la columna de la derecha: la entrada incluye las RESPUESTAS. Por eso necesitamos datos históricos etiquetados: clientes de los que ya sabemos cómo terminaron.</a:t>
             </a:r>
-            <a:endParaRPr lang="en-US" dirty="0"/>
           </a:p>
         </p:txBody>
       </p:sp>
@@ -2680,7 +2323,6 @@
               <a:rPr lang="en-US" dirty="0"/>
               <a:t>La definición de Mitchell parece académica pero es una herramienta práctica: obliga a definir la métrica (P) antes de empezar. Muchos proyectos fracasan porque nadie definió P. Con Samuel: la idea que cambió todo es que el programa llegó a jugar mejor que su propio autor, que era un jugador mediocre. El autor no le enseñó a jugar bien: le enseñó a aprender.</a:t>
             </a:r>
-            <a:endParaRPr lang="en-US" dirty="0"/>
           </a:p>
         </p:txBody>
       </p:sp>
@@ -2768,7 +2410,6 @@
               <a:rPr lang="en-US" dirty="0"/>
               <a:t>Pregunta al grupo antes de mostrar los números: ¿cuánto creen que acierta alguien que dice siempre que no? Casi todos subestiman: 80 %. Esa es la vara. Si un modelo no la supera, no sirve, por impresionante que suene su exactitud. Y deja sembrada la duda del recuadro rojo: se resuelve en el bloque 3.</a:t>
             </a:r>
-            <a:endParaRPr lang="en-US" dirty="0"/>
           </a:p>
         </p:txBody>
       </p:sp>
@@ -2856,7 +2497,6 @@
               <a:rPr lang="en-US" dirty="0"/>
               <a:t>Lee la tabla despacio, con la mini tabla de la derecha a la vista: X son las columnas azules, y es la roja. La diferencia parámetro/hiperparámetro se confunde durante todo el curso; vale la pena repetirla: el modelo aprende los parámetros, tú eliges los hiperparámetros. Y elegirlos bien es el tema del bloque 3.</a:t>
             </a:r>
-            <a:endParaRPr lang="en-US" dirty="0"/>
           </a:p>
         </p:txBody>
       </p:sp>
@@ -2944,7 +2584,6 @@
               <a:rPr lang="en-US" dirty="0"/>
               <a:t>Supervisado = aprendes con un profesor que tiene las respuestas (la columna y). No supervisado = no hay respuestas; el modelo busca estructura. Existe un tercer tipo, aprendizaje por refuerzo (un agente que aprende por prueba y error, como el jugador de damas de Samuel), pero queda fuera de este curso.</a:t>
             </a:r>
-            <a:endParaRPr lang="en-US" dirty="0"/>
           </a:p>
         </p:txBody>
       </p:sp>
@@ -3032,7 +2671,6 @@
               <a:rPr lang="en-US" dirty="0"/>
               <a:t>Tapa la columna Tipo (o muéstrala después de que respondan). La (d) genera discusión: hay quien dice clasificación porque es un porcentaje. Si alguien pregunta por calificar clientes en A/B/C/D: eso es clasificación multiclase, más de dos etiquetas, pero sigue siendo clasificación.</a:t>
             </a:r>
-            <a:endParaRPr lang="en-US" dirty="0"/>
           </a:p>
         </p:txBody>
       </p:sp>
@@ -3105,6 +2743,11 @@
 <file path=ppt/slideMasters/slideMaster1.xml><?xml version="1.0" encoding="utf-8"?>
 <p:sldMaster xmlns:a="http://schemas.openxmlformats.org/drawingml/2006/main" xmlns:r="http://schemas.openxmlformats.org/officeDocument/2006/relationships" xmlns:p="http://schemas.openxmlformats.org/presentationml/2006/main">
   <p:cSld>
+    <p:bg>
+      <p:bgRef idx="1001">
+        <a:schemeClr val="bg1"/>
+      </p:bgRef>
+    </p:bg>
     <p:spTree>
       <p:nvGrpSpPr>
         <p:cNvPr id="1" name=""/>
@@ -3387,6 +3030,7 @@
         <a:solidFill>
           <a:srgbClr val="0A2559"/>
         </a:solidFill>
+        <a:effectLst/>
       </p:bgPr>
     </p:bg>
     <p:spTree>
@@ -3451,11 +3095,11 @@
           <a:bodyPr wrap="square" lIns="0" tIns="0" rIns="0" bIns="0" rtlCol="0" anchor="ctr"/>
           <a:lstStyle/>
           <a:p>
-            <a:pPr algn="ctr" indent="0" marL="0">
+            <a:pPr marL="0" indent="0" algn="ctr">
               <a:buNone/>
             </a:pPr>
             <a:r>
-              <a:rPr lang="en-US" sz="1100" b="1" spc="150" kern="0" dirty="0">
+              <a:rPr lang="en-US" sz="1100" b="1" kern="0" spc="150" dirty="0">
                 <a:solidFill>
                   <a:srgbClr val="FFFFFF"/>
                 </a:solidFill>
@@ -3490,7 +3134,7 @@
           <a:bodyPr wrap="square" lIns="0" tIns="0" rIns="0" bIns="0" rtlCol="0" anchor="t"/>
           <a:lstStyle/>
           <a:p>
-            <a:pPr indent="0" marL="0">
+            <a:pPr marL="0" indent="0">
               <a:buNone/>
             </a:pPr>
             <a:r>
@@ -3507,7 +3151,7 @@
             <a:endParaRPr lang="en-US" sz="4000" dirty="0"/>
           </a:p>
           <a:p>
-            <a:pPr indent="0" marL="0">
+            <a:pPr marL="0" indent="0">
               <a:buNone/>
             </a:pPr>
             <a:r>
@@ -3546,7 +3190,7 @@
           <a:bodyPr wrap="square" lIns="0" tIns="0" rIns="0" bIns="0" rtlCol="0" anchor="t"/>
           <a:lstStyle/>
           <a:p>
-            <a:pPr indent="0" marL="0">
+            <a:pPr marL="0" indent="0">
               <a:buNone/>
             </a:pPr>
             <a:r>
@@ -3563,7 +3207,7 @@
             <a:endParaRPr lang="en-US" sz="1500" dirty="0"/>
           </a:p>
           <a:p>
-            <a:pPr indent="0" marL="0">
+            <a:pPr marL="0" indent="0">
               <a:buNone/>
             </a:pPr>
             <a:r>
@@ -3602,7 +3246,7 @@
           <a:bodyPr wrap="square" lIns="0" tIns="0" rIns="0" bIns="0" rtlCol="0" anchor="ctr"/>
           <a:lstStyle/>
           <a:p>
-            <a:pPr indent="0" marL="0">
+            <a:pPr marL="0" indent="0">
               <a:buNone/>
             </a:pPr>
             <a:r>
@@ -3641,7 +3285,7 @@
           <a:bodyPr wrap="square" lIns="0" tIns="0" rIns="0" bIns="0" rtlCol="0" anchor="ctr"/>
           <a:lstStyle/>
           <a:p>
-            <a:pPr indent="0" marL="0">
+            <a:pPr marL="0" indent="0">
               <a:buNone/>
             </a:pPr>
             <a:r>
@@ -3680,7 +3324,7 @@
           <a:bodyPr wrap="square" lIns="0" tIns="0" rIns="0" bIns="0" rtlCol="0" anchor="ctr"/>
           <a:lstStyle/>
           <a:p>
-            <a:pPr indent="0" marL="0">
+            <a:pPr marL="0" indent="0">
               <a:buNone/>
             </a:pPr>
             <a:r>
@@ -3719,7 +3363,7 @@
           <a:bodyPr wrap="square" lIns="0" tIns="0" rIns="0" bIns="0" rtlCol="0" anchor="ctr"/>
           <a:lstStyle/>
           <a:p>
-            <a:pPr indent="0" marL="0">
+            <a:pPr marL="0" indent="0">
               <a:buNone/>
             </a:pPr>
             <a:r>
@@ -3758,7 +3402,7 @@
           <a:bodyPr wrap="square" lIns="0" tIns="0" rIns="0" bIns="0" rtlCol="0" anchor="ctr"/>
           <a:lstStyle/>
           <a:p>
-            <a:pPr indent="0" marL="0">
+            <a:pPr marL="0" indent="0">
               <a:buNone/>
             </a:pPr>
             <a:r>
@@ -3797,7 +3441,7 @@
           <a:bodyPr wrap="square" lIns="0" tIns="0" rIns="0" bIns="0" rtlCol="0" anchor="ctr"/>
           <a:lstStyle/>
           <a:p>
-            <a:pPr indent="0" marL="0">
+            <a:pPr marL="0" indent="0">
               <a:buNone/>
             </a:pPr>
             <a:r>
@@ -3836,7 +3480,7 @@
           <a:bodyPr wrap="square" lIns="0" tIns="0" rIns="0" bIns="0" rtlCol="0" anchor="ctr"/>
           <a:lstStyle/>
           <a:p>
-            <a:pPr indent="0" marL="0">
+            <a:pPr marL="0" indent="0">
               <a:buNone/>
             </a:pPr>
             <a:r>
@@ -3850,9 +3494,6 @@
               </a:rPr>
               <a:t>Docente  </a:t>
             </a:r>
-            <a:pPr indent="0" marL="0">
-              <a:buNone/>
-            </a:pPr>
             <a:r>
               <a:rPr lang="en-US" sz="1400" b="1" dirty="0">
                 <a:solidFill>
@@ -3889,7 +3530,7 @@
           <a:bodyPr wrap="square" lIns="0" tIns="0" rIns="0" bIns="0" rtlCol="0" anchor="ctr"/>
           <a:lstStyle/>
           <a:p>
-            <a:pPr indent="0" marL="0">
+            <a:pPr marL="0" indent="0">
               <a:buNone/>
             </a:pPr>
             <a:r>
@@ -5951,7 +5592,7 @@
           <a:bodyPr wrap="square" lIns="0" tIns="0" rIns="0" bIns="0" rtlCol="0" anchor="ctr"/>
           <a:lstStyle/>
           <a:p>
-            <a:pPr algn="ctr" indent="0" marL="0">
+            <a:pPr marL="0" indent="0" algn="ctr">
               <a:buNone/>
             </a:pPr>
             <a:r>
@@ -5985,6 +5626,7 @@
         <a:solidFill>
           <a:srgbClr val="F5F7FB"/>
         </a:solidFill>
+        <a:effectLst/>
       </p:bgPr>
     </p:bg>
     <p:spTree>
@@ -6049,11 +5691,11 @@
           <a:bodyPr wrap="square" lIns="0" tIns="0" rIns="0" bIns="0" rtlCol="0" anchor="ctr"/>
           <a:lstStyle/>
           <a:p>
-            <a:pPr algn="ctr" indent="0" marL="0">
+            <a:pPr marL="0" indent="0" algn="ctr">
               <a:buNone/>
             </a:pPr>
             <a:r>
-              <a:rPr lang="en-US" sz="1100" b="1" spc="150" kern="0" dirty="0">
+              <a:rPr lang="en-US" sz="1100" b="1" kern="0" spc="150" dirty="0">
                 <a:solidFill>
                   <a:srgbClr val="FFFFFF"/>
                 </a:solidFill>
@@ -6088,7 +5730,7 @@
           <a:bodyPr wrap="square" lIns="0" tIns="0" rIns="0" bIns="0" rtlCol="0" anchor="ctr"/>
           <a:lstStyle/>
           <a:p>
-            <a:pPr indent="0" marL="0">
+            <a:pPr marL="0" indent="0">
               <a:buNone/>
             </a:pPr>
             <a:r>
@@ -6127,7 +5769,7 @@
           <a:bodyPr wrap="square" lIns="0" tIns="0" rIns="0" bIns="0" rtlCol="0" anchor="ctr"/>
           <a:lstStyle/>
           <a:p>
-            <a:pPr indent="0" marL="0">
+            <a:pPr marL="0" indent="0">
               <a:buNone/>
             </a:pPr>
             <a:r>
@@ -6218,7 +5860,7 @@
           <a:bodyPr wrap="square" lIns="0" tIns="0" rIns="0" bIns="0" rtlCol="0" anchor="ctr"/>
           <a:lstStyle/>
           <a:p>
-            <a:pPr algn="ctr" indent="0" marL="0">
+            <a:pPr marL="0" indent="0" algn="ctr">
               <a:buNone/>
             </a:pPr>
             <a:r>
@@ -6257,7 +5899,7 @@
           <a:bodyPr wrap="square" lIns="0" tIns="0" rIns="0" bIns="0" rtlCol="0" anchor="t"/>
           <a:lstStyle/>
           <a:p>
-            <a:pPr indent="0" marL="0">
+            <a:pPr marL="0" indent="0">
               <a:buNone/>
             </a:pPr>
             <a:r>
@@ -6296,7 +5938,7 @@
           <a:bodyPr wrap="square" lIns="0" tIns="0" rIns="0" bIns="0" rtlCol="0" anchor="t"/>
           <a:lstStyle/>
           <a:p>
-            <a:pPr indent="0" marL="0">
+            <a:pPr marL="0" indent="0">
               <a:spcAft>
                 <a:spcPts val="400"/>
               </a:spcAft>
@@ -6414,7 +6056,7 @@
           <a:bodyPr wrap="square" lIns="0" tIns="0" rIns="0" bIns="0" rtlCol="0" anchor="ctr"/>
           <a:lstStyle/>
           <a:p>
-            <a:pPr algn="ctr" indent="0" marL="0">
+            <a:pPr marL="0" indent="0" algn="ctr">
               <a:buNone/>
             </a:pPr>
             <a:r>
@@ -6453,7 +6095,7 @@
           <a:bodyPr wrap="square" lIns="0" tIns="0" rIns="0" bIns="0" rtlCol="0" anchor="t"/>
           <a:lstStyle/>
           <a:p>
-            <a:pPr indent="0" marL="0">
+            <a:pPr marL="0" indent="0">
               <a:buNone/>
             </a:pPr>
             <a:r>
@@ -6492,7 +6134,7 @@
           <a:bodyPr wrap="square" lIns="0" tIns="0" rIns="0" bIns="0" rtlCol="0" anchor="t"/>
           <a:lstStyle/>
           <a:p>
-            <a:pPr indent="0" marL="0">
+            <a:pPr marL="0" indent="0">
               <a:spcAft>
                 <a:spcPts val="400"/>
               </a:spcAft>
@@ -6610,7 +6252,7 @@
           <a:bodyPr wrap="square" lIns="0" tIns="0" rIns="0" bIns="0" rtlCol="0" anchor="ctr"/>
           <a:lstStyle/>
           <a:p>
-            <a:pPr algn="ctr" indent="0" marL="0">
+            <a:pPr marL="0" indent="0" algn="ctr">
               <a:buNone/>
             </a:pPr>
             <a:r>
@@ -6649,7 +6291,7 @@
           <a:bodyPr wrap="square" lIns="0" tIns="0" rIns="0" bIns="0" rtlCol="0" anchor="t"/>
           <a:lstStyle/>
           <a:p>
-            <a:pPr indent="0" marL="0">
+            <a:pPr marL="0" indent="0">
               <a:buNone/>
             </a:pPr>
             <a:r>
@@ -6688,7 +6330,7 @@
           <a:bodyPr wrap="square" lIns="0" tIns="0" rIns="0" bIns="0" rtlCol="0" anchor="t"/>
           <a:lstStyle/>
           <a:p>
-            <a:pPr indent="0" marL="0">
+            <a:pPr marL="0" indent="0">
               <a:spcAft>
                 <a:spcPts val="400"/>
               </a:spcAft>
@@ -6806,7 +6448,7 @@
           <a:bodyPr wrap="square" lIns="0" tIns="0" rIns="0" bIns="0" rtlCol="0" anchor="ctr"/>
           <a:lstStyle/>
           <a:p>
-            <a:pPr algn="ctr" indent="0" marL="0">
+            <a:pPr marL="0" indent="0" algn="ctr">
               <a:buNone/>
             </a:pPr>
             <a:r>
@@ -6845,7 +6487,7 @@
           <a:bodyPr wrap="square" lIns="0" tIns="0" rIns="0" bIns="0" rtlCol="0" anchor="t"/>
           <a:lstStyle/>
           <a:p>
-            <a:pPr indent="0" marL="0">
+            <a:pPr marL="0" indent="0">
               <a:buNone/>
             </a:pPr>
             <a:r>
@@ -6884,7 +6526,7 @@
           <a:bodyPr wrap="square" lIns="0" tIns="0" rIns="0" bIns="0" rtlCol="0" anchor="t"/>
           <a:lstStyle/>
           <a:p>
-            <a:pPr indent="0" marL="0">
+            <a:pPr marL="0" indent="0">
               <a:spcAft>
                 <a:spcPts val="400"/>
               </a:spcAft>
@@ -7002,7 +6644,7 @@
           <a:bodyPr wrap="square" lIns="0" tIns="0" rIns="0" bIns="0" rtlCol="0" anchor="ctr"/>
           <a:lstStyle/>
           <a:p>
-            <a:pPr algn="ctr" indent="0" marL="0">
+            <a:pPr marL="0" indent="0" algn="ctr">
               <a:buNone/>
             </a:pPr>
             <a:r>
@@ -7041,7 +6683,7 @@
           <a:bodyPr wrap="square" lIns="0" tIns="0" rIns="0" bIns="0" rtlCol="0" anchor="t"/>
           <a:lstStyle/>
           <a:p>
-            <a:pPr indent="0" marL="0">
+            <a:pPr marL="0" indent="0">
               <a:buNone/>
             </a:pPr>
             <a:r>
@@ -7080,7 +6722,7 @@
           <a:bodyPr wrap="square" lIns="0" tIns="0" rIns="0" bIns="0" rtlCol="0" anchor="t"/>
           <a:lstStyle/>
           <a:p>
-            <a:pPr indent="0" marL="0">
+            <a:pPr marL="0" indent="0">
               <a:spcAft>
                 <a:spcPts val="400"/>
               </a:spcAft>
@@ -7198,7 +6840,7 @@
           <a:bodyPr wrap="square" lIns="0" tIns="0" rIns="0" bIns="0" rtlCol="0" anchor="ctr"/>
           <a:lstStyle/>
           <a:p>
-            <a:pPr algn="ctr" indent="0" marL="0">
+            <a:pPr marL="0" indent="0" algn="ctr">
               <a:buNone/>
             </a:pPr>
             <a:r>
@@ -7237,7 +6879,7 @@
           <a:bodyPr wrap="square" lIns="0" tIns="0" rIns="0" bIns="0" rtlCol="0" anchor="t"/>
           <a:lstStyle/>
           <a:p>
-            <a:pPr indent="0" marL="0">
+            <a:pPr marL="0" indent="0">
               <a:buNone/>
             </a:pPr>
             <a:r>
@@ -7276,7 +6918,7 @@
           <a:bodyPr wrap="square" lIns="0" tIns="0" rIns="0" bIns="0" rtlCol="0" anchor="t"/>
           <a:lstStyle/>
           <a:p>
-            <a:pPr indent="0" marL="0">
+            <a:pPr marL="0" indent="0">
               <a:spcAft>
                 <a:spcPts val="400"/>
               </a:spcAft>
@@ -7306,7 +6948,7 @@
         <p:spPr>
           <a:xfrm>
             <a:off x="8928202" y="4681728"/>
-            <a:ext cx="-7556602" cy="0"/>
+            <a:ext cx="0" cy="0"/>
           </a:xfrm>
           <a:prstGeom prst="line">
             <a:avLst/>
@@ -7342,7 +6984,7 @@
           <a:bodyPr wrap="square" lIns="0" tIns="0" rIns="0" bIns="0" rtlCol="0" anchor="ctr"/>
           <a:lstStyle/>
           <a:p>
-            <a:pPr algn="ctr" indent="0" marL="0">
+            <a:pPr marL="0" indent="0" algn="ctr">
               <a:buNone/>
             </a:pPr>
             <a:r>
@@ -7435,7 +7077,7 @@
           <a:bodyPr wrap="square" lIns="0" tIns="0" rIns="0" bIns="0" rtlCol="0" anchor="ctr"/>
           <a:lstStyle/>
           <a:p>
-            <a:pPr indent="0" marL="0">
+            <a:pPr marL="0" indent="0">
               <a:buNone/>
             </a:pPr>
             <a:r>
@@ -7474,7 +7116,7 @@
           <a:bodyPr wrap="square" lIns="0" tIns="0" rIns="0" bIns="0" rtlCol="0" anchor="t"/>
           <a:lstStyle/>
           <a:p>
-            <a:pPr indent="0" marL="0">
+            <a:pPr marL="0" indent="0">
               <a:spcAft>
                 <a:spcPts val="400"/>
               </a:spcAft>
@@ -7516,7 +7158,7 @@
           <a:bodyPr wrap="square" lIns="0" tIns="0" rIns="0" bIns="0" rtlCol="0" anchor="ctr"/>
           <a:lstStyle/>
           <a:p>
-            <a:pPr indent="0" marL="0">
+            <a:pPr marL="0" indent="0">
               <a:buNone/>
             </a:pPr>
             <a:r>
@@ -7550,6 +7192,7 @@
         <a:solidFill>
           <a:srgbClr val="F5F7FB"/>
         </a:solidFill>
+        <a:effectLst/>
       </p:bgPr>
     </p:bg>
     <p:spTree>
@@ -7614,11 +7257,11 @@
           <a:bodyPr wrap="square" lIns="0" tIns="0" rIns="0" bIns="0" rtlCol="0" anchor="ctr"/>
           <a:lstStyle/>
           <a:p>
-            <a:pPr algn="ctr" indent="0" marL="0">
+            <a:pPr marL="0" indent="0" algn="ctr">
               <a:buNone/>
             </a:pPr>
             <a:r>
-              <a:rPr lang="en-US" sz="1100" b="1" spc="150" kern="0" dirty="0">
+              <a:rPr lang="en-US" sz="1100" b="1" kern="0" spc="150" dirty="0">
                 <a:solidFill>
                   <a:srgbClr val="FFFFFF"/>
                 </a:solidFill>
@@ -7653,7 +7296,7 @@
           <a:bodyPr wrap="square" lIns="0" tIns="0" rIns="0" bIns="0" rtlCol="0" anchor="ctr"/>
           <a:lstStyle/>
           <a:p>
-            <a:pPr indent="0" marL="0">
+            <a:pPr marL="0" indent="0">
               <a:buNone/>
             </a:pPr>
             <a:r>
@@ -7692,7 +7335,7 @@
           <a:bodyPr wrap="square" lIns="0" tIns="0" rIns="0" bIns="0" rtlCol="0" anchor="ctr"/>
           <a:lstStyle/>
           <a:p>
-            <a:pPr indent="0" marL="0">
+            <a:pPr marL="0" indent="0">
               <a:buNone/>
             </a:pPr>
             <a:r>
@@ -7712,7 +7355,7 @@
       </p:sp>
       <p:graphicFrame>
         <p:nvGraphicFramePr>
-          <p:cNvPr id="6" name="Chart 0" descr=""/>
+          <p:cNvPr id="6" name="Chart 0"/>
           <p:cNvGraphicFramePr/>
           <p:nvPr/>
         </p:nvGraphicFramePr>
@@ -7720,9 +7363,9 @@
           <a:off x="502920" y="2057400"/>
           <a:ext cx="6675120" cy="3291840"/>
         </p:xfrm>
-        <a:graphic xmlns:a="http://schemas.openxmlformats.org/drawingml/2006/main">
+        <a:graphic>
           <a:graphicData uri="http://schemas.openxmlformats.org/drawingml/2006/chart">
-            <c:chart xmlns:c="http://schemas.openxmlformats.org/drawingml/2006/chart" r:id="rId1"/>
+            <c:chart xmlns:c="http://schemas.openxmlformats.org/drawingml/2006/chart" xmlns:r="http://schemas.openxmlformats.org/officeDocument/2006/relationships" r:id="rId3"/>
           </a:graphicData>
         </a:graphic>
       </p:graphicFrame>
@@ -7747,7 +7390,7 @@
           <a:bodyPr wrap="square" lIns="0" tIns="0" rIns="0" bIns="0" rtlCol="0" anchor="t"/>
           <a:lstStyle/>
           <a:p>
-            <a:pPr indent="0" marL="0">
+            <a:pPr marL="0" indent="0">
               <a:spcAft>
                 <a:spcPts val="400"/>
               </a:spcAft>
@@ -7843,7 +7486,7 @@
           <a:bodyPr wrap="square" lIns="0" tIns="0" rIns="0" bIns="0" rtlCol="0" anchor="ctr"/>
           <a:lstStyle/>
           <a:p>
-            <a:pPr indent="0" marL="0">
+            <a:pPr marL="0" indent="0">
               <a:buNone/>
             </a:pPr>
             <a:r>
@@ -7882,7 +7525,7 @@
           <a:bodyPr wrap="square" lIns="0" tIns="0" rIns="0" bIns="0" rtlCol="0" anchor="ctr"/>
           <a:lstStyle/>
           <a:p>
-            <a:pPr algn="r" indent="0" marL="0">
+            <a:pPr marL="0" indent="0" algn="r">
               <a:buNone/>
             </a:pPr>
             <a:r>
@@ -7921,7 +7564,7 @@
           <a:bodyPr wrap="square" lIns="0" tIns="0" rIns="0" bIns="0" rtlCol="0" anchor="t"/>
           <a:lstStyle/>
           <a:p>
-            <a:pPr indent="0" marL="0">
+            <a:pPr marL="0" indent="0">
               <a:spcAft>
                 <a:spcPts val="400"/>
               </a:spcAft>
@@ -8017,7 +7660,7 @@
           <a:bodyPr wrap="square" lIns="0" tIns="0" rIns="0" bIns="0" rtlCol="0" anchor="ctr"/>
           <a:lstStyle/>
           <a:p>
-            <a:pPr indent="0" marL="0">
+            <a:pPr marL="0" indent="0">
               <a:buNone/>
             </a:pPr>
             <a:r>
@@ -8056,7 +7699,7 @@
           <a:bodyPr wrap="square" lIns="0" tIns="0" rIns="0" bIns="0" rtlCol="0" anchor="ctr"/>
           <a:lstStyle/>
           <a:p>
-            <a:pPr algn="r" indent="0" marL="0">
+            <a:pPr marL="0" indent="0" algn="r">
               <a:buNone/>
             </a:pPr>
             <a:r>
@@ -8095,7 +7738,7 @@
           <a:bodyPr wrap="square" lIns="0" tIns="0" rIns="0" bIns="0" rtlCol="0" anchor="t"/>
           <a:lstStyle/>
           <a:p>
-            <a:pPr indent="0" marL="0">
+            <a:pPr marL="0" indent="0">
               <a:spcAft>
                 <a:spcPts val="400"/>
               </a:spcAft>
@@ -8191,7 +7834,7 @@
           <a:bodyPr wrap="square" lIns="0" tIns="0" rIns="0" bIns="0" rtlCol="0" anchor="ctr"/>
           <a:lstStyle/>
           <a:p>
-            <a:pPr indent="0" marL="0">
+            <a:pPr marL="0" indent="0">
               <a:buNone/>
             </a:pPr>
             <a:r>
@@ -8230,7 +7873,7 @@
           <a:bodyPr wrap="square" lIns="0" tIns="0" rIns="0" bIns="0" rtlCol="0" anchor="ctr"/>
           <a:lstStyle/>
           <a:p>
-            <a:pPr algn="r" indent="0" marL="0">
+            <a:pPr marL="0" indent="0" algn="r">
               <a:buNone/>
             </a:pPr>
             <a:r>
@@ -8269,7 +7912,7 @@
           <a:bodyPr wrap="square" lIns="0" tIns="0" rIns="0" bIns="0" rtlCol="0" anchor="t"/>
           <a:lstStyle/>
           <a:p>
-            <a:pPr indent="0" marL="0">
+            <a:pPr marL="0" indent="0">
               <a:spcAft>
                 <a:spcPts val="400"/>
               </a:spcAft>
@@ -8311,7 +7954,7 @@
           <a:bodyPr wrap="square" lIns="0" tIns="0" rIns="0" bIns="0" rtlCol="0" anchor="t"/>
           <a:lstStyle/>
           <a:p>
-            <a:pPr algn="r" indent="0" marL="0">
+            <a:pPr marL="0" indent="0" algn="r">
               <a:spcAft>
                 <a:spcPts val="400"/>
               </a:spcAft>
@@ -8380,7 +8023,7 @@
           <a:bodyPr wrap="square" lIns="0" tIns="0" rIns="0" bIns="0" rtlCol="0" anchor="ctr"/>
           <a:lstStyle/>
           <a:p>
-            <a:pPr indent="0" marL="0">
+            <a:pPr marL="0" indent="0">
               <a:spcAft>
                 <a:spcPts val="400"/>
               </a:spcAft>
@@ -8397,12 +8040,6 @@
               </a:rPr>
               <a:t>La señal de alarma: </a:t>
             </a:r>
-            <a:pPr indent="0" marL="0">
-              <a:spcAft>
-                <a:spcPts val="400"/>
-              </a:spcAft>
-              <a:buNone/>
-            </a:pPr>
             <a:r>
               <a:rPr lang="en-US" sz="1300" dirty="0">
                 <a:solidFill>
@@ -8434,6 +8071,7 @@
         <a:solidFill>
           <a:srgbClr val="F5F7FB"/>
         </a:solidFill>
+        <a:effectLst/>
       </p:bgPr>
     </p:bg>
     <p:spTree>
@@ -8498,11 +8136,11 @@
           <a:bodyPr wrap="square" lIns="0" tIns="0" rIns="0" bIns="0" rtlCol="0" anchor="ctr"/>
           <a:lstStyle/>
           <a:p>
-            <a:pPr algn="ctr" indent="0" marL="0">
+            <a:pPr marL="0" indent="0" algn="ctr">
               <a:buNone/>
             </a:pPr>
             <a:r>
-              <a:rPr lang="en-US" sz="1100" b="1" spc="150" kern="0" dirty="0">
+              <a:rPr lang="en-US" sz="1100" b="1" kern="0" spc="150" dirty="0">
                 <a:solidFill>
                   <a:srgbClr val="FFFFFF"/>
                 </a:solidFill>
@@ -8537,7 +8175,7 @@
           <a:bodyPr wrap="square" lIns="0" tIns="0" rIns="0" bIns="0" rtlCol="0" anchor="ctr"/>
           <a:lstStyle/>
           <a:p>
-            <a:pPr indent="0" marL="0">
+            <a:pPr marL="0" indent="0">
               <a:buNone/>
             </a:pPr>
             <a:r>
@@ -8576,7 +8214,7 @@
           <a:bodyPr wrap="square" lIns="0" tIns="0" rIns="0" bIns="0" rtlCol="0" anchor="ctr"/>
           <a:lstStyle/>
           <a:p>
-            <a:pPr indent="0" marL="0">
+            <a:pPr marL="0" indent="0">
               <a:buNone/>
             </a:pPr>
             <a:r>
@@ -8642,11 +8280,11 @@
           <a:bodyPr wrap="square" lIns="0" tIns="0" rIns="0" bIns="0" rtlCol="0" anchor="ctr"/>
           <a:lstStyle/>
           <a:p>
-            <a:pPr algn="ctr" indent="0" marL="0">
+            <a:pPr marL="0" indent="0" algn="ctr">
               <a:buNone/>
             </a:pPr>
             <a:r>
-              <a:rPr lang="en-US" sz="1400" b="1" spc="100" kern="0" dirty="0">
+              <a:rPr lang="en-US" sz="1400" b="1" kern="0" spc="100" dirty="0">
                 <a:solidFill>
                   <a:srgbClr val="FFFFFF"/>
                 </a:solidFill>
@@ -8681,7 +8319,7 @@
           <a:bodyPr wrap="square" lIns="0" tIns="0" rIns="0" bIns="0" rtlCol="0" anchor="ctr"/>
           <a:lstStyle/>
           <a:p>
-            <a:pPr algn="ctr" indent="0" marL="0">
+            <a:pPr marL="0" indent="0" algn="ctr">
               <a:buNone/>
             </a:pPr>
             <a:r>
@@ -8747,11 +8385,11 @@
           <a:bodyPr wrap="square" lIns="0" tIns="0" rIns="0" bIns="0" rtlCol="0" anchor="ctr"/>
           <a:lstStyle/>
           <a:p>
-            <a:pPr algn="ctr" indent="0" marL="0">
+            <a:pPr marL="0" indent="0" algn="ctr">
               <a:buNone/>
             </a:pPr>
             <a:r>
-              <a:rPr lang="en-US" sz="1400" b="1" spc="100" kern="0" dirty="0">
+              <a:rPr lang="en-US" sz="1400" b="1" kern="0" spc="100" dirty="0">
                 <a:solidFill>
                   <a:srgbClr val="FFFFFF"/>
                 </a:solidFill>
@@ -8786,7 +8424,7 @@
           <a:bodyPr wrap="square" lIns="0" tIns="0" rIns="0" bIns="0" rtlCol="0" anchor="ctr"/>
           <a:lstStyle/>
           <a:p>
-            <a:pPr algn="ctr" indent="0" marL="0">
+            <a:pPr marL="0" indent="0" algn="ctr">
               <a:buNone/>
             </a:pPr>
             <a:r>
@@ -8852,11 +8490,11 @@
           <a:bodyPr wrap="square" lIns="0" tIns="0" rIns="0" bIns="0" rtlCol="0" anchor="ctr"/>
           <a:lstStyle/>
           <a:p>
-            <a:pPr algn="ctr" indent="0" marL="0">
+            <a:pPr marL="0" indent="0" algn="ctr">
               <a:buNone/>
             </a:pPr>
             <a:r>
-              <a:rPr lang="en-US" sz="1400" b="1" spc="100" kern="0" dirty="0">
+              <a:rPr lang="en-US" sz="1400" b="1" kern="0" spc="100" dirty="0">
                 <a:solidFill>
                   <a:srgbClr val="FFFFFF"/>
                 </a:solidFill>
@@ -8891,7 +8529,7 @@
           <a:bodyPr wrap="square" lIns="0" tIns="0" rIns="0" bIns="0" rtlCol="0" anchor="ctr"/>
           <a:lstStyle/>
           <a:p>
-            <a:pPr algn="ctr" indent="0" marL="0">
+            <a:pPr marL="0" indent="0" algn="ctr">
               <a:buNone/>
             </a:pPr>
             <a:r>
@@ -8984,7 +8622,7 @@
           <a:bodyPr wrap="square" lIns="0" tIns="0" rIns="0" bIns="0" rtlCol="0" anchor="ctr"/>
           <a:lstStyle/>
           <a:p>
-            <a:pPr indent="0" marL="0">
+            <a:pPr marL="0" indent="0">
               <a:buNone/>
             </a:pPr>
             <a:r>
@@ -9023,7 +8661,7 @@
           <a:bodyPr wrap="square" lIns="0" tIns="0" rIns="0" bIns="0" rtlCol="0" anchor="t"/>
           <a:lstStyle/>
           <a:p>
-            <a:pPr indent="0" marL="0">
+            <a:pPr marL="0" indent="0">
               <a:spcAft>
                 <a:spcPts val="400"/>
               </a:spcAft>
@@ -9119,7 +8757,7 @@
           <a:bodyPr wrap="square" lIns="0" tIns="0" rIns="0" bIns="0" rtlCol="0" anchor="ctr"/>
           <a:lstStyle/>
           <a:p>
-            <a:pPr indent="0" marL="0">
+            <a:pPr marL="0" indent="0">
               <a:buNone/>
             </a:pPr>
             <a:r>
@@ -9158,7 +8796,7 @@
           <a:bodyPr wrap="square" lIns="0" tIns="0" rIns="0" bIns="0" rtlCol="0" anchor="t"/>
           <a:lstStyle/>
           <a:p>
-            <a:pPr indent="0" marL="0">
+            <a:pPr marL="0" indent="0">
               <a:spcAft>
                 <a:spcPts val="400"/>
               </a:spcAft>
@@ -9254,7 +8892,7 @@
           <a:bodyPr wrap="square" lIns="0" tIns="0" rIns="0" bIns="0" rtlCol="0" anchor="ctr"/>
           <a:lstStyle/>
           <a:p>
-            <a:pPr indent="0" marL="0">
+            <a:pPr marL="0" indent="0">
               <a:buNone/>
             </a:pPr>
             <a:r>
@@ -9293,7 +8931,7 @@
           <a:bodyPr wrap="square" lIns="0" tIns="0" rIns="0" bIns="0" rtlCol="0" anchor="t"/>
           <a:lstStyle/>
           <a:p>
-            <a:pPr indent="0" marL="0">
+            <a:pPr marL="0" indent="0">
               <a:spcAft>
                 <a:spcPts val="400"/>
               </a:spcAft>
@@ -9362,7 +9000,7 @@
           <a:bodyPr wrap="square" lIns="0" tIns="0" rIns="0" bIns="0" rtlCol="0" anchor="ctr"/>
           <a:lstStyle/>
           <a:p>
-            <a:pPr indent="0" marL="0">
+            <a:pPr marL="0" indent="0">
               <a:spcAft>
                 <a:spcPts val="400"/>
               </a:spcAft>
@@ -9379,12 +9017,6 @@
               </a:rPr>
               <a:t>¿Y si tengo pocos datos? </a:t>
             </a:r>
-            <a:pPr indent="0" marL="0">
-              <a:spcAft>
-                <a:spcPts val="400"/>
-              </a:spcAft>
-              <a:buNone/>
-            </a:pPr>
             <a:r>
               <a:rPr lang="en-US" sz="1250" dirty="0">
                 <a:solidFill>
@@ -9416,6 +9048,7 @@
         <a:solidFill>
           <a:srgbClr val="F5F7FB"/>
         </a:solidFill>
+        <a:effectLst/>
       </p:bgPr>
     </p:bg>
     <p:spTree>
@@ -9480,11 +9113,11 @@
           <a:bodyPr wrap="square" lIns="0" tIns="0" rIns="0" bIns="0" rtlCol="0" anchor="ctr"/>
           <a:lstStyle/>
           <a:p>
-            <a:pPr algn="ctr" indent="0" marL="0">
+            <a:pPr marL="0" indent="0" algn="ctr">
               <a:buNone/>
             </a:pPr>
             <a:r>
-              <a:rPr lang="en-US" sz="1100" b="1" spc="150" kern="0" dirty="0">
+              <a:rPr lang="en-US" sz="1100" b="1" kern="0" spc="150" dirty="0">
                 <a:solidFill>
                   <a:srgbClr val="FFFFFF"/>
                 </a:solidFill>
@@ -9519,7 +9152,7 @@
           <a:bodyPr wrap="square" lIns="0" tIns="0" rIns="0" bIns="0" rtlCol="0" anchor="ctr"/>
           <a:lstStyle/>
           <a:p>
-            <a:pPr indent="0" marL="0">
+            <a:pPr marL="0" indent="0">
               <a:buNone/>
             </a:pPr>
             <a:r>
@@ -9558,7 +9191,7 @@
           <a:bodyPr wrap="square" lIns="0" tIns="0" rIns="0" bIns="0" rtlCol="0" anchor="ctr"/>
           <a:lstStyle/>
           <a:p>
-            <a:pPr indent="0" marL="0">
+            <a:pPr marL="0" indent="0">
               <a:buNone/>
             </a:pPr>
             <a:r>
@@ -9578,7 +9211,7 @@
       </p:sp>
       <p:graphicFrame>
         <p:nvGraphicFramePr>
-          <p:cNvPr id="6" name="Chart 0" descr=""/>
+          <p:cNvPr id="6" name="Chart 0"/>
           <p:cNvGraphicFramePr/>
           <p:nvPr/>
         </p:nvGraphicFramePr>
@@ -9586,9 +9219,9 @@
           <a:off x="502920" y="2057400"/>
           <a:ext cx="6675120" cy="3657600"/>
         </p:xfrm>
-        <a:graphic xmlns:a="http://schemas.openxmlformats.org/drawingml/2006/main">
+        <a:graphic>
           <a:graphicData uri="http://schemas.openxmlformats.org/drawingml/2006/chart">
-            <c:chart xmlns:c="http://schemas.openxmlformats.org/drawingml/2006/chart" r:id="rId1"/>
+            <c:chart xmlns:c="http://schemas.openxmlformats.org/drawingml/2006/chart" xmlns:r="http://schemas.openxmlformats.org/officeDocument/2006/relationships" r:id="rId3"/>
           </a:graphicData>
         </a:graphic>
       </p:graphicFrame>
@@ -9640,7 +9273,7 @@
           <a:bodyPr wrap="square" lIns="0" tIns="0" rIns="0" bIns="0" rtlCol="0" anchor="ctr"/>
           <a:lstStyle/>
           <a:p>
-            <a:pPr indent="0" marL="0">
+            <a:pPr marL="0" indent="0">
               <a:buNone/>
             </a:pPr>
             <a:r>
@@ -9679,7 +9312,7 @@
           <a:bodyPr wrap="square" lIns="0" tIns="0" rIns="0" bIns="0" rtlCol="0" anchor="t"/>
           <a:lstStyle/>
           <a:p>
-            <a:pPr indent="0" marL="0">
+            <a:pPr marL="0" indent="0">
               <a:spcAft>
                 <a:spcPts val="400"/>
               </a:spcAft>
@@ -9699,7 +9332,7 @@
             <a:endParaRPr lang="en-US" sz="1250" dirty="0"/>
           </a:p>
           <a:p>
-            <a:pPr indent="0" marL="0">
+            <a:pPr marL="0" indent="0">
               <a:spcAft>
                 <a:spcPts val="400"/>
               </a:spcAft>
@@ -9719,7 +9352,7 @@
             <a:endParaRPr lang="en-US" sz="1250" dirty="0"/>
           </a:p>
           <a:p>
-            <a:pPr indent="0" marL="0">
+            <a:pPr marL="0" indent="0">
               <a:spcAft>
                 <a:spcPts val="400"/>
               </a:spcAft>
@@ -9815,7 +9448,7 @@
           <a:bodyPr wrap="square" lIns="0" tIns="0" rIns="0" bIns="0" rtlCol="0" anchor="ctr"/>
           <a:lstStyle/>
           <a:p>
-            <a:pPr indent="0" marL="0">
+            <a:pPr marL="0" indent="0">
               <a:buNone/>
             </a:pPr>
             <a:r>
@@ -9854,7 +9487,7 @@
           <a:bodyPr wrap="square" lIns="0" tIns="0" rIns="0" bIns="0" rtlCol="0" anchor="t"/>
           <a:lstStyle/>
           <a:p>
-            <a:pPr indent="0" marL="0">
+            <a:pPr marL="0" indent="0">
               <a:spcAft>
                 <a:spcPts val="400"/>
               </a:spcAft>
@@ -9950,7 +9583,7 @@
           <a:bodyPr wrap="square" lIns="0" tIns="0" rIns="0" bIns="0" rtlCol="0" anchor="ctr"/>
           <a:lstStyle/>
           <a:p>
-            <a:pPr indent="0" marL="0">
+            <a:pPr marL="0" indent="0">
               <a:buNone/>
             </a:pPr>
             <a:r>
@@ -9989,7 +9622,7 @@
           <a:bodyPr wrap="square" lIns="0" tIns="0" rIns="0" bIns="0" rtlCol="0" anchor="t"/>
           <a:lstStyle/>
           <a:p>
-            <a:pPr indent="0" marL="0">
+            <a:pPr marL="0" indent="0">
               <a:spcAft>
                 <a:spcPts val="400"/>
               </a:spcAft>
@@ -10031,7 +9664,7 @@
           <a:bodyPr wrap="square" lIns="0" tIns="0" rIns="0" bIns="0" rtlCol="0" anchor="t"/>
           <a:lstStyle/>
           <a:p>
-            <a:pPr indent="0" marL="0">
+            <a:pPr marL="0" indent="0">
               <a:spcAft>
                 <a:spcPts val="400"/>
               </a:spcAft>
@@ -10068,6 +9701,7 @@
         <a:solidFill>
           <a:srgbClr val="F5F7FB"/>
         </a:solidFill>
+        <a:effectLst/>
       </p:bgPr>
     </p:bg>
     <p:spTree>
@@ -10132,11 +9766,11 @@
           <a:bodyPr wrap="square" lIns="0" tIns="0" rIns="0" bIns="0" rtlCol="0" anchor="ctr"/>
           <a:lstStyle/>
           <a:p>
-            <a:pPr algn="ctr" indent="0" marL="0">
+            <a:pPr marL="0" indent="0" algn="ctr">
               <a:buNone/>
             </a:pPr>
             <a:r>
-              <a:rPr lang="en-US" sz="1100" b="1" spc="150" kern="0" dirty="0">
+              <a:rPr lang="en-US" sz="1100" b="1" kern="0" spc="150" dirty="0">
                 <a:solidFill>
                   <a:srgbClr val="FFFFFF"/>
                 </a:solidFill>
@@ -10171,7 +9805,7 @@
           <a:bodyPr wrap="square" lIns="0" tIns="0" rIns="0" bIns="0" rtlCol="0" anchor="ctr"/>
           <a:lstStyle/>
           <a:p>
-            <a:pPr indent="0" marL="0">
+            <a:pPr marL="0" indent="0">
               <a:buNone/>
             </a:pPr>
             <a:r>
@@ -10210,7 +9844,7 @@
           <a:bodyPr wrap="square" lIns="0" tIns="0" rIns="0" bIns="0" rtlCol="0" anchor="ctr"/>
           <a:lstStyle/>
           <a:p>
-            <a:pPr indent="0" marL="0">
+            <a:pPr marL="0" indent="0">
               <a:buNone/>
             </a:pPr>
             <a:r>
@@ -10276,7 +9910,7 @@
           <a:bodyPr wrap="square" lIns="0" tIns="0" rIns="0" bIns="0" rtlCol="0" anchor="ctr"/>
           <a:lstStyle/>
           <a:p>
-            <a:pPr indent="0" marL="0">
+            <a:pPr marL="0" indent="0">
               <a:buNone/>
             </a:pPr>
             <a:r>
@@ -10315,7 +9949,7 @@
           <a:bodyPr wrap="square" lIns="0" tIns="0" rIns="0" bIns="0" rtlCol="0" anchor="t"/>
           <a:lstStyle/>
           <a:p>
-            <a:pPr indent="0" marL="0">
+            <a:pPr marL="0" indent="0">
               <a:spcAft>
                 <a:spcPts val="400"/>
               </a:spcAft>
@@ -10384,7 +10018,7 @@
           <a:bodyPr wrap="square" lIns="0" tIns="0" rIns="0" bIns="0" rtlCol="0" anchor="ctr"/>
           <a:lstStyle/>
           <a:p>
-            <a:pPr indent="0" marL="0">
+            <a:pPr marL="0" indent="0">
               <a:buNone/>
             </a:pPr>
             <a:r>
@@ -10423,7 +10057,7 @@
           <a:bodyPr wrap="square" lIns="0" tIns="0" rIns="0" bIns="0" rtlCol="0" anchor="t"/>
           <a:lstStyle/>
           <a:p>
-            <a:pPr indent="0" marL="0">
+            <a:pPr marL="0" indent="0">
               <a:spcAft>
                 <a:spcPts val="400"/>
               </a:spcAft>
@@ -10492,7 +10126,7 @@
           <a:bodyPr wrap="square" lIns="0" tIns="0" rIns="0" bIns="0" rtlCol="0" anchor="ctr"/>
           <a:lstStyle/>
           <a:p>
-            <a:pPr indent="0" marL="0">
+            <a:pPr marL="0" indent="0">
               <a:buNone/>
             </a:pPr>
             <a:r>
@@ -10531,7 +10165,7 @@
           <a:bodyPr wrap="square" lIns="0" tIns="0" rIns="0" bIns="0" rtlCol="0" anchor="t"/>
           <a:lstStyle/>
           <a:p>
-            <a:pPr indent="0" marL="0">
+            <a:pPr marL="0" indent="0">
               <a:spcAft>
                 <a:spcPts val="400"/>
               </a:spcAft>
@@ -10627,7 +10261,7 @@
           <a:bodyPr wrap="square" lIns="0" tIns="0" rIns="0" bIns="0" rtlCol="0" anchor="ctr"/>
           <a:lstStyle/>
           <a:p>
-            <a:pPr indent="0" marL="0">
+            <a:pPr marL="0" indent="0">
               <a:buNone/>
             </a:pPr>
             <a:r>
@@ -10666,7 +10300,7 @@
           <a:bodyPr wrap="square" lIns="0" tIns="0" rIns="0" bIns="0" rtlCol="0" anchor="t"/>
           <a:lstStyle/>
           <a:p>
-            <a:pPr indent="0" marL="0">
+            <a:pPr marL="0" indent="0">
               <a:spcAft>
                 <a:spcPts val="400"/>
               </a:spcAft>
@@ -10762,7 +10396,7 @@
           <a:bodyPr wrap="square" lIns="0" tIns="0" rIns="0" bIns="0" rtlCol="0" anchor="ctr"/>
           <a:lstStyle/>
           <a:p>
-            <a:pPr indent="0" marL="0">
+            <a:pPr marL="0" indent="0">
               <a:buNone/>
             </a:pPr>
             <a:r>
@@ -10801,7 +10435,7 @@
           <a:bodyPr wrap="square" lIns="0" tIns="0" rIns="0" bIns="0" rtlCol="0" anchor="t"/>
           <a:lstStyle/>
           <a:p>
-            <a:pPr indent="0" marL="0">
+            <a:pPr marL="0" indent="0">
               <a:spcAft>
                 <a:spcPts val="400"/>
               </a:spcAft>
@@ -10843,7 +10477,7 @@
           <a:bodyPr wrap="square" lIns="0" tIns="0" rIns="0" bIns="0" rtlCol="0" anchor="ctr"/>
           <a:lstStyle/>
           <a:p>
-            <a:pPr indent="0" marL="0">
+            <a:pPr marL="0" indent="0">
               <a:buNone/>
             </a:pPr>
             <a:r>
@@ -10877,6 +10511,7 @@
         <a:solidFill>
           <a:srgbClr val="F5F7FB"/>
         </a:solidFill>
+        <a:effectLst/>
       </p:bgPr>
     </p:bg>
     <p:spTree>
@@ -10941,11 +10576,11 @@
           <a:bodyPr wrap="square" lIns="0" tIns="0" rIns="0" bIns="0" rtlCol="0" anchor="ctr"/>
           <a:lstStyle/>
           <a:p>
-            <a:pPr algn="ctr" indent="0" marL="0">
+            <a:pPr marL="0" indent="0" algn="ctr">
               <a:buNone/>
             </a:pPr>
             <a:r>
-              <a:rPr lang="en-US" sz="1100" b="1" spc="150" kern="0" dirty="0">
+              <a:rPr lang="en-US" sz="1100" b="1" kern="0" spc="150" dirty="0">
                 <a:solidFill>
                   <a:srgbClr val="FFFFFF"/>
                 </a:solidFill>
@@ -10980,7 +10615,7 @@
           <a:bodyPr wrap="square" lIns="0" tIns="0" rIns="0" bIns="0" rtlCol="0" anchor="ctr"/>
           <a:lstStyle/>
           <a:p>
-            <a:pPr indent="0" marL="0">
+            <a:pPr marL="0" indent="0">
               <a:buNone/>
             </a:pPr>
             <a:r>
@@ -11019,7 +10654,7 @@
           <a:bodyPr wrap="square" lIns="0" tIns="0" rIns="0" bIns="0" rtlCol="0" anchor="ctr"/>
           <a:lstStyle/>
           <a:p>
-            <a:pPr indent="0" marL="0">
+            <a:pPr marL="0" indent="0">
               <a:buNone/>
             </a:pPr>
             <a:r>
@@ -11085,7 +10720,7 @@
           <a:bodyPr wrap="square" lIns="0" tIns="0" rIns="0" bIns="0" rtlCol="0" anchor="t"/>
           <a:lstStyle/>
           <a:p>
-            <a:pPr indent="0" marL="0">
+            <a:pPr marL="0" indent="0">
               <a:spcAft>
                 <a:spcPts val="600"/>
               </a:spcAft>
@@ -11105,7 +10740,7 @@
             <a:endParaRPr lang="en-US" sz="1250" dirty="0"/>
           </a:p>
           <a:p>
-            <a:pPr indent="0" marL="0">
+            <a:pPr marL="0" indent="0">
               <a:spcAft>
                 <a:spcPts val="600"/>
               </a:spcAft>
@@ -11125,7 +10760,7 @@
             <a:endParaRPr lang="en-US" sz="1250" dirty="0"/>
           </a:p>
           <a:p>
-            <a:pPr indent="0" marL="0">
+            <a:pPr marL="0" indent="0">
               <a:spcAft>
                 <a:spcPts val="600"/>
               </a:spcAft>
@@ -11142,12 +10777,6 @@
               </a:rPr>
               <a:t>modelo.fit(X_train, y_train)</a:t>
             </a:r>
-            <a:pPr indent="0" marL="0">
-              <a:spcAft>
-                <a:spcPts val="600"/>
-              </a:spcAft>
-              <a:buNone/>
-            </a:pPr>
             <a:r>
               <a:rPr lang="en-US" sz="1250" dirty="0">
                 <a:solidFill>
@@ -11162,7 +10791,7 @@
             <a:endParaRPr lang="en-US" sz="1250" dirty="0"/>
           </a:p>
           <a:p>
-            <a:pPr indent="0" marL="0">
+            <a:pPr marL="0" indent="0">
               <a:spcAft>
                 <a:spcPts val="600"/>
               </a:spcAft>
@@ -11179,12 +10808,6 @@
               </a:rPr>
               <a:t>modelo.predict(X_nuevo)</a:t>
             </a:r>
-            <a:pPr indent="0" marL="0">
-              <a:spcAft>
-                <a:spcPts val="600"/>
-              </a:spcAft>
-              <a:buNone/>
-            </a:pPr>
             <a:r>
               <a:rPr lang="en-US" sz="1250" dirty="0">
                 <a:solidFill>
@@ -11199,7 +10822,7 @@
             <a:endParaRPr lang="en-US" sz="1250" dirty="0"/>
           </a:p>
           <a:p>
-            <a:pPr indent="0" marL="0">
+            <a:pPr marL="0" indent="0">
               <a:spcAft>
                 <a:spcPts val="600"/>
               </a:spcAft>
@@ -11216,12 +10839,6 @@
               </a:rPr>
               <a:t>modelo.predict_proba(X_nuevo)</a:t>
             </a:r>
-            <a:pPr indent="0" marL="0">
-              <a:spcAft>
-                <a:spcPts val="600"/>
-              </a:spcAft>
-              <a:buNone/>
-            </a:pPr>
             <a:r>
               <a:rPr lang="en-US" sz="1250" dirty="0">
                 <a:solidFill>
@@ -11236,7 +10853,7 @@
             <a:endParaRPr lang="en-US" sz="1250" dirty="0"/>
           </a:p>
           <a:p>
-            <a:pPr indent="0" marL="0">
+            <a:pPr marL="0" indent="0">
               <a:spcAft>
                 <a:spcPts val="600"/>
               </a:spcAft>
@@ -11253,12 +10870,6 @@
               </a:rPr>
               <a:t>modelo.score(X_test, y_test)</a:t>
             </a:r>
-            <a:pPr indent="0" marL="0">
-              <a:spcAft>
-                <a:spcPts val="600"/>
-              </a:spcAft>
-              <a:buNone/>
-            </a:pPr>
             <a:r>
               <a:rPr lang="en-US" sz="1250" dirty="0">
                 <a:solidFill>
@@ -11297,8 +10908,20 @@
             <a:tbl>
               <a:tblPr/>
               <a:tblGrid>
-                <a:gridCol w="3108960"/>
-                <a:gridCol w="2039112"/>
+                <a:gridCol w="3108960">
+                  <a:extLst>
+                    <a:ext uri="{9D8B030D-6E8A-4147-A177-3AD203B41FA5}">
+                      <a16:colId xmlns:a16="http://schemas.microsoft.com/office/drawing/2014/main" val="20000"/>
+                    </a:ext>
+                  </a:extLst>
+                </a:gridCol>
+                <a:gridCol w="2039112">
+                  <a:extLst>
+                    <a:ext uri="{9D8B030D-6E8A-4147-A177-3AD203B41FA5}">
+                      <a16:colId xmlns:a16="http://schemas.microsoft.com/office/drawing/2014/main" val="20001"/>
+                    </a:ext>
+                  </a:extLst>
+                </a:gridCol>
               </a:tblGrid>
               <a:tr h="420624">
                 <a:tc>
@@ -11306,7 +10929,7 @@
                     <a:bodyPr/>
                     <a:lstStyle/>
                     <a:p>
-                      <a:pPr indent="0" marL="0">
+                      <a:pPr marL="0" indent="0">
                         <a:buNone/>
                       </a:pPr>
                       <a:r>
@@ -11374,7 +10997,7 @@
                     <a:bodyPr/>
                     <a:lstStyle/>
                     <a:p>
-                      <a:pPr algn="ctr" indent="0" marL="0">
+                      <a:pPr marL="0" indent="0" algn="ctr">
                         <a:buNone/>
                       </a:pPr>
                       <a:r>
@@ -11437,6 +11060,11 @@
                     </a:solidFill>
                   </a:tcPr>
                 </a:tc>
+                <a:extLst>
+                  <a:ext uri="{0D108BD9-81ED-4DB2-BD59-A6C34878D82A}">
+                    <a16:rowId xmlns:a16="http://schemas.microsoft.com/office/drawing/2014/main" val="10000"/>
+                  </a:ext>
+                </a:extLst>
               </a:tr>
               <a:tr h="420624">
                 <a:tc>
@@ -11444,7 +11072,7 @@
                     <a:bodyPr/>
                     <a:lstStyle/>
                     <a:p>
-                      <a:pPr indent="0" marL="0">
+                      <a:pPr marL="0" indent="0">
                         <a:buNone/>
                       </a:pPr>
                       <a:r>
@@ -11512,7 +11140,7 @@
                     <a:bodyPr/>
                     <a:lstStyle/>
                     <a:p>
-                      <a:pPr algn="ctr" indent="0" marL="0">
+                      <a:pPr marL="0" indent="0" algn="ctr">
                         <a:buNone/>
                       </a:pPr>
                       <a:r>
@@ -11575,6 +11203,11 @@
                     </a:solidFill>
                   </a:tcPr>
                 </a:tc>
+                <a:extLst>
+                  <a:ext uri="{0D108BD9-81ED-4DB2-BD59-A6C34878D82A}">
+                    <a16:rowId xmlns:a16="http://schemas.microsoft.com/office/drawing/2014/main" val="10001"/>
+                  </a:ext>
+                </a:extLst>
               </a:tr>
               <a:tr h="420624">
                 <a:tc>
@@ -11582,7 +11215,7 @@
                     <a:bodyPr/>
                     <a:lstStyle/>
                     <a:p>
-                      <a:pPr indent="0" marL="0">
+                      <a:pPr marL="0" indent="0">
                         <a:buNone/>
                       </a:pPr>
                       <a:r>
@@ -11650,7 +11283,7 @@
                     <a:bodyPr/>
                     <a:lstStyle/>
                     <a:p>
-                      <a:pPr algn="ctr" indent="0" marL="0">
+                      <a:pPr marL="0" indent="0" algn="ctr">
                         <a:buNone/>
                       </a:pPr>
                       <a:r>
@@ -11713,6 +11346,11 @@
                     </a:solidFill>
                   </a:tcPr>
                 </a:tc>
+                <a:extLst>
+                  <a:ext uri="{0D108BD9-81ED-4DB2-BD59-A6C34878D82A}">
+                    <a16:rowId xmlns:a16="http://schemas.microsoft.com/office/drawing/2014/main" val="10002"/>
+                  </a:ext>
+                </a:extLst>
               </a:tr>
               <a:tr h="420624">
                 <a:tc>
@@ -11720,7 +11358,7 @@
                     <a:bodyPr/>
                     <a:lstStyle/>
                     <a:p>
-                      <a:pPr indent="0" marL="0">
+                      <a:pPr marL="0" indent="0">
                         <a:buNone/>
                       </a:pPr>
                       <a:r>
@@ -11788,7 +11426,7 @@
                     <a:bodyPr/>
                     <a:lstStyle/>
                     <a:p>
-                      <a:pPr algn="ctr" indent="0" marL="0">
+                      <a:pPr marL="0" indent="0" algn="ctr">
                         <a:buNone/>
                       </a:pPr>
                       <a:r>
@@ -11851,6 +11489,11 @@
                     </a:solidFill>
                   </a:tcPr>
                 </a:tc>
+                <a:extLst>
+                  <a:ext uri="{0D108BD9-81ED-4DB2-BD59-A6C34878D82A}">
+                    <a16:rowId xmlns:a16="http://schemas.microsoft.com/office/drawing/2014/main" val="10003"/>
+                  </a:ext>
+                </a:extLst>
               </a:tr>
               <a:tr h="420624">
                 <a:tc>
@@ -11858,7 +11501,7 @@
                     <a:bodyPr/>
                     <a:lstStyle/>
                     <a:p>
-                      <a:pPr indent="0" marL="0">
+                      <a:pPr marL="0" indent="0">
                         <a:buNone/>
                       </a:pPr>
                       <a:r>
@@ -11926,7 +11569,7 @@
                     <a:bodyPr/>
                     <a:lstStyle/>
                     <a:p>
-                      <a:pPr algn="ctr" indent="0" marL="0">
+                      <a:pPr marL="0" indent="0" algn="ctr">
                         <a:buNone/>
                       </a:pPr>
                       <a:r>
@@ -11989,6 +11632,11 @@
                     </a:solidFill>
                   </a:tcPr>
                 </a:tc>
+                <a:extLst>
+                  <a:ext uri="{0D108BD9-81ED-4DB2-BD59-A6C34878D82A}">
+                    <a16:rowId xmlns:a16="http://schemas.microsoft.com/office/drawing/2014/main" val="10004"/>
+                  </a:ext>
+                </a:extLst>
               </a:tr>
             </a:tbl>
           </a:graphicData>
@@ -12069,7 +11717,7 @@
           <a:bodyPr wrap="square" lIns="0" tIns="0" rIns="0" bIns="0" rtlCol="0" anchor="ctr"/>
           <a:lstStyle/>
           <a:p>
-            <a:pPr indent="0" marL="0">
+            <a:pPr marL="0" indent="0">
               <a:buNone/>
             </a:pPr>
             <a:r>
@@ -12108,7 +11756,7 @@
           <a:bodyPr wrap="square" lIns="0" tIns="0" rIns="0" bIns="0" rtlCol="0" anchor="t"/>
           <a:lstStyle/>
           <a:p>
-            <a:pPr indent="0" marL="0">
+            <a:pPr marL="0" indent="0">
               <a:spcAft>
                 <a:spcPts val="400"/>
               </a:spcAft>
@@ -12204,7 +11852,7 @@
           <a:bodyPr wrap="square" lIns="0" tIns="0" rIns="0" bIns="0" rtlCol="0" anchor="ctr"/>
           <a:lstStyle/>
           <a:p>
-            <a:pPr indent="0" marL="0">
+            <a:pPr marL="0" indent="0">
               <a:buNone/>
             </a:pPr>
             <a:r>
@@ -12224,7 +11872,7 @@
       </p:sp>
       <p:sp>
         <p:nvSpPr>
-          <p:cNvPr id="16" name="Text 13"/>
+          <p:cNvPr id="8" name="Text 13"/>
           <p:cNvSpPr txBox="1"/>
           <p:nvPr/>
         </p:nvSpPr>
@@ -12243,7 +11891,7 @@
           <a:bodyPr wrap="square" lIns="0" tIns="0" rIns="0" bIns="0" rtlCol="0" anchor="t"/>
           <a:lstStyle/>
           <a:p>
-            <a:pPr indent="0" marL="0">
+            <a:pPr marL="0" indent="0">
               <a:spcAft>
                 <a:spcPts val="400"/>
               </a:spcAft>
@@ -12260,12 +11908,6 @@
               </a:rPr>
               <a:t>S/ 2 800 de ingreso, debe el 55 %, 2 años de cliente, 2 atrasos → </a:t>
             </a:r>
-            <a:pPr indent="0" marL="0">
-              <a:spcAft>
-                <a:spcPts val="400"/>
-              </a:spcAft>
-              <a:buNone/>
-            </a:pPr>
             <a:r>
               <a:rPr lang="en-US" sz="1250" b="1" dirty="0">
                 <a:solidFill>
@@ -12297,6 +11939,7 @@
         <a:solidFill>
           <a:srgbClr val="F5F7FB"/>
         </a:solidFill>
+        <a:effectLst/>
       </p:bgPr>
     </p:bg>
     <p:spTree>
@@ -12361,11 +12004,11 @@
           <a:bodyPr wrap="square" lIns="0" tIns="0" rIns="0" bIns="0" rtlCol="0" anchor="ctr"/>
           <a:lstStyle/>
           <a:p>
-            <a:pPr algn="ctr" indent="0" marL="0">
+            <a:pPr marL="0" indent="0" algn="ctr">
               <a:buNone/>
             </a:pPr>
             <a:r>
-              <a:rPr lang="en-US" sz="1100" b="1" spc="150" kern="0" dirty="0">
+              <a:rPr lang="en-US" sz="1100" b="1" kern="0" spc="150" dirty="0">
                 <a:solidFill>
                   <a:srgbClr val="FFFFFF"/>
                 </a:solidFill>
@@ -12400,7 +12043,7 @@
           <a:bodyPr wrap="square" lIns="0" tIns="0" rIns="0" bIns="0" rtlCol="0" anchor="ctr"/>
           <a:lstStyle/>
           <a:p>
-            <a:pPr indent="0" marL="0">
+            <a:pPr marL="0" indent="0">
               <a:buNone/>
             </a:pPr>
             <a:r>
@@ -12439,7 +12082,7 @@
           <a:bodyPr wrap="square" lIns="0" tIns="0" rIns="0" bIns="0" rtlCol="0" anchor="ctr"/>
           <a:lstStyle/>
           <a:p>
-            <a:pPr indent="0" marL="0">
+            <a:pPr marL="0" indent="0">
               <a:buNone/>
             </a:pPr>
             <a:r>
@@ -12530,7 +12173,7 @@
           <a:bodyPr wrap="square" lIns="0" tIns="0" rIns="0" bIns="0" rtlCol="0" anchor="ctr"/>
           <a:lstStyle/>
           <a:p>
-            <a:pPr algn="ctr" indent="0" marL="0">
+            <a:pPr marL="0" indent="0" algn="ctr">
               <a:buNone/>
             </a:pPr>
             <a:r>
@@ -12569,7 +12212,7 @@
           <a:bodyPr wrap="square" lIns="0" tIns="0" rIns="0" bIns="0" rtlCol="0" anchor="ctr"/>
           <a:lstStyle/>
           <a:p>
-            <a:pPr indent="0" marL="0">
+            <a:pPr marL="0" indent="0">
               <a:buNone/>
             </a:pPr>
             <a:r>
@@ -12608,7 +12251,7 @@
           <a:bodyPr wrap="square" lIns="0" tIns="0" rIns="0" bIns="0" rtlCol="0" anchor="ctr"/>
           <a:lstStyle/>
           <a:p>
-            <a:pPr indent="0" marL="0">
+            <a:pPr marL="0" indent="0">
               <a:buNone/>
             </a:pPr>
             <a:r>
@@ -12647,7 +12290,7 @@
           <a:bodyPr wrap="square" lIns="0" tIns="0" rIns="0" bIns="0" rtlCol="0" anchor="ctr"/>
           <a:lstStyle/>
           <a:p>
-            <a:pPr indent="0" marL="0">
+            <a:pPr marL="0" indent="0">
               <a:buNone/>
             </a:pPr>
             <a:r>
@@ -12738,7 +12381,7 @@
           <a:bodyPr wrap="square" lIns="0" tIns="0" rIns="0" bIns="0" rtlCol="0" anchor="ctr"/>
           <a:lstStyle/>
           <a:p>
-            <a:pPr algn="ctr" indent="0" marL="0">
+            <a:pPr marL="0" indent="0" algn="ctr">
               <a:buNone/>
             </a:pPr>
             <a:r>
@@ -12777,7 +12420,7 @@
           <a:bodyPr wrap="square" lIns="0" tIns="0" rIns="0" bIns="0" rtlCol="0" anchor="ctr"/>
           <a:lstStyle/>
           <a:p>
-            <a:pPr indent="0" marL="0">
+            <a:pPr marL="0" indent="0">
               <a:buNone/>
             </a:pPr>
             <a:r>
@@ -12816,7 +12459,7 @@
           <a:bodyPr wrap="square" lIns="0" tIns="0" rIns="0" bIns="0" rtlCol="0" anchor="ctr"/>
           <a:lstStyle/>
           <a:p>
-            <a:pPr indent="0" marL="0">
+            <a:pPr marL="0" indent="0">
               <a:buNone/>
             </a:pPr>
             <a:r>
@@ -12855,7 +12498,7 @@
           <a:bodyPr wrap="square" lIns="0" tIns="0" rIns="0" bIns="0" rtlCol="0" anchor="ctr"/>
           <a:lstStyle/>
           <a:p>
-            <a:pPr indent="0" marL="0">
+            <a:pPr marL="0" indent="0">
               <a:buNone/>
             </a:pPr>
             <a:r>
@@ -12946,7 +12589,7 @@
           <a:bodyPr wrap="square" lIns="0" tIns="0" rIns="0" bIns="0" rtlCol="0" anchor="ctr"/>
           <a:lstStyle/>
           <a:p>
-            <a:pPr algn="ctr" indent="0" marL="0">
+            <a:pPr marL="0" indent="0" algn="ctr">
               <a:buNone/>
             </a:pPr>
             <a:r>
@@ -12985,7 +12628,7 @@
           <a:bodyPr wrap="square" lIns="0" tIns="0" rIns="0" bIns="0" rtlCol="0" anchor="ctr"/>
           <a:lstStyle/>
           <a:p>
-            <a:pPr indent="0" marL="0">
+            <a:pPr marL="0" indent="0">
               <a:buNone/>
             </a:pPr>
             <a:r>
@@ -13024,7 +12667,7 @@
           <a:bodyPr wrap="square" lIns="0" tIns="0" rIns="0" bIns="0" rtlCol="0" anchor="ctr"/>
           <a:lstStyle/>
           <a:p>
-            <a:pPr indent="0" marL="0">
+            <a:pPr marL="0" indent="0">
               <a:buNone/>
             </a:pPr>
             <a:r>
@@ -13063,7 +12706,7 @@
           <a:bodyPr wrap="square" lIns="0" tIns="0" rIns="0" bIns="0" rtlCol="0" anchor="ctr"/>
           <a:lstStyle/>
           <a:p>
-            <a:pPr indent="0" marL="0">
+            <a:pPr marL="0" indent="0">
               <a:buNone/>
             </a:pPr>
             <a:r>
@@ -13154,7 +12797,7 @@
           <a:bodyPr wrap="square" lIns="0" tIns="0" rIns="0" bIns="0" rtlCol="0" anchor="ctr"/>
           <a:lstStyle/>
           <a:p>
-            <a:pPr algn="ctr" indent="0" marL="0">
+            <a:pPr marL="0" indent="0" algn="ctr">
               <a:buNone/>
             </a:pPr>
             <a:r>
@@ -13193,7 +12836,7 @@
           <a:bodyPr wrap="square" lIns="0" tIns="0" rIns="0" bIns="0" rtlCol="0" anchor="ctr"/>
           <a:lstStyle/>
           <a:p>
-            <a:pPr indent="0" marL="0">
+            <a:pPr marL="0" indent="0">
               <a:buNone/>
             </a:pPr>
             <a:r>
@@ -13232,7 +12875,7 @@
           <a:bodyPr wrap="square" lIns="0" tIns="0" rIns="0" bIns="0" rtlCol="0" anchor="ctr"/>
           <a:lstStyle/>
           <a:p>
-            <a:pPr indent="0" marL="0">
+            <a:pPr marL="0" indent="0">
               <a:buNone/>
             </a:pPr>
             <a:r>
@@ -13271,7 +12914,7 @@
           <a:bodyPr wrap="square" lIns="0" tIns="0" rIns="0" bIns="0" rtlCol="0" anchor="ctr"/>
           <a:lstStyle/>
           <a:p>
-            <a:pPr indent="0" marL="0">
+            <a:pPr marL="0" indent="0">
               <a:buNone/>
             </a:pPr>
             <a:r>
@@ -13362,7 +13005,7 @@
           <a:bodyPr wrap="square" lIns="0" tIns="0" rIns="0" bIns="0" rtlCol="0" anchor="ctr"/>
           <a:lstStyle/>
           <a:p>
-            <a:pPr algn="ctr" indent="0" marL="0">
+            <a:pPr marL="0" indent="0" algn="ctr">
               <a:buNone/>
             </a:pPr>
             <a:r>
@@ -13401,7 +13044,7 @@
           <a:bodyPr wrap="square" lIns="0" tIns="0" rIns="0" bIns="0" rtlCol="0" anchor="ctr"/>
           <a:lstStyle/>
           <a:p>
-            <a:pPr indent="0" marL="0">
+            <a:pPr marL="0" indent="0">
               <a:buNone/>
             </a:pPr>
             <a:r>
@@ -13440,7 +13083,7 @@
           <a:bodyPr wrap="square" lIns="0" tIns="0" rIns="0" bIns="0" rtlCol="0" anchor="ctr"/>
           <a:lstStyle/>
           <a:p>
-            <a:pPr indent="0" marL="0">
+            <a:pPr marL="0" indent="0">
               <a:buNone/>
             </a:pPr>
             <a:r>
@@ -13479,7 +13122,7 @@
           <a:bodyPr wrap="square" lIns="0" tIns="0" rIns="0" bIns="0" rtlCol="0" anchor="ctr"/>
           <a:lstStyle/>
           <a:p>
-            <a:pPr indent="0" marL="0">
+            <a:pPr marL="0" indent="0">
               <a:buNone/>
             </a:pPr>
             <a:r>
@@ -13545,7 +13188,7 @@
           <a:bodyPr wrap="square" lIns="0" tIns="0" rIns="0" bIns="0" rtlCol="0" anchor="ctr"/>
           <a:lstStyle/>
           <a:p>
-            <a:pPr indent="0" marL="0">
+            <a:pPr marL="0" indent="0">
               <a:spcAft>
                 <a:spcPts val="400"/>
               </a:spcAft>
@@ -13562,12 +13205,6 @@
               </a:rPr>
               <a:t>Cómo funciona: </a:t>
             </a:r>
-            <a:pPr indent="0" marL="0">
-              <a:spcAft>
-                <a:spcPts val="400"/>
-              </a:spcAft>
-              <a:buNone/>
-            </a:pPr>
             <a:r>
               <a:rPr lang="en-US" sz="1200" dirty="0">
                 <a:solidFill>
@@ -13599,6 +13236,7 @@
         <a:solidFill>
           <a:srgbClr val="0A2559"/>
         </a:solidFill>
+        <a:effectLst/>
       </p:bgPr>
     </p:bg>
     <p:spTree>
@@ -13663,11 +13301,11 @@
           <a:bodyPr wrap="square" lIns="0" tIns="0" rIns="0" bIns="0" rtlCol="0" anchor="ctr"/>
           <a:lstStyle/>
           <a:p>
-            <a:pPr algn="ctr" indent="0" marL="0">
+            <a:pPr marL="0" indent="0" algn="ctr">
               <a:buNone/>
             </a:pPr>
             <a:r>
-              <a:rPr lang="en-US" sz="1100" b="1" spc="150" kern="0" dirty="0">
+              <a:rPr lang="en-US" sz="1100" b="1" kern="0" spc="150" dirty="0">
                 <a:solidFill>
                   <a:srgbClr val="FFFFFF"/>
                 </a:solidFill>
@@ -13702,7 +13340,7 @@
           <a:bodyPr wrap="square" lIns="0" tIns="0" rIns="0" bIns="0" rtlCol="0" anchor="ctr"/>
           <a:lstStyle/>
           <a:p>
-            <a:pPr indent="0" marL="0">
+            <a:pPr marL="0" indent="0">
               <a:buNone/>
             </a:pPr>
             <a:r>
@@ -13741,7 +13379,7 @@
           <a:bodyPr wrap="square" lIns="0" tIns="0" rIns="0" bIns="0" rtlCol="0" anchor="ctr"/>
           <a:lstStyle/>
           <a:p>
-            <a:pPr indent="0" marL="0">
+            <a:pPr marL="0" indent="0">
               <a:buNone/>
             </a:pPr>
             <a:r>
@@ -13834,7 +13472,7 @@
           <a:bodyPr wrap="square" lIns="0" tIns="0" rIns="0" bIns="0" rtlCol="0" anchor="ctr"/>
           <a:lstStyle/>
           <a:p>
-            <a:pPr indent="0" marL="0">
+            <a:pPr marL="0" indent="0">
               <a:buNone/>
             </a:pPr>
             <a:r>
@@ -13875,8 +13513,20 @@
             <a:tbl>
               <a:tblPr/>
               <a:tblGrid>
-                <a:gridCol w="3566160"/>
-                <a:gridCol w="1737360"/>
+                <a:gridCol w="3566160">
+                  <a:extLst>
+                    <a:ext uri="{9D8B030D-6E8A-4147-A177-3AD203B41FA5}">
+                      <a16:colId xmlns:a16="http://schemas.microsoft.com/office/drawing/2014/main" val="20000"/>
+                    </a:ext>
+                  </a:extLst>
+                </a:gridCol>
+                <a:gridCol w="1737360">
+                  <a:extLst>
+                    <a:ext uri="{9D8B030D-6E8A-4147-A177-3AD203B41FA5}">
+                      <a16:colId xmlns:a16="http://schemas.microsoft.com/office/drawing/2014/main" val="20001"/>
+                    </a:ext>
+                  </a:extLst>
+                </a:gridCol>
               </a:tblGrid>
               <a:tr h="393192">
                 <a:tc>
@@ -13884,7 +13534,7 @@
                     <a:bodyPr/>
                     <a:lstStyle/>
                     <a:p>
-                      <a:pPr indent="0" marL="0">
+                      <a:pPr marL="0" indent="0">
                         <a:buNone/>
                       </a:pPr>
                       <a:r>
@@ -13952,7 +13602,7 @@
                     <a:bodyPr/>
                     <a:lstStyle/>
                     <a:p>
-                      <a:pPr algn="r" indent="0" marL="0">
+                      <a:pPr marL="0" indent="0" algn="r">
                         <a:buNone/>
                       </a:pPr>
                       <a:r>
@@ -14015,6 +13665,11 @@
                     </a:solidFill>
                   </a:tcPr>
                 </a:tc>
+                <a:extLst>
+                  <a:ext uri="{0D108BD9-81ED-4DB2-BD59-A6C34878D82A}">
+                    <a16:rowId xmlns:a16="http://schemas.microsoft.com/office/drawing/2014/main" val="10000"/>
+                  </a:ext>
+                </a:extLst>
               </a:tr>
               <a:tr h="393192">
                 <a:tc>
@@ -14022,7 +13677,7 @@
                     <a:bodyPr/>
                     <a:lstStyle/>
                     <a:p>
-                      <a:pPr indent="0" marL="0">
+                      <a:pPr marL="0" indent="0">
                         <a:buNone/>
                       </a:pPr>
                       <a:r>
@@ -14090,7 +13745,7 @@
                     <a:bodyPr/>
                     <a:lstStyle/>
                     <a:p>
-                      <a:pPr algn="r" indent="0" marL="0">
+                      <a:pPr marL="0" indent="0" algn="r">
                         <a:buNone/>
                       </a:pPr>
                       <a:r>
@@ -14153,6 +13808,11 @@
                     </a:solidFill>
                   </a:tcPr>
                 </a:tc>
+                <a:extLst>
+                  <a:ext uri="{0D108BD9-81ED-4DB2-BD59-A6C34878D82A}">
+                    <a16:rowId xmlns:a16="http://schemas.microsoft.com/office/drawing/2014/main" val="10001"/>
+                  </a:ext>
+                </a:extLst>
               </a:tr>
               <a:tr h="393192">
                 <a:tc>
@@ -14160,7 +13820,7 @@
                     <a:bodyPr/>
                     <a:lstStyle/>
                     <a:p>
-                      <a:pPr indent="0" marL="0">
+                      <a:pPr marL="0" indent="0">
                         <a:buNone/>
                       </a:pPr>
                       <a:r>
@@ -14228,7 +13888,7 @@
                     <a:bodyPr/>
                     <a:lstStyle/>
                     <a:p>
-                      <a:pPr algn="r" indent="0" marL="0">
+                      <a:pPr marL="0" indent="0" algn="r">
                         <a:buNone/>
                       </a:pPr>
                       <a:r>
@@ -14291,6 +13951,11 @@
                     </a:solidFill>
                   </a:tcPr>
                 </a:tc>
+                <a:extLst>
+                  <a:ext uri="{0D108BD9-81ED-4DB2-BD59-A6C34878D82A}">
+                    <a16:rowId xmlns:a16="http://schemas.microsoft.com/office/drawing/2014/main" val="10002"/>
+                  </a:ext>
+                </a:extLst>
               </a:tr>
               <a:tr h="393192">
                 <a:tc>
@@ -14298,7 +13963,7 @@
                     <a:bodyPr/>
                     <a:lstStyle/>
                     <a:p>
-                      <a:pPr indent="0" marL="0">
+                      <a:pPr marL="0" indent="0">
                         <a:buNone/>
                       </a:pPr>
                       <a:r>
@@ -14366,7 +14031,7 @@
                     <a:bodyPr/>
                     <a:lstStyle/>
                     <a:p>
-                      <a:pPr algn="r" indent="0" marL="0">
+                      <a:pPr marL="0" indent="0" algn="r">
                         <a:buNone/>
                       </a:pPr>
                       <a:r>
@@ -14429,6 +14094,11 @@
                     </a:solidFill>
                   </a:tcPr>
                 </a:tc>
+                <a:extLst>
+                  <a:ext uri="{0D108BD9-81ED-4DB2-BD59-A6C34878D82A}">
+                    <a16:rowId xmlns:a16="http://schemas.microsoft.com/office/drawing/2014/main" val="10003"/>
+                  </a:ext>
+                </a:extLst>
               </a:tr>
               <a:tr h="393192">
                 <a:tc>
@@ -14436,7 +14106,7 @@
                     <a:bodyPr/>
                     <a:lstStyle/>
                     <a:p>
-                      <a:pPr indent="0" marL="0">
+                      <a:pPr marL="0" indent="0">
                         <a:buNone/>
                       </a:pPr>
                       <a:r>
@@ -14504,7 +14174,7 @@
                     <a:bodyPr/>
                     <a:lstStyle/>
                     <a:p>
-                      <a:pPr algn="r" indent="0" marL="0">
+                      <a:pPr marL="0" indent="0" algn="r">
                         <a:buNone/>
                       </a:pPr>
                       <a:r>
@@ -14567,6 +14237,11 @@
                     </a:solidFill>
                   </a:tcPr>
                 </a:tc>
+                <a:extLst>
+                  <a:ext uri="{0D108BD9-81ED-4DB2-BD59-A6C34878D82A}">
+                    <a16:rowId xmlns:a16="http://schemas.microsoft.com/office/drawing/2014/main" val="10004"/>
+                  </a:ext>
+                </a:extLst>
               </a:tr>
               <a:tr h="393192">
                 <a:tc>
@@ -14574,7 +14249,7 @@
                     <a:bodyPr/>
                     <a:lstStyle/>
                     <a:p>
-                      <a:pPr indent="0" marL="0">
+                      <a:pPr marL="0" indent="0">
                         <a:buNone/>
                       </a:pPr>
                       <a:r>
@@ -14642,7 +14317,7 @@
                     <a:bodyPr/>
                     <a:lstStyle/>
                     <a:p>
-                      <a:pPr algn="r" indent="0" marL="0">
+                      <a:pPr marL="0" indent="0" algn="r">
                         <a:buNone/>
                       </a:pPr>
                       <a:r>
@@ -14705,6 +14380,11 @@
                     </a:solidFill>
                   </a:tcPr>
                 </a:tc>
+                <a:extLst>
+                  <a:ext uri="{0D108BD9-81ED-4DB2-BD59-A6C34878D82A}">
+                    <a16:rowId xmlns:a16="http://schemas.microsoft.com/office/drawing/2014/main" val="10005"/>
+                  </a:ext>
+                </a:extLst>
               </a:tr>
               <a:tr h="393192">
                 <a:tc>
@@ -14712,7 +14392,7 @@
                     <a:bodyPr/>
                     <a:lstStyle/>
                     <a:p>
-                      <a:pPr indent="0" marL="0">
+                      <a:pPr marL="0" indent="0">
                         <a:buNone/>
                       </a:pPr>
                       <a:r>
@@ -14780,7 +14460,7 @@
                     <a:bodyPr/>
                     <a:lstStyle/>
                     <a:p>
-                      <a:pPr algn="r" indent="0" marL="0">
+                      <a:pPr marL="0" indent="0" algn="r">
                         <a:buNone/>
                       </a:pPr>
                       <a:r>
@@ -14843,6 +14523,11 @@
                     </a:solidFill>
                   </a:tcPr>
                 </a:tc>
+                <a:extLst>
+                  <a:ext uri="{0D108BD9-81ED-4DB2-BD59-A6C34878D82A}">
+                    <a16:rowId xmlns:a16="http://schemas.microsoft.com/office/drawing/2014/main" val="10006"/>
+                  </a:ext>
+                </a:extLst>
               </a:tr>
             </a:tbl>
           </a:graphicData>
@@ -14923,7 +14608,7 @@
           <a:bodyPr wrap="square" lIns="0" tIns="0" rIns="0" bIns="0" rtlCol="0" anchor="ctr"/>
           <a:lstStyle/>
           <a:p>
-            <a:pPr indent="0" marL="0">
+            <a:pPr marL="0" indent="0">
               <a:buNone/>
             </a:pPr>
             <a:r>
@@ -14962,7 +14647,7 @@
           <a:bodyPr wrap="square" lIns="0" tIns="0" rIns="0" bIns="0" rtlCol="0" anchor="t"/>
           <a:lstStyle/>
           <a:p>
-            <a:pPr indent="0" marL="0">
+            <a:pPr marL="0" indent="0">
               <a:spcAft>
                 <a:spcPts val="400"/>
               </a:spcAft>
@@ -14982,7 +14667,7 @@
             <a:endParaRPr lang="en-US" sz="1250" dirty="0"/>
           </a:p>
           <a:p>
-            <a:pPr indent="0" marL="0">
+            <a:pPr marL="0" indent="0">
               <a:spcAft>
                 <a:spcPts val="400"/>
               </a:spcAft>
@@ -15078,7 +14763,7 @@
           <a:bodyPr wrap="square" lIns="0" tIns="0" rIns="0" bIns="0" rtlCol="0" anchor="ctr"/>
           <a:lstStyle/>
           <a:p>
-            <a:pPr indent="0" marL="0">
+            <a:pPr marL="0" indent="0">
               <a:buNone/>
             </a:pPr>
             <a:r>
@@ -15204,7 +14889,7 @@
       </p:sp>
       <p:sp>
         <p:nvSpPr>
-          <p:cNvPr id="18" name="Text 15"/>
+          <p:cNvPr id="9" name="Text 15"/>
           <p:cNvSpPr txBox="1"/>
           <p:nvPr/>
         </p:nvSpPr>
@@ -15223,7 +14908,7 @@
           <a:bodyPr wrap="square" lIns="0" tIns="0" rIns="0" bIns="0" rtlCol="0" anchor="ctr"/>
           <a:lstStyle/>
           <a:p>
-            <a:pPr indent="0" marL="0">
+            <a:pPr marL="0" indent="0">
               <a:buNone/>
             </a:pPr>
             <a:r>
@@ -15257,6 +14942,7 @@
         <a:solidFill>
           <a:srgbClr val="F5F7FB"/>
         </a:solidFill>
+        <a:effectLst/>
       </p:bgPr>
     </p:bg>
     <p:spTree>
@@ -15321,11 +15007,11 @@
           <a:bodyPr wrap="square" lIns="0" tIns="0" rIns="0" bIns="0" rtlCol="0" anchor="ctr"/>
           <a:lstStyle/>
           <a:p>
-            <a:pPr algn="ctr" indent="0" marL="0">
+            <a:pPr marL="0" indent="0" algn="ctr">
               <a:buNone/>
             </a:pPr>
             <a:r>
-              <a:rPr lang="en-US" sz="1100" b="1" spc="150" kern="0" dirty="0">
+              <a:rPr lang="en-US" sz="1100" b="1" kern="0" spc="150" dirty="0">
                 <a:solidFill>
                   <a:srgbClr val="FFFFFF"/>
                 </a:solidFill>
@@ -15360,7 +15046,7 @@
           <a:bodyPr wrap="square" lIns="0" tIns="0" rIns="0" bIns="0" rtlCol="0" anchor="ctr"/>
           <a:lstStyle/>
           <a:p>
-            <a:pPr indent="0" marL="0">
+            <a:pPr marL="0" indent="0">
               <a:buNone/>
             </a:pPr>
             <a:r>
@@ -15399,7 +15085,7 @@
           <a:bodyPr wrap="square" lIns="0" tIns="0" rIns="0" bIns="0" rtlCol="0" anchor="ctr"/>
           <a:lstStyle/>
           <a:p>
-            <a:pPr indent="0" marL="0">
+            <a:pPr marL="0" indent="0">
               <a:buNone/>
             </a:pPr>
             <a:r>
@@ -15492,11 +15178,11 @@
           <a:bodyPr wrap="square" lIns="0" tIns="0" rIns="0" bIns="0" rtlCol="0" anchor="ctr"/>
           <a:lstStyle/>
           <a:p>
-            <a:pPr algn="ctr" indent="0" marL="0">
+            <a:pPr marL="0" indent="0" algn="ctr">
               <a:buNone/>
             </a:pPr>
             <a:r>
-              <a:rPr lang="en-US" sz="1000" b="1" spc="100" kern="0" dirty="0">
+              <a:rPr lang="en-US" sz="1000" b="1" kern="0" spc="100" dirty="0">
                 <a:solidFill>
                   <a:srgbClr val="FFFFFF"/>
                 </a:solidFill>
@@ -15531,7 +15217,7 @@
           <a:bodyPr wrap="square" lIns="0" tIns="0" rIns="0" bIns="0" rtlCol="0" anchor="ctr"/>
           <a:lstStyle/>
           <a:p>
-            <a:pPr algn="ctr" indent="0" marL="0">
+            <a:pPr marL="0" indent="0" algn="ctr">
               <a:buNone/>
             </a:pPr>
             <a:r>
@@ -15570,7 +15256,7 @@
           <a:bodyPr wrap="square" lIns="0" tIns="0" rIns="0" bIns="0" rtlCol="0" anchor="ctr"/>
           <a:lstStyle/>
           <a:p>
-            <a:pPr algn="ctr" indent="0" marL="0">
+            <a:pPr marL="0" indent="0" algn="ctr">
               <a:buNone/>
             </a:pPr>
             <a:r>
@@ -15663,11 +15349,11 @@
           <a:bodyPr wrap="square" lIns="0" tIns="0" rIns="0" bIns="0" rtlCol="0" anchor="ctr"/>
           <a:lstStyle/>
           <a:p>
-            <a:pPr algn="ctr" indent="0" marL="0">
+            <a:pPr marL="0" indent="0" algn="ctr">
               <a:buNone/>
             </a:pPr>
             <a:r>
-              <a:rPr lang="en-US" sz="1000" b="1" spc="100" kern="0" dirty="0">
+              <a:rPr lang="en-US" sz="1000" b="1" kern="0" spc="100" dirty="0">
                 <a:solidFill>
                   <a:srgbClr val="FFFFFF"/>
                 </a:solidFill>
@@ -15702,7 +15388,7 @@
           <a:bodyPr wrap="square" lIns="0" tIns="0" rIns="0" bIns="0" rtlCol="0" anchor="ctr"/>
           <a:lstStyle/>
           <a:p>
-            <a:pPr algn="ctr" indent="0" marL="0">
+            <a:pPr marL="0" indent="0" algn="ctr">
               <a:buNone/>
             </a:pPr>
             <a:r>
@@ -15719,7 +15405,7 @@
             <a:endParaRPr lang="en-US" sz="1300" dirty="0"/>
           </a:p>
           <a:p>
-            <a:pPr algn="ctr" indent="0" marL="0">
+            <a:pPr marL="0" indent="0" algn="ctr">
               <a:buNone/>
             </a:pPr>
             <a:r>
@@ -15758,7 +15444,7 @@
           <a:bodyPr wrap="square" lIns="0" tIns="0" rIns="0" bIns="0" rtlCol="0" anchor="ctr"/>
           <a:lstStyle/>
           <a:p>
-            <a:pPr algn="ctr" indent="0" marL="0">
+            <a:pPr marL="0" indent="0" algn="ctr">
               <a:buNone/>
             </a:pPr>
             <a:r>
@@ -15851,11 +15537,11 @@
           <a:bodyPr wrap="square" lIns="0" tIns="0" rIns="0" bIns="0" rtlCol="0" anchor="ctr"/>
           <a:lstStyle/>
           <a:p>
-            <a:pPr algn="ctr" indent="0" marL="0">
+            <a:pPr marL="0" indent="0" algn="ctr">
               <a:buNone/>
             </a:pPr>
             <a:r>
-              <a:rPr lang="en-US" sz="1000" b="1" spc="100" kern="0" dirty="0">
+              <a:rPr lang="en-US" sz="1000" b="1" kern="0" spc="100" dirty="0">
                 <a:solidFill>
                   <a:srgbClr val="FFFFFF"/>
                 </a:solidFill>
@@ -15890,7 +15576,7 @@
           <a:bodyPr wrap="square" lIns="0" tIns="0" rIns="0" bIns="0" rtlCol="0" anchor="ctr"/>
           <a:lstStyle/>
           <a:p>
-            <a:pPr algn="ctr" indent="0" marL="0">
+            <a:pPr marL="0" indent="0" algn="ctr">
               <a:buNone/>
             </a:pPr>
             <a:r>
@@ -15907,7 +15593,7 @@
             <a:endParaRPr lang="en-US" sz="1300" dirty="0"/>
           </a:p>
           <a:p>
-            <a:pPr algn="ctr" indent="0" marL="0">
+            <a:pPr marL="0" indent="0" algn="ctr">
               <a:buNone/>
             </a:pPr>
             <a:r>
@@ -15946,7 +15632,7 @@
           <a:bodyPr wrap="square" lIns="0" tIns="0" rIns="0" bIns="0" rtlCol="0" anchor="ctr"/>
           <a:lstStyle/>
           <a:p>
-            <a:pPr algn="ctr" indent="0" marL="0">
+            <a:pPr marL="0" indent="0" algn="ctr">
               <a:buNone/>
             </a:pPr>
             <a:r>
@@ -16039,11 +15725,11 @@
           <a:bodyPr wrap="square" lIns="0" tIns="0" rIns="0" bIns="0" rtlCol="0" anchor="ctr"/>
           <a:lstStyle/>
           <a:p>
-            <a:pPr algn="ctr" indent="0" marL="0">
+            <a:pPr marL="0" indent="0" algn="ctr">
               <a:buNone/>
             </a:pPr>
             <a:r>
-              <a:rPr lang="en-US" sz="1000" b="1" spc="100" kern="0" dirty="0">
+              <a:rPr lang="en-US" sz="1000" b="1" kern="0" spc="100" dirty="0">
                 <a:solidFill>
                   <a:srgbClr val="FFFFFF"/>
                 </a:solidFill>
@@ -16078,7 +15764,7 @@
           <a:bodyPr wrap="square" lIns="0" tIns="0" rIns="0" bIns="0" rtlCol="0" anchor="ctr"/>
           <a:lstStyle/>
           <a:p>
-            <a:pPr algn="ctr" indent="0" marL="0">
+            <a:pPr marL="0" indent="0" algn="ctr">
               <a:buNone/>
             </a:pPr>
             <a:r>
@@ -16095,7 +15781,7 @@
             <a:endParaRPr lang="en-US" sz="1300" dirty="0"/>
           </a:p>
           <a:p>
-            <a:pPr algn="ctr" indent="0" marL="0">
+            <a:pPr marL="0" indent="0" algn="ctr">
               <a:buNone/>
             </a:pPr>
             <a:r>
@@ -16134,7 +15820,7 @@
           <a:bodyPr wrap="square" lIns="0" tIns="0" rIns="0" bIns="0" rtlCol="0" anchor="ctr"/>
           <a:lstStyle/>
           <a:p>
-            <a:pPr algn="ctr" indent="0" marL="0">
+            <a:pPr marL="0" indent="0" algn="ctr">
               <a:buNone/>
             </a:pPr>
             <a:r>
@@ -16227,11 +15913,11 @@
           <a:bodyPr wrap="square" lIns="0" tIns="0" rIns="0" bIns="0" rtlCol="0" anchor="ctr"/>
           <a:lstStyle/>
           <a:p>
-            <a:pPr algn="ctr" indent="0" marL="0">
+            <a:pPr marL="0" indent="0" algn="ctr">
               <a:buNone/>
             </a:pPr>
             <a:r>
-              <a:rPr lang="en-US" sz="1000" b="1" spc="100" kern="0" dirty="0">
+              <a:rPr lang="en-US" sz="1000" b="1" kern="0" spc="100" dirty="0">
                 <a:solidFill>
                   <a:srgbClr val="FFFFFF"/>
                 </a:solidFill>
@@ -16266,7 +15952,7 @@
           <a:bodyPr wrap="square" lIns="0" tIns="0" rIns="0" bIns="0" rtlCol="0" anchor="ctr"/>
           <a:lstStyle/>
           <a:p>
-            <a:pPr algn="ctr" indent="0" marL="0">
+            <a:pPr marL="0" indent="0" algn="ctr">
               <a:buNone/>
             </a:pPr>
             <a:r>
@@ -16283,7 +15969,7 @@
             <a:endParaRPr lang="en-US" sz="1300" dirty="0"/>
           </a:p>
           <a:p>
-            <a:pPr algn="ctr" indent="0" marL="0">
+            <a:pPr marL="0" indent="0" algn="ctr">
               <a:buNone/>
             </a:pPr>
             <a:r>
@@ -16322,7 +16008,7 @@
           <a:bodyPr wrap="square" lIns="0" tIns="0" rIns="0" bIns="0" rtlCol="0" anchor="ctr"/>
           <a:lstStyle/>
           <a:p>
-            <a:pPr algn="ctr" indent="0" marL="0">
+            <a:pPr marL="0" indent="0" algn="ctr">
               <a:buNone/>
             </a:pPr>
             <a:r>
@@ -16415,11 +16101,11 @@
           <a:bodyPr wrap="square" lIns="0" tIns="0" rIns="0" bIns="0" rtlCol="0" anchor="ctr"/>
           <a:lstStyle/>
           <a:p>
-            <a:pPr algn="ctr" indent="0" marL="0">
+            <a:pPr marL="0" indent="0" algn="ctr">
               <a:buNone/>
             </a:pPr>
             <a:r>
-              <a:rPr lang="en-US" sz="1000" b="1" spc="100" kern="0" dirty="0">
+              <a:rPr lang="en-US" sz="1000" b="1" kern="0" spc="100" dirty="0">
                 <a:solidFill>
                   <a:srgbClr val="FFFFFF"/>
                 </a:solidFill>
@@ -16454,7 +16140,7 @@
           <a:bodyPr wrap="square" lIns="0" tIns="0" rIns="0" bIns="0" rtlCol="0" anchor="ctr"/>
           <a:lstStyle/>
           <a:p>
-            <a:pPr algn="ctr" indent="0" marL="0">
+            <a:pPr marL="0" indent="0" algn="ctr">
               <a:buNone/>
             </a:pPr>
             <a:r>
@@ -16471,7 +16157,7 @@
             <a:endParaRPr lang="en-US" sz="1300" dirty="0"/>
           </a:p>
           <a:p>
-            <a:pPr algn="ctr" indent="0" marL="0">
+            <a:pPr marL="0" indent="0" algn="ctr">
               <a:buNone/>
             </a:pPr>
             <a:r>
@@ -16488,7 +16174,7 @@
             <a:endParaRPr lang="en-US" sz="1300" dirty="0"/>
           </a:p>
           <a:p>
-            <a:pPr algn="ctr" indent="0" marL="0">
+            <a:pPr marL="0" indent="0" algn="ctr">
               <a:buNone/>
             </a:pPr>
             <a:r>
@@ -16527,7 +16213,7 @@
           <a:bodyPr wrap="square" lIns="0" tIns="0" rIns="0" bIns="0" rtlCol="0" anchor="ctr"/>
           <a:lstStyle/>
           <a:p>
-            <a:pPr algn="ctr" indent="0" marL="0">
+            <a:pPr marL="0" indent="0" algn="ctr">
               <a:buNone/>
             </a:pPr>
             <a:r>
@@ -16620,11 +16306,11 @@
           <a:bodyPr wrap="square" lIns="0" tIns="0" rIns="0" bIns="0" rtlCol="0" anchor="ctr"/>
           <a:lstStyle/>
           <a:p>
-            <a:pPr algn="ctr" indent="0" marL="0">
+            <a:pPr marL="0" indent="0" algn="ctr">
               <a:buNone/>
             </a:pPr>
             <a:r>
-              <a:rPr lang="en-US" sz="1000" b="1" spc="100" kern="0" dirty="0">
+              <a:rPr lang="en-US" sz="1000" b="1" kern="0" spc="100" dirty="0">
                 <a:solidFill>
                   <a:srgbClr val="FFFFFF"/>
                 </a:solidFill>
@@ -16659,7 +16345,7 @@
           <a:bodyPr wrap="square" lIns="0" tIns="0" rIns="0" bIns="0" rtlCol="0" anchor="ctr"/>
           <a:lstStyle/>
           <a:p>
-            <a:pPr algn="ctr" indent="0" marL="0">
+            <a:pPr marL="0" indent="0" algn="ctr">
               <a:buNone/>
             </a:pPr>
             <a:r>
@@ -16698,7 +16384,7 @@
           <a:bodyPr wrap="square" lIns="0" tIns="0" rIns="0" bIns="0" rtlCol="0" anchor="ctr"/>
           <a:lstStyle/>
           <a:p>
-            <a:pPr algn="ctr" indent="0" marL="0">
+            <a:pPr marL="0" indent="0" algn="ctr">
               <a:buNone/>
             </a:pPr>
             <a:r>
@@ -16791,7 +16477,7 @@
           <a:bodyPr wrap="square" lIns="0" tIns="0" rIns="0" bIns="0" rtlCol="0" anchor="ctr"/>
           <a:lstStyle/>
           <a:p>
-            <a:pPr indent="0" marL="0">
+            <a:pPr marL="0" indent="0">
               <a:buNone/>
             </a:pPr>
             <a:r>
@@ -16830,7 +16516,7 @@
           <a:bodyPr wrap="square" lIns="0" tIns="0" rIns="0" bIns="0" rtlCol="0" anchor="t"/>
           <a:lstStyle/>
           <a:p>
-            <a:pPr indent="0" marL="0">
+            <a:pPr marL="0" indent="0">
               <a:spcAft>
                 <a:spcPts val="400"/>
               </a:spcAft>
@@ -16847,12 +16533,6 @@
               </a:rPr>
               <a:t>50 min de teoría: </a:t>
             </a:r>
-            <a:pPr indent="0" marL="0">
-              <a:spcAft>
-                <a:spcPts val="400"/>
-              </a:spcAft>
-              <a:buNone/>
-            </a:pPr>
             <a:r>
               <a:rPr lang="en-US" sz="1250" dirty="0">
                 <a:solidFill>
@@ -16867,7 +16547,7 @@
             <a:endParaRPr lang="en-US" sz="1250" dirty="0"/>
           </a:p>
           <a:p>
-            <a:pPr indent="0" marL="0">
+            <a:pPr marL="0" indent="0">
               <a:spcAft>
                 <a:spcPts val="400"/>
               </a:spcAft>
@@ -16884,12 +16564,6 @@
               </a:rPr>
               <a:t>60 min en Colab: </a:t>
             </a:r>
-            <a:pPr indent="0" marL="0">
-              <a:spcAft>
-                <a:spcPts val="400"/>
-              </a:spcAft>
-              <a:buNone/>
-            </a:pPr>
             <a:r>
               <a:rPr lang="en-US" sz="1250" dirty="0">
                 <a:solidFill>
@@ -16904,7 +16578,7 @@
             <a:endParaRPr lang="en-US" sz="1250" dirty="0"/>
           </a:p>
           <a:p>
-            <a:pPr indent="0" marL="0">
+            <a:pPr marL="0" indent="0">
               <a:spcAft>
                 <a:spcPts val="400"/>
               </a:spcAft>
@@ -16921,12 +16595,6 @@
               </a:rPr>
               <a:t>10 min de cierre: </a:t>
             </a:r>
-            <a:pPr indent="0" marL="0">
-              <a:spcAft>
-                <a:spcPts val="400"/>
-              </a:spcAft>
-              <a:buNone/>
-            </a:pPr>
             <a:r>
               <a:rPr lang="en-US" sz="1250" dirty="0">
                 <a:solidFill>
@@ -17017,7 +16685,7 @@
           <a:bodyPr wrap="square" lIns="0" tIns="0" rIns="0" bIns="0" rtlCol="0" anchor="ctr"/>
           <a:lstStyle/>
           <a:p>
-            <a:pPr indent="0" marL="0">
+            <a:pPr marL="0" indent="0">
               <a:buNone/>
             </a:pPr>
             <a:r>
@@ -17056,7 +16724,7 @@
           <a:bodyPr wrap="square" lIns="0" tIns="0" rIns="0" bIns="0" rtlCol="0" anchor="t"/>
           <a:lstStyle/>
           <a:p>
-            <a:pPr indent="0" marL="0">
+            <a:pPr marL="0" indent="0">
               <a:spcAft>
                 <a:spcPts val="400"/>
               </a:spcAft>
@@ -17073,12 +16741,6 @@
               </a:rPr>
               <a:t>Parcial · lun 19/10 · </a:t>
             </a:r>
-            <a:pPr indent="0" marL="0">
-              <a:spcAft>
-                <a:spcPts val="400"/>
-              </a:spcAft>
-              <a:buNone/>
-            </a:pPr>
             <a:r>
               <a:rPr lang="en-US" sz="1250" dirty="0">
                 <a:solidFill>
@@ -17093,7 +16755,7 @@
             <a:endParaRPr lang="en-US" sz="1250" dirty="0"/>
           </a:p>
           <a:p>
-            <a:pPr indent="0" marL="0">
+            <a:pPr marL="0" indent="0">
               <a:spcAft>
                 <a:spcPts val="400"/>
               </a:spcAft>
@@ -17110,12 +16772,6 @@
               </a:rPr>
               <a:t>Final · vie 6/11 · </a:t>
             </a:r>
-            <a:pPr indent="0" marL="0">
-              <a:spcAft>
-                <a:spcPts val="400"/>
-              </a:spcAft>
-              <a:buNone/>
-            </a:pPr>
             <a:r>
               <a:rPr lang="en-US" sz="1250" dirty="0">
                 <a:solidFill>
@@ -17130,7 +16786,7 @@
             <a:endParaRPr lang="en-US" sz="1250" dirty="0"/>
           </a:p>
           <a:p>
-            <a:pPr indent="0" marL="0">
+            <a:pPr marL="0" indent="0">
               <a:spcAft>
                 <a:spcPts val="400"/>
               </a:spcAft>
@@ -17147,12 +16803,6 @@
               </a:rPr>
               <a:t>Proyecto final · </a:t>
             </a:r>
-            <a:pPr indent="0" marL="0">
-              <a:spcAft>
-                <a:spcPts val="400"/>
-              </a:spcAft>
-              <a:buNone/>
-            </a:pPr>
             <a:r>
               <a:rPr lang="en-US" sz="1250" dirty="0">
                 <a:solidFill>
@@ -17184,6 +16834,7 @@
         <a:solidFill>
           <a:srgbClr val="F5F7FB"/>
         </a:solidFill>
+        <a:effectLst/>
       </p:bgPr>
     </p:bg>
     <p:spTree>
@@ -17248,11 +16899,11 @@
           <a:bodyPr wrap="square" lIns="0" tIns="0" rIns="0" bIns="0" rtlCol="0" anchor="ctr"/>
           <a:lstStyle/>
           <a:p>
-            <a:pPr algn="ctr" indent="0" marL="0">
+            <a:pPr marL="0" indent="0" algn="ctr">
               <a:buNone/>
             </a:pPr>
             <a:r>
-              <a:rPr lang="en-US" sz="1100" b="1" spc="150" kern="0" dirty="0">
+              <a:rPr lang="en-US" sz="1100" b="1" kern="0" spc="150" dirty="0">
                 <a:solidFill>
                   <a:srgbClr val="FFFFFF"/>
                 </a:solidFill>
@@ -17287,7 +16938,7 @@
           <a:bodyPr wrap="square" lIns="0" tIns="0" rIns="0" bIns="0" rtlCol="0" anchor="ctr"/>
           <a:lstStyle/>
           <a:p>
-            <a:pPr indent="0" marL="0">
+            <a:pPr marL="0" indent="0">
               <a:buNone/>
             </a:pPr>
             <a:r>
@@ -17326,7 +16977,7 @@
           <a:bodyPr wrap="square" lIns="0" tIns="0" rIns="0" bIns="0" rtlCol="0" anchor="ctr"/>
           <a:lstStyle/>
           <a:p>
-            <a:pPr indent="0" marL="0">
+            <a:pPr marL="0" indent="0">
               <a:buNone/>
             </a:pPr>
             <a:r>
@@ -17346,7 +16997,7 @@
       </p:sp>
       <p:graphicFrame>
         <p:nvGraphicFramePr>
-          <p:cNvPr id="4" name="Table 0"/>
+          <p:cNvPr id="6" name="Table 0"/>
           <p:cNvGraphicFramePr>
             <a:graphicFrameLocks noGrp="1"/>
           </p:cNvGraphicFramePr>
@@ -17367,9 +17018,27 @@
             <a:tbl>
               <a:tblPr/>
               <a:tblGrid>
-                <a:gridCol w="822960"/>
-                <a:gridCol w="5212080"/>
-                <a:gridCol w="731520"/>
+                <a:gridCol w="822960">
+                  <a:extLst>
+                    <a:ext uri="{9D8B030D-6E8A-4147-A177-3AD203B41FA5}">
+                      <a16:colId xmlns:a16="http://schemas.microsoft.com/office/drawing/2014/main" val="20000"/>
+                    </a:ext>
+                  </a:extLst>
+                </a:gridCol>
+                <a:gridCol w="5212080">
+                  <a:extLst>
+                    <a:ext uri="{9D8B030D-6E8A-4147-A177-3AD203B41FA5}">
+                      <a16:colId xmlns:a16="http://schemas.microsoft.com/office/drawing/2014/main" val="20001"/>
+                    </a:ext>
+                  </a:extLst>
+                </a:gridCol>
+                <a:gridCol w="731520">
+                  <a:extLst>
+                    <a:ext uri="{9D8B030D-6E8A-4147-A177-3AD203B41FA5}">
+                      <a16:colId xmlns:a16="http://schemas.microsoft.com/office/drawing/2014/main" val="20002"/>
+                    </a:ext>
+                  </a:extLst>
+                </a:gridCol>
               </a:tblGrid>
               <a:tr h="420624">
                 <a:tc>
@@ -17377,7 +17046,7 @@
                     <a:bodyPr/>
                     <a:lstStyle/>
                     <a:p>
-                      <a:pPr indent="0" marL="0">
+                      <a:pPr marL="0" indent="0">
                         <a:buNone/>
                       </a:pPr>
                       <a:r>
@@ -17445,7 +17114,7 @@
                     <a:bodyPr/>
                     <a:lstStyle/>
                     <a:p>
-                      <a:pPr indent="0" marL="0">
+                      <a:pPr marL="0" indent="0">
                         <a:buNone/>
                       </a:pPr>
                       <a:r>
@@ -17513,7 +17182,7 @@
                     <a:bodyPr/>
                     <a:lstStyle/>
                     <a:p>
-                      <a:pPr algn="ctr" indent="0" marL="0">
+                      <a:pPr marL="0" indent="0" algn="ctr">
                         <a:buNone/>
                       </a:pPr>
                       <a:r>
@@ -17576,6 +17245,11 @@
                     </a:solidFill>
                   </a:tcPr>
                 </a:tc>
+                <a:extLst>
+                  <a:ext uri="{0D108BD9-81ED-4DB2-BD59-A6C34878D82A}">
+                    <a16:rowId xmlns:a16="http://schemas.microsoft.com/office/drawing/2014/main" val="10000"/>
+                  </a:ext>
+                </a:extLst>
               </a:tr>
               <a:tr h="420624">
                 <a:tc>
@@ -17583,7 +17257,7 @@
                     <a:bodyPr/>
                     <a:lstStyle/>
                     <a:p>
-                      <a:pPr indent="0" marL="0">
+                      <a:pPr marL="0" indent="0">
                         <a:buNone/>
                       </a:pPr>
                       <a:r>
@@ -17651,7 +17325,7 @@
                     <a:bodyPr/>
                     <a:lstStyle/>
                     <a:p>
-                      <a:pPr indent="0" marL="0">
+                      <a:pPr marL="0" indent="0">
                         <a:buNone/>
                       </a:pPr>
                       <a:r>
@@ -17719,7 +17393,7 @@
                     <a:bodyPr/>
                     <a:lstStyle/>
                     <a:p>
-                      <a:pPr algn="ctr" indent="0" marL="0">
+                      <a:pPr marL="0" indent="0" algn="ctr">
                         <a:buNone/>
                       </a:pPr>
                       <a:r>
@@ -17782,6 +17456,11 @@
                     </a:solidFill>
                   </a:tcPr>
                 </a:tc>
+                <a:extLst>
+                  <a:ext uri="{0D108BD9-81ED-4DB2-BD59-A6C34878D82A}">
+                    <a16:rowId xmlns:a16="http://schemas.microsoft.com/office/drawing/2014/main" val="10001"/>
+                  </a:ext>
+                </a:extLst>
               </a:tr>
               <a:tr h="420624">
                 <a:tc>
@@ -17789,7 +17468,7 @@
                     <a:bodyPr/>
                     <a:lstStyle/>
                     <a:p>
-                      <a:pPr indent="0" marL="0">
+                      <a:pPr marL="0" indent="0">
                         <a:buNone/>
                       </a:pPr>
                       <a:r>
@@ -17857,7 +17536,7 @@
                     <a:bodyPr/>
                     <a:lstStyle/>
                     <a:p>
-                      <a:pPr indent="0" marL="0">
+                      <a:pPr marL="0" indent="0">
                         <a:buNone/>
                       </a:pPr>
                       <a:r>
@@ -17925,7 +17604,7 @@
                     <a:bodyPr/>
                     <a:lstStyle/>
                     <a:p>
-                      <a:pPr algn="ctr" indent="0" marL="0">
+                      <a:pPr marL="0" indent="0" algn="ctr">
                         <a:buNone/>
                       </a:pPr>
                       <a:r>
@@ -17988,6 +17667,11 @@
                     </a:solidFill>
                   </a:tcPr>
                 </a:tc>
+                <a:extLst>
+                  <a:ext uri="{0D108BD9-81ED-4DB2-BD59-A6C34878D82A}">
+                    <a16:rowId xmlns:a16="http://schemas.microsoft.com/office/drawing/2014/main" val="10002"/>
+                  </a:ext>
+                </a:extLst>
               </a:tr>
               <a:tr h="420624">
                 <a:tc>
@@ -17995,7 +17679,7 @@
                     <a:bodyPr/>
                     <a:lstStyle/>
                     <a:p>
-                      <a:pPr indent="0" marL="0">
+                      <a:pPr marL="0" indent="0">
                         <a:buNone/>
                       </a:pPr>
                       <a:r>
@@ -18063,7 +17747,7 @@
                     <a:bodyPr/>
                     <a:lstStyle/>
                     <a:p>
-                      <a:pPr indent="0" marL="0">
+                      <a:pPr marL="0" indent="0">
                         <a:buNone/>
                       </a:pPr>
                       <a:r>
@@ -18131,7 +17815,7 @@
                     <a:bodyPr/>
                     <a:lstStyle/>
                     <a:p>
-                      <a:pPr algn="ctr" indent="0" marL="0">
+                      <a:pPr marL="0" indent="0" algn="ctr">
                         <a:buNone/>
                       </a:pPr>
                       <a:r>
@@ -18194,6 +17878,11 @@
                     </a:solidFill>
                   </a:tcPr>
                 </a:tc>
+                <a:extLst>
+                  <a:ext uri="{0D108BD9-81ED-4DB2-BD59-A6C34878D82A}">
+                    <a16:rowId xmlns:a16="http://schemas.microsoft.com/office/drawing/2014/main" val="10003"/>
+                  </a:ext>
+                </a:extLst>
               </a:tr>
               <a:tr h="420624">
                 <a:tc>
@@ -18201,7 +17890,7 @@
                     <a:bodyPr/>
                     <a:lstStyle/>
                     <a:p>
-                      <a:pPr indent="0" marL="0">
+                      <a:pPr marL="0" indent="0">
                         <a:buNone/>
                       </a:pPr>
                       <a:r>
@@ -18269,7 +17958,7 @@
                     <a:bodyPr/>
                     <a:lstStyle/>
                     <a:p>
-                      <a:pPr indent="0" marL="0">
+                      <a:pPr marL="0" indent="0">
                         <a:buNone/>
                       </a:pPr>
                       <a:r>
@@ -18337,7 +18026,7 @@
                     <a:bodyPr/>
                     <a:lstStyle/>
                     <a:p>
-                      <a:pPr algn="ctr" indent="0" marL="0">
+                      <a:pPr marL="0" indent="0" algn="ctr">
                         <a:buNone/>
                       </a:pPr>
                       <a:r>
@@ -18400,6 +18089,11 @@
                     </a:solidFill>
                   </a:tcPr>
                 </a:tc>
+                <a:extLst>
+                  <a:ext uri="{0D108BD9-81ED-4DB2-BD59-A6C34878D82A}">
+                    <a16:rowId xmlns:a16="http://schemas.microsoft.com/office/drawing/2014/main" val="10004"/>
+                  </a:ext>
+                </a:extLst>
               </a:tr>
               <a:tr h="420624">
                 <a:tc>
@@ -18407,7 +18101,7 @@
                     <a:bodyPr/>
                     <a:lstStyle/>
                     <a:p>
-                      <a:pPr indent="0" marL="0">
+                      <a:pPr marL="0" indent="0">
                         <a:buNone/>
                       </a:pPr>
                       <a:r>
@@ -18475,7 +18169,7 @@
                     <a:bodyPr/>
                     <a:lstStyle/>
                     <a:p>
-                      <a:pPr indent="0" marL="0">
+                      <a:pPr marL="0" indent="0">
                         <a:buNone/>
                       </a:pPr>
                       <a:r>
@@ -18543,7 +18237,7 @@
                     <a:bodyPr/>
                     <a:lstStyle/>
                     <a:p>
-                      <a:pPr algn="ctr" indent="0" marL="0">
+                      <a:pPr marL="0" indent="0" algn="ctr">
                         <a:buNone/>
                       </a:pPr>
                       <a:r>
@@ -18606,6 +18300,11 @@
                     </a:solidFill>
                   </a:tcPr>
                 </a:tc>
+                <a:extLst>
+                  <a:ext uri="{0D108BD9-81ED-4DB2-BD59-A6C34878D82A}">
+                    <a16:rowId xmlns:a16="http://schemas.microsoft.com/office/drawing/2014/main" val="10005"/>
+                  </a:ext>
+                </a:extLst>
               </a:tr>
               <a:tr h="420624">
                 <a:tc>
@@ -18613,7 +18312,7 @@
                     <a:bodyPr/>
                     <a:lstStyle/>
                     <a:p>
-                      <a:pPr indent="0" marL="0">
+                      <a:pPr marL="0" indent="0">
                         <a:buNone/>
                       </a:pPr>
                       <a:r>
@@ -18681,7 +18380,7 @@
                     <a:bodyPr/>
                     <a:lstStyle/>
                     <a:p>
-                      <a:pPr indent="0" marL="0">
+                      <a:pPr marL="0" indent="0">
                         <a:buNone/>
                       </a:pPr>
                       <a:r>
@@ -18749,7 +18448,7 @@
                     <a:bodyPr/>
                     <a:lstStyle/>
                     <a:p>
-                      <a:pPr algn="ctr" indent="0" marL="0">
+                      <a:pPr marL="0" indent="0" algn="ctr">
                         <a:buNone/>
                       </a:pPr>
                       <a:r>
@@ -18812,6 +18511,11 @@
                     </a:solidFill>
                   </a:tcPr>
                 </a:tc>
+                <a:extLst>
+                  <a:ext uri="{0D108BD9-81ED-4DB2-BD59-A6C34878D82A}">
+                    <a16:rowId xmlns:a16="http://schemas.microsoft.com/office/drawing/2014/main" val="10006"/>
+                  </a:ext>
+                </a:extLst>
               </a:tr>
               <a:tr h="420624">
                 <a:tc>
@@ -18819,7 +18523,7 @@
                     <a:bodyPr/>
                     <a:lstStyle/>
                     <a:p>
-                      <a:pPr indent="0" marL="0">
+                      <a:pPr marL="0" indent="0">
                         <a:buNone/>
                       </a:pPr>
                       <a:r>
@@ -18887,7 +18591,7 @@
                     <a:bodyPr/>
                     <a:lstStyle/>
                     <a:p>
-                      <a:pPr indent="0" marL="0">
+                      <a:pPr marL="0" indent="0">
                         <a:buNone/>
                       </a:pPr>
                       <a:r>
@@ -18955,7 +18659,7 @@
                     <a:bodyPr/>
                     <a:lstStyle/>
                     <a:p>
-                      <a:pPr algn="ctr" indent="0" marL="0">
+                      <a:pPr marL="0" indent="0" algn="ctr">
                         <a:buNone/>
                       </a:pPr>
                       <a:r>
@@ -19018,6 +18722,11 @@
                     </a:solidFill>
                   </a:tcPr>
                 </a:tc>
+                <a:extLst>
+                  <a:ext uri="{0D108BD9-81ED-4DB2-BD59-A6C34878D82A}">
+                    <a16:rowId xmlns:a16="http://schemas.microsoft.com/office/drawing/2014/main" val="10007"/>
+                  </a:ext>
+                </a:extLst>
               </a:tr>
             </a:tbl>
           </a:graphicData>
@@ -19098,7 +18807,7 @@
           <a:bodyPr wrap="square" lIns="0" tIns="0" rIns="0" bIns="0" rtlCol="0" anchor="ctr"/>
           <a:lstStyle/>
           <a:p>
-            <a:pPr indent="0" marL="0">
+            <a:pPr marL="0" indent="0">
               <a:buNone/>
             </a:pPr>
             <a:r>
@@ -19318,7 +19027,7 @@
           <a:bodyPr wrap="square" lIns="0" tIns="0" rIns="0" bIns="0" rtlCol="0" anchor="ctr"/>
           <a:lstStyle/>
           <a:p>
-            <a:pPr indent="0" marL="0">
+            <a:pPr marL="0" indent="0">
               <a:buNone/>
             </a:pPr>
             <a:r>
@@ -19357,7 +19066,7 @@
           <a:bodyPr wrap="square" lIns="0" tIns="0" rIns="0" bIns="0" rtlCol="0" anchor="t"/>
           <a:lstStyle/>
           <a:p>
-            <a:pPr indent="0" marL="0">
+            <a:pPr marL="0" indent="0">
               <a:spcAft>
                 <a:spcPts val="400"/>
               </a:spcAft>
@@ -19394,6 +19103,7 @@
         <a:solidFill>
           <a:srgbClr val="F5F7FB"/>
         </a:solidFill>
+        <a:effectLst/>
       </p:bgPr>
     </p:bg>
     <p:spTree>
@@ -19458,11 +19168,11 @@
           <a:bodyPr wrap="square" lIns="0" tIns="0" rIns="0" bIns="0" rtlCol="0" anchor="ctr"/>
           <a:lstStyle/>
           <a:p>
-            <a:pPr algn="ctr" indent="0" marL="0">
+            <a:pPr marL="0" indent="0" algn="ctr">
               <a:buNone/>
             </a:pPr>
             <a:r>
-              <a:rPr lang="en-US" sz="1100" b="1" spc="150" kern="0" dirty="0">
+              <a:rPr lang="en-US" sz="1100" b="1" kern="0" spc="150" dirty="0">
                 <a:solidFill>
                   <a:srgbClr val="FFFFFF"/>
                 </a:solidFill>
@@ -19497,7 +19207,7 @@
           <a:bodyPr wrap="square" lIns="0" tIns="0" rIns="0" bIns="0" rtlCol="0" anchor="ctr"/>
           <a:lstStyle/>
           <a:p>
-            <a:pPr indent="0" marL="0">
+            <a:pPr marL="0" indent="0">
               <a:buNone/>
             </a:pPr>
             <a:r>
@@ -19536,7 +19246,7 @@
           <a:bodyPr wrap="square" lIns="0" tIns="0" rIns="0" bIns="0" rtlCol="0" anchor="ctr"/>
           <a:lstStyle/>
           <a:p>
-            <a:pPr indent="0" marL="0">
+            <a:pPr marL="0" indent="0">
               <a:buNone/>
             </a:pPr>
             <a:r>
@@ -19629,7 +19339,7 @@
           <a:bodyPr wrap="square" lIns="0" tIns="0" rIns="0" bIns="0" rtlCol="0" anchor="ctr"/>
           <a:lstStyle/>
           <a:p>
-            <a:pPr indent="0" marL="0">
+            <a:pPr marL="0" indent="0">
               <a:buNone/>
             </a:pPr>
             <a:r>
@@ -19695,7 +19405,7 @@
           <a:bodyPr wrap="square" lIns="0" tIns="0" rIns="0" bIns="0" rtlCol="0" anchor="ctr"/>
           <a:lstStyle/>
           <a:p>
-            <a:pPr algn="ctr" indent="0" marL="0">
+            <a:pPr marL="0" indent="0" algn="ctr">
               <a:buNone/>
             </a:pPr>
             <a:r>
@@ -19761,7 +19471,7 @@
           <a:bodyPr wrap="square" lIns="0" tIns="0" rIns="0" bIns="0" rtlCol="0" anchor="ctr"/>
           <a:lstStyle/>
           <a:p>
-            <a:pPr algn="ctr" indent="0" marL="0">
+            <a:pPr marL="0" indent="0" algn="ctr">
               <a:buNone/>
             </a:pPr>
             <a:r>
@@ -19851,7 +19561,7 @@
           <a:bodyPr wrap="square" lIns="0" tIns="0" rIns="0" bIns="0" rtlCol="0" anchor="ctr"/>
           <a:lstStyle/>
           <a:p>
-            <a:pPr algn="ctr" indent="0" marL="0">
+            <a:pPr marL="0" indent="0" algn="ctr">
               <a:buNone/>
             </a:pPr>
             <a:r>
@@ -19941,7 +19651,7 @@
           <a:bodyPr wrap="square" lIns="0" tIns="0" rIns="0" bIns="0" rtlCol="0" anchor="ctr"/>
           <a:lstStyle/>
           <a:p>
-            <a:pPr algn="ctr" indent="0" marL="0">
+            <a:pPr marL="0" indent="0" algn="ctr">
               <a:buNone/>
             </a:pPr>
             <a:r>
@@ -19980,7 +19690,7 @@
           <a:bodyPr wrap="square" lIns="0" tIns="0" rIns="0" bIns="0" rtlCol="0" anchor="t"/>
           <a:lstStyle/>
           <a:p>
-            <a:pPr indent="0" marL="0">
+            <a:pPr marL="0" indent="0">
               <a:spcAft>
                 <a:spcPts val="400"/>
               </a:spcAft>
@@ -20076,7 +19786,7 @@
           <a:bodyPr wrap="square" lIns="0" tIns="0" rIns="0" bIns="0" rtlCol="0" anchor="ctr"/>
           <a:lstStyle/>
           <a:p>
-            <a:pPr indent="0" marL="0">
+            <a:pPr marL="0" indent="0">
               <a:buNone/>
             </a:pPr>
             <a:r>
@@ -20142,7 +19852,7 @@
           <a:bodyPr wrap="square" lIns="0" tIns="0" rIns="0" bIns="0" rtlCol="0" anchor="ctr"/>
           <a:lstStyle/>
           <a:p>
-            <a:pPr algn="ctr" indent="0" marL="0">
+            <a:pPr marL="0" indent="0" algn="ctr">
               <a:buNone/>
             </a:pPr>
             <a:r>
@@ -20208,7 +19918,7 @@
           <a:bodyPr wrap="square" lIns="0" tIns="0" rIns="0" bIns="0" rtlCol="0" anchor="ctr"/>
           <a:lstStyle/>
           <a:p>
-            <a:pPr algn="ctr" indent="0" marL="0">
+            <a:pPr marL="0" indent="0" algn="ctr">
               <a:buNone/>
             </a:pPr>
             <a:r>
@@ -20298,7 +20008,7 @@
           <a:bodyPr wrap="square" lIns="0" tIns="0" rIns="0" bIns="0" rtlCol="0" anchor="ctr"/>
           <a:lstStyle/>
           <a:p>
-            <a:pPr algn="ctr" indent="0" marL="0">
+            <a:pPr marL="0" indent="0" algn="ctr">
               <a:buNone/>
             </a:pPr>
             <a:r>
@@ -20315,7 +20025,7 @@
             <a:endParaRPr lang="en-US" sz="1300" dirty="0"/>
           </a:p>
           <a:p>
-            <a:pPr algn="ctr" indent="0" marL="0">
+            <a:pPr marL="0" indent="0" algn="ctr">
               <a:buNone/>
             </a:pPr>
             <a:r>
@@ -20405,7 +20115,7 @@
           <a:bodyPr wrap="square" lIns="0" tIns="0" rIns="0" bIns="0" rtlCol="0" anchor="ctr"/>
           <a:lstStyle/>
           <a:p>
-            <a:pPr algn="ctr" indent="0" marL="0">
+            <a:pPr marL="0" indent="0" algn="ctr">
               <a:buNone/>
             </a:pPr>
             <a:r>
@@ -20422,7 +20132,7 @@
             <a:endParaRPr lang="en-US" sz="1250" dirty="0"/>
           </a:p>
           <a:p>
-            <a:pPr algn="ctr" indent="0" marL="0">
+            <a:pPr marL="0" indent="0" algn="ctr">
               <a:buNone/>
             </a:pPr>
             <a:r>
@@ -20461,7 +20171,7 @@
           <a:bodyPr wrap="square" lIns="0" tIns="0" rIns="0" bIns="0" rtlCol="0" anchor="t"/>
           <a:lstStyle/>
           <a:p>
-            <a:pPr indent="0" marL="0">
+            <a:pPr marL="0" indent="0">
               <a:spcAft>
                 <a:spcPts val="400"/>
               </a:spcAft>
@@ -20557,7 +20267,7 @@
           <a:bodyPr wrap="square" lIns="0" tIns="0" rIns="0" bIns="0" rtlCol="0" anchor="ctr"/>
           <a:lstStyle/>
           <a:p>
-            <a:pPr indent="0" marL="0">
+            <a:pPr marL="0" indent="0">
               <a:buNone/>
             </a:pPr>
             <a:r>
@@ -20596,7 +20306,7 @@
           <a:bodyPr wrap="square" lIns="0" tIns="0" rIns="0" bIns="0" rtlCol="0" anchor="t"/>
           <a:lstStyle/>
           <a:p>
-            <a:pPr indent="0" marL="0">
+            <a:pPr marL="0" indent="0">
               <a:spcAft>
                 <a:spcPts val="400"/>
               </a:spcAft>
@@ -20613,12 +20323,6 @@
               </a:rPr>
               <a:t>Tradicional: </a:t>
             </a:r>
-            <a:pPr indent="0" marL="0">
-              <a:spcAft>
-                <a:spcPts val="400"/>
-              </a:spcAft>
-              <a:buNone/>
-            </a:pPr>
             <a:r>
               <a:rPr lang="en-US" sz="1300" dirty="0">
                 <a:solidFill>
@@ -20633,7 +20337,7 @@
             <a:endParaRPr lang="en-US" sz="1300" dirty="0"/>
           </a:p>
           <a:p>
-            <a:pPr indent="0" marL="0">
+            <a:pPr marL="0" indent="0">
               <a:spcAft>
                 <a:spcPts val="400"/>
               </a:spcAft>
@@ -20650,12 +20354,6 @@
               </a:rPr>
               <a:t>ML: </a:t>
             </a:r>
-            <a:pPr indent="0" marL="0">
-              <a:spcAft>
-                <a:spcPts val="400"/>
-              </a:spcAft>
-              <a:buNone/>
-            </a:pPr>
             <a:r>
               <a:rPr lang="en-US" sz="1300" dirty="0">
                 <a:solidFill>
@@ -20687,6 +20385,7 @@
         <a:solidFill>
           <a:srgbClr val="F5F7FB"/>
         </a:solidFill>
+        <a:effectLst/>
       </p:bgPr>
     </p:bg>
     <p:spTree>
@@ -20751,11 +20450,11 @@
           <a:bodyPr wrap="square" lIns="0" tIns="0" rIns="0" bIns="0" rtlCol="0" anchor="ctr"/>
           <a:lstStyle/>
           <a:p>
-            <a:pPr algn="ctr" indent="0" marL="0">
+            <a:pPr marL="0" indent="0" algn="ctr">
               <a:buNone/>
             </a:pPr>
             <a:r>
-              <a:rPr lang="en-US" sz="1100" b="1" spc="150" kern="0" dirty="0">
+              <a:rPr lang="en-US" sz="1100" b="1" kern="0" spc="150" dirty="0">
                 <a:solidFill>
                   <a:srgbClr val="FFFFFF"/>
                 </a:solidFill>
@@ -20790,7 +20489,7 @@
           <a:bodyPr wrap="square" lIns="0" tIns="0" rIns="0" bIns="0" rtlCol="0" anchor="ctr"/>
           <a:lstStyle/>
           <a:p>
-            <a:pPr indent="0" marL="0">
+            <a:pPr marL="0" indent="0">
               <a:buNone/>
             </a:pPr>
             <a:r>
@@ -20829,7 +20528,7 @@
           <a:bodyPr wrap="square" lIns="0" tIns="0" rIns="0" bIns="0" rtlCol="0" anchor="ctr"/>
           <a:lstStyle/>
           <a:p>
-            <a:pPr indent="0" marL="0">
+            <a:pPr marL="0" indent="0">
               <a:buNone/>
             </a:pPr>
             <a:r>
@@ -20895,7 +20594,7 @@
           <a:bodyPr wrap="square" lIns="0" tIns="0" rIns="0" bIns="0" rtlCol="0" anchor="ctr"/>
           <a:lstStyle/>
           <a:p>
-            <a:pPr indent="0" marL="0">
+            <a:pPr marL="0" indent="0">
               <a:buNone/>
             </a:pPr>
             <a:r>
@@ -20915,7 +20614,7 @@
       </p:sp>
       <p:graphicFrame>
         <p:nvGraphicFramePr>
-          <p:cNvPr id="6" name="Table 0"/>
+          <p:cNvPr id="8" name="Table 0"/>
           <p:cNvGraphicFramePr>
             <a:graphicFrameLocks noGrp="1"/>
           </p:cNvGraphicFramePr>
@@ -20936,9 +20635,27 @@
             <a:tbl>
               <a:tblPr/>
               <a:tblGrid>
-                <a:gridCol w="822960"/>
-                <a:gridCol w="2011680"/>
-                <a:gridCol w="3749040"/>
+                <a:gridCol w="822960">
+                  <a:extLst>
+                    <a:ext uri="{9D8B030D-6E8A-4147-A177-3AD203B41FA5}">
+                      <a16:colId xmlns:a16="http://schemas.microsoft.com/office/drawing/2014/main" val="20000"/>
+                    </a:ext>
+                  </a:extLst>
+                </a:gridCol>
+                <a:gridCol w="2011680">
+                  <a:extLst>
+                    <a:ext uri="{9D8B030D-6E8A-4147-A177-3AD203B41FA5}">
+                      <a16:colId xmlns:a16="http://schemas.microsoft.com/office/drawing/2014/main" val="20001"/>
+                    </a:ext>
+                  </a:extLst>
+                </a:gridCol>
+                <a:gridCol w="3749040">
+                  <a:extLst>
+                    <a:ext uri="{9D8B030D-6E8A-4147-A177-3AD203B41FA5}">
+                      <a16:colId xmlns:a16="http://schemas.microsoft.com/office/drawing/2014/main" val="20002"/>
+                    </a:ext>
+                  </a:extLst>
+                </a:gridCol>
               </a:tblGrid>
               <a:tr h="402336">
                 <a:tc>
@@ -20946,7 +20663,7 @@
                     <a:bodyPr/>
                     <a:lstStyle/>
                     <a:p>
-                      <a:pPr indent="0" marL="0">
+                      <a:pPr marL="0" indent="0">
                         <a:buNone/>
                       </a:pPr>
                       <a:r>
@@ -21014,7 +20731,7 @@
                     <a:bodyPr/>
                     <a:lstStyle/>
                     <a:p>
-                      <a:pPr indent="0" marL="0">
+                      <a:pPr marL="0" indent="0">
                         <a:buNone/>
                       </a:pPr>
                       <a:r>
@@ -21082,7 +20799,7 @@
                     <a:bodyPr/>
                     <a:lstStyle/>
                     <a:p>
-                      <a:pPr indent="0" marL="0">
+                      <a:pPr marL="0" indent="0">
                         <a:buNone/>
                       </a:pPr>
                       <a:r>
@@ -21145,6 +20862,11 @@
                     </a:solidFill>
                   </a:tcPr>
                 </a:tc>
+                <a:extLst>
+                  <a:ext uri="{0D108BD9-81ED-4DB2-BD59-A6C34878D82A}">
+                    <a16:rowId xmlns:a16="http://schemas.microsoft.com/office/drawing/2014/main" val="10000"/>
+                  </a:ext>
+                </a:extLst>
               </a:tr>
               <a:tr h="402336">
                 <a:tc>
@@ -21152,7 +20874,7 @@
                     <a:bodyPr/>
                     <a:lstStyle/>
                     <a:p>
-                      <a:pPr indent="0" marL="0">
+                      <a:pPr marL="0" indent="0">
                         <a:buNone/>
                       </a:pPr>
                       <a:r>
@@ -21220,7 +20942,7 @@
                     <a:bodyPr/>
                     <a:lstStyle/>
                     <a:p>
-                      <a:pPr indent="0" marL="0">
+                      <a:pPr marL="0" indent="0">
                         <a:buNone/>
                       </a:pPr>
                       <a:r>
@@ -21288,7 +21010,7 @@
                     <a:bodyPr/>
                     <a:lstStyle/>
                     <a:p>
-                      <a:pPr indent="0" marL="0">
+                      <a:pPr marL="0" indent="0">
                         <a:buNone/>
                       </a:pPr>
                       <a:r>
@@ -21351,6 +21073,11 @@
                     </a:solidFill>
                   </a:tcPr>
                 </a:tc>
+                <a:extLst>
+                  <a:ext uri="{0D108BD9-81ED-4DB2-BD59-A6C34878D82A}">
+                    <a16:rowId xmlns:a16="http://schemas.microsoft.com/office/drawing/2014/main" val="10001"/>
+                  </a:ext>
+                </a:extLst>
               </a:tr>
               <a:tr h="402336">
                 <a:tc>
@@ -21358,7 +21085,7 @@
                     <a:bodyPr/>
                     <a:lstStyle/>
                     <a:p>
-                      <a:pPr indent="0" marL="0">
+                      <a:pPr marL="0" indent="0">
                         <a:buNone/>
                       </a:pPr>
                       <a:r>
@@ -21426,7 +21153,7 @@
                     <a:bodyPr/>
                     <a:lstStyle/>
                     <a:p>
-                      <a:pPr indent="0" marL="0">
+                      <a:pPr marL="0" indent="0">
                         <a:buNone/>
                       </a:pPr>
                       <a:r>
@@ -21494,7 +21221,7 @@
                     <a:bodyPr/>
                     <a:lstStyle/>
                     <a:p>
-                      <a:pPr indent="0" marL="0">
+                      <a:pPr marL="0" indent="0">
                         <a:buNone/>
                       </a:pPr>
                       <a:r>
@@ -21557,6 +21284,11 @@
                     </a:solidFill>
                   </a:tcPr>
                 </a:tc>
+                <a:extLst>
+                  <a:ext uri="{0D108BD9-81ED-4DB2-BD59-A6C34878D82A}">
+                    <a16:rowId xmlns:a16="http://schemas.microsoft.com/office/drawing/2014/main" val="10002"/>
+                  </a:ext>
+                </a:extLst>
               </a:tr>
               <a:tr h="402336">
                 <a:tc>
@@ -21564,7 +21296,7 @@
                     <a:bodyPr/>
                     <a:lstStyle/>
                     <a:p>
-                      <a:pPr indent="0" marL="0">
+                      <a:pPr marL="0" indent="0">
                         <a:buNone/>
                       </a:pPr>
                       <a:r>
@@ -21632,7 +21364,7 @@
                     <a:bodyPr/>
                     <a:lstStyle/>
                     <a:p>
-                      <a:pPr indent="0" marL="0">
+                      <a:pPr marL="0" indent="0">
                         <a:buNone/>
                       </a:pPr>
                       <a:r>
@@ -21700,7 +21432,7 @@
                     <a:bodyPr/>
                     <a:lstStyle/>
                     <a:p>
-                      <a:pPr indent="0" marL="0">
+                      <a:pPr marL="0" indent="0">
                         <a:buNone/>
                       </a:pPr>
                       <a:r>
@@ -21763,6 +21495,11 @@
                     </a:solidFill>
                   </a:tcPr>
                 </a:tc>
+                <a:extLst>
+                  <a:ext uri="{0D108BD9-81ED-4DB2-BD59-A6C34878D82A}">
+                    <a16:rowId xmlns:a16="http://schemas.microsoft.com/office/drawing/2014/main" val="10003"/>
+                  </a:ext>
+                </a:extLst>
               </a:tr>
             </a:tbl>
           </a:graphicData>
@@ -21789,7 +21526,7 @@
           <a:bodyPr wrap="square" lIns="0" tIns="0" rIns="0" bIns="0" rtlCol="0" anchor="t"/>
           <a:lstStyle/>
           <a:p>
-            <a:pPr indent="0" marL="0">
+            <a:pPr marL="0" indent="0">
               <a:spcAft>
                 <a:spcPts val="400"/>
               </a:spcAft>
@@ -21885,7 +21622,7 @@
           <a:bodyPr wrap="square" lIns="0" tIns="0" rIns="0" bIns="0" rtlCol="0" anchor="ctr"/>
           <a:lstStyle/>
           <a:p>
-            <a:pPr indent="0" marL="0">
+            <a:pPr marL="0" indent="0">
               <a:buNone/>
             </a:pPr>
             <a:r>
@@ -21924,7 +21661,7 @@
           <a:bodyPr wrap="square" lIns="0" tIns="0" rIns="0" bIns="0" rtlCol="0" anchor="ctr"/>
           <a:lstStyle/>
           <a:p>
-            <a:pPr indent="0" marL="0">
+            <a:pPr marL="0" indent="0">
               <a:buNone/>
             </a:pPr>
             <a:r>
@@ -21963,7 +21700,7 @@
           <a:bodyPr wrap="square" lIns="0" tIns="0" rIns="0" bIns="0" rtlCol="0" anchor="t"/>
           <a:lstStyle/>
           <a:p>
-            <a:pPr indent="0" marL="0">
+            <a:pPr marL="0" indent="0">
               <a:spcAft>
                 <a:spcPts val="400"/>
               </a:spcAft>
@@ -21983,7 +21720,7 @@
             <a:endParaRPr lang="en-US" sz="1250" dirty="0"/>
           </a:p>
           <a:p>
-            <a:pPr indent="0" marL="0">
+            <a:pPr marL="0" indent="0">
               <a:spcAft>
                 <a:spcPts val="400"/>
               </a:spcAft>
@@ -22003,7 +21740,7 @@
             <a:endParaRPr lang="en-US" sz="1250" dirty="0"/>
           </a:p>
           <a:p>
-            <a:pPr indent="0" marL="0">
+            <a:pPr marL="0" indent="0">
               <a:spcAft>
                 <a:spcPts val="400"/>
               </a:spcAft>
@@ -22023,7 +21760,7 @@
             <a:endParaRPr lang="en-US" sz="1250" dirty="0"/>
           </a:p>
           <a:p>
-            <a:pPr indent="0" marL="0">
+            <a:pPr marL="0" indent="0">
               <a:spcAft>
                 <a:spcPts val="400"/>
               </a:spcAft>
@@ -22043,7 +21780,7 @@
             <a:endParaRPr lang="en-US" sz="1250" dirty="0"/>
           </a:p>
           <a:p>
-            <a:pPr indent="0" marL="0">
+            <a:pPr marL="0" indent="0">
               <a:spcAft>
                 <a:spcPts val="400"/>
               </a:spcAft>
@@ -22085,7 +21822,7 @@
           <a:bodyPr wrap="square" lIns="0" tIns="0" rIns="0" bIns="0" rtlCol="0" anchor="ctr"/>
           <a:lstStyle/>
           <a:p>
-            <a:pPr indent="0" marL="0">
+            <a:pPr marL="0" indent="0">
               <a:buNone/>
             </a:pPr>
             <a:r>
@@ -22119,6 +21856,7 @@
         <a:solidFill>
           <a:srgbClr val="F5F7FB"/>
         </a:solidFill>
+        <a:effectLst/>
       </p:bgPr>
     </p:bg>
     <p:spTree>
@@ -22183,11 +21921,11 @@
           <a:bodyPr wrap="square" lIns="0" tIns="0" rIns="0" bIns="0" rtlCol="0" anchor="ctr"/>
           <a:lstStyle/>
           <a:p>
-            <a:pPr algn="ctr" indent="0" marL="0">
+            <a:pPr marL="0" indent="0" algn="ctr">
               <a:buNone/>
             </a:pPr>
             <a:r>
-              <a:rPr lang="en-US" sz="1100" b="1" spc="150" kern="0" dirty="0">
+              <a:rPr lang="en-US" sz="1100" b="1" kern="0" spc="150" dirty="0">
                 <a:solidFill>
                   <a:srgbClr val="FFFFFF"/>
                 </a:solidFill>
@@ -22222,7 +21960,7 @@
           <a:bodyPr wrap="square" lIns="0" tIns="0" rIns="0" bIns="0" rtlCol="0" anchor="ctr"/>
           <a:lstStyle/>
           <a:p>
-            <a:pPr indent="0" marL="0">
+            <a:pPr marL="0" indent="0">
               <a:buNone/>
             </a:pPr>
             <a:r>
@@ -22261,7 +21999,7 @@
           <a:bodyPr wrap="square" lIns="0" tIns="0" rIns="0" bIns="0" rtlCol="0" anchor="ctr"/>
           <a:lstStyle/>
           <a:p>
-            <a:pPr indent="0" marL="0">
+            <a:pPr marL="0" indent="0">
               <a:buNone/>
             </a:pPr>
             <a:r>
@@ -22354,7 +22092,7 @@
           <a:bodyPr wrap="square" lIns="0" tIns="0" rIns="0" bIns="0" rtlCol="0" anchor="ctr"/>
           <a:lstStyle/>
           <a:p>
-            <a:pPr indent="0" marL="0">
+            <a:pPr marL="0" indent="0">
               <a:buNone/>
             </a:pPr>
             <a:r>
@@ -22393,7 +22131,7 @@
           <a:bodyPr wrap="square" lIns="0" tIns="0" rIns="0" bIns="0" rtlCol="0" anchor="ctr"/>
           <a:lstStyle/>
           <a:p>
-            <a:pPr indent="0" marL="0">
+            <a:pPr marL="0" indent="0">
               <a:buNone/>
             </a:pPr>
             <a:r>
@@ -22457,7 +22195,7 @@
           <a:bodyPr wrap="square" lIns="0" tIns="0" rIns="0" bIns="0" rtlCol="0" anchor="ctr"/>
           <a:lstStyle/>
           <a:p>
-            <a:pPr indent="0" marL="0">
+            <a:pPr marL="0" indent="0">
               <a:buNone/>
             </a:pPr>
             <a:r>
@@ -22496,7 +22234,7 @@
           <a:bodyPr wrap="square" lIns="0" tIns="0" rIns="0" bIns="0" rtlCol="0" anchor="ctr"/>
           <a:lstStyle/>
           <a:p>
-            <a:pPr indent="0" marL="0">
+            <a:pPr marL="0" indent="0">
               <a:buNone/>
             </a:pPr>
             <a:r>
@@ -22560,7 +22298,7 @@
           <a:bodyPr wrap="square" lIns="0" tIns="0" rIns="0" bIns="0" rtlCol="0" anchor="ctr"/>
           <a:lstStyle/>
           <a:p>
-            <a:pPr indent="0" marL="0">
+            <a:pPr marL="0" indent="0">
               <a:buNone/>
             </a:pPr>
             <a:r>
@@ -22599,7 +22337,7 @@
           <a:bodyPr wrap="square" lIns="0" tIns="0" rIns="0" bIns="0" rtlCol="0" anchor="ctr"/>
           <a:lstStyle/>
           <a:p>
-            <a:pPr indent="0" marL="0">
+            <a:pPr marL="0" indent="0">
               <a:buNone/>
             </a:pPr>
             <a:r>
@@ -22663,7 +22401,7 @@
           <a:bodyPr wrap="square" lIns="0" tIns="0" rIns="0" bIns="0" rtlCol="0" anchor="ctr"/>
           <a:lstStyle/>
           <a:p>
-            <a:pPr indent="0" marL="0">
+            <a:pPr marL="0" indent="0">
               <a:buNone/>
             </a:pPr>
             <a:r>
@@ -22702,7 +22440,7 @@
           <a:bodyPr wrap="square" lIns="0" tIns="0" rIns="0" bIns="0" rtlCol="0" anchor="t"/>
           <a:lstStyle/>
           <a:p>
-            <a:pPr indent="0" marL="0">
+            <a:pPr marL="0" indent="0">
               <a:spcAft>
                 <a:spcPts val="400"/>
               </a:spcAft>
@@ -22798,7 +22536,7 @@
           <a:bodyPr wrap="square" lIns="0" tIns="0" rIns="0" bIns="0" rtlCol="0" anchor="ctr"/>
           <a:lstStyle/>
           <a:p>
-            <a:pPr indent="0" marL="0">
+            <a:pPr marL="0" indent="0">
               <a:buNone/>
             </a:pPr>
             <a:r>
@@ -22837,7 +22575,7 @@
           <a:bodyPr wrap="square" lIns="0" tIns="0" rIns="0" bIns="0" rtlCol="0" anchor="t"/>
           <a:lstStyle/>
           <a:p>
-            <a:pPr indent="0" marL="0">
+            <a:pPr marL="0" indent="0">
               <a:spcAft>
                 <a:spcPts val="400"/>
               </a:spcAft>
@@ -22857,7 +22595,7 @@
             <a:endParaRPr lang="en-US" sz="1300" dirty="0"/>
           </a:p>
           <a:p>
-            <a:pPr indent="0" marL="0">
+            <a:pPr marL="0" indent="0">
               <a:spcAft>
                 <a:spcPts val="400"/>
               </a:spcAft>
@@ -22877,7 +22615,7 @@
             <a:endParaRPr lang="en-US" sz="1300" dirty="0"/>
           </a:p>
           <a:p>
-            <a:pPr indent="0" marL="0">
+            <a:pPr marL="0" indent="0">
               <a:spcAft>
                 <a:spcPts val="400"/>
               </a:spcAft>
@@ -22897,7 +22635,7 @@
             <a:endParaRPr lang="en-US" sz="1300" dirty="0"/>
           </a:p>
           <a:p>
-            <a:pPr indent="0" marL="0">
+            <a:pPr marL="0" indent="0">
               <a:spcAft>
                 <a:spcPts val="400"/>
               </a:spcAft>
@@ -22917,7 +22655,7 @@
             <a:endParaRPr lang="en-US" sz="1300" dirty="0"/>
           </a:p>
           <a:p>
-            <a:pPr indent="0" marL="0">
+            <a:pPr marL="0" indent="0">
               <a:spcAft>
                 <a:spcPts val="400"/>
               </a:spcAft>
@@ -23013,7 +22751,7 @@
           <a:bodyPr wrap="square" lIns="0" tIns="0" rIns="0" bIns="0" rtlCol="0" anchor="ctr"/>
           <a:lstStyle/>
           <a:p>
-            <a:pPr indent="0" marL="0">
+            <a:pPr marL="0" indent="0">
               <a:buNone/>
             </a:pPr>
             <a:r>
@@ -23052,7 +22790,7 @@
           <a:bodyPr wrap="square" lIns="0" tIns="0" rIns="0" bIns="0" rtlCol="0" anchor="t"/>
           <a:lstStyle/>
           <a:p>
-            <a:pPr indent="0" marL="0">
+            <a:pPr marL="0" indent="0">
               <a:spcAft>
                 <a:spcPts val="400"/>
               </a:spcAft>
@@ -23089,6 +22827,7 @@
         <a:solidFill>
           <a:srgbClr val="F5F7FB"/>
         </a:solidFill>
+        <a:effectLst/>
       </p:bgPr>
     </p:bg>
     <p:spTree>
@@ -23153,11 +22892,11 @@
           <a:bodyPr wrap="square" lIns="0" tIns="0" rIns="0" bIns="0" rtlCol="0" anchor="ctr"/>
           <a:lstStyle/>
           <a:p>
-            <a:pPr algn="ctr" indent="0" marL="0">
+            <a:pPr marL="0" indent="0" algn="ctr">
               <a:buNone/>
             </a:pPr>
             <a:r>
-              <a:rPr lang="en-US" sz="1100" b="1" spc="150" kern="0" dirty="0">
+              <a:rPr lang="en-US" sz="1100" b="1" kern="0" spc="150" dirty="0">
                 <a:solidFill>
                   <a:srgbClr val="FFFFFF"/>
                 </a:solidFill>
@@ -23192,7 +22931,7 @@
           <a:bodyPr wrap="square" lIns="0" tIns="0" rIns="0" bIns="0" rtlCol="0" anchor="ctr"/>
           <a:lstStyle/>
           <a:p>
-            <a:pPr indent="0" marL="0">
+            <a:pPr marL="0" indent="0">
               <a:buNone/>
             </a:pPr>
             <a:r>
@@ -23231,7 +22970,7 @@
           <a:bodyPr wrap="square" lIns="0" tIns="0" rIns="0" bIns="0" rtlCol="0" anchor="ctr"/>
           <a:lstStyle/>
           <a:p>
-            <a:pPr indent="0" marL="0">
+            <a:pPr marL="0" indent="0">
               <a:buNone/>
             </a:pPr>
             <a:r>
@@ -23272,10 +23011,34 @@
             <a:tbl>
               <a:tblPr/>
               <a:tblGrid>
-                <a:gridCol w="914400"/>
-                <a:gridCol w="1234440"/>
-                <a:gridCol w="2514600"/>
-                <a:gridCol w="2560320"/>
+                <a:gridCol w="914400">
+                  <a:extLst>
+                    <a:ext uri="{9D8B030D-6E8A-4147-A177-3AD203B41FA5}">
+                      <a16:colId xmlns:a16="http://schemas.microsoft.com/office/drawing/2014/main" val="20000"/>
+                    </a:ext>
+                  </a:extLst>
+                </a:gridCol>
+                <a:gridCol w="1234440">
+                  <a:extLst>
+                    <a:ext uri="{9D8B030D-6E8A-4147-A177-3AD203B41FA5}">
+                      <a16:colId xmlns:a16="http://schemas.microsoft.com/office/drawing/2014/main" val="20001"/>
+                    </a:ext>
+                  </a:extLst>
+                </a:gridCol>
+                <a:gridCol w="2514600">
+                  <a:extLst>
+                    <a:ext uri="{9D8B030D-6E8A-4147-A177-3AD203B41FA5}">
+                      <a16:colId xmlns:a16="http://schemas.microsoft.com/office/drawing/2014/main" val="20002"/>
+                    </a:ext>
+                  </a:extLst>
+                </a:gridCol>
+                <a:gridCol w="2560320">
+                  <a:extLst>
+                    <a:ext uri="{9D8B030D-6E8A-4147-A177-3AD203B41FA5}">
+                      <a16:colId xmlns:a16="http://schemas.microsoft.com/office/drawing/2014/main" val="20003"/>
+                    </a:ext>
+                  </a:extLst>
+                </a:gridCol>
               </a:tblGrid>
               <a:tr h="384048">
                 <a:tc>
@@ -23283,7 +23046,7 @@
                     <a:bodyPr/>
                     <a:lstStyle/>
                     <a:p>
-                      <a:pPr indent="0" marL="0">
+                      <a:pPr marL="0" indent="0">
                         <a:buNone/>
                       </a:pPr>
                       <a:r>
@@ -23351,7 +23114,7 @@
                     <a:bodyPr/>
                     <a:lstStyle/>
                     <a:p>
-                      <a:pPr indent="0" marL="0">
+                      <a:pPr marL="0" indent="0">
                         <a:buNone/>
                       </a:pPr>
                       <a:r>
@@ -23419,7 +23182,7 @@
                     <a:bodyPr/>
                     <a:lstStyle/>
                     <a:p>
-                      <a:pPr indent="0" marL="0">
+                      <a:pPr marL="0" indent="0">
                         <a:buNone/>
                       </a:pPr>
                       <a:r>
@@ -23487,7 +23250,7 @@
                     <a:bodyPr/>
                     <a:lstStyle/>
                     <a:p>
-                      <a:pPr indent="0" marL="0">
+                      <a:pPr marL="0" indent="0">
                         <a:buNone/>
                       </a:pPr>
                       <a:r>
@@ -23550,6 +23313,11 @@
                     </a:solidFill>
                   </a:tcPr>
                 </a:tc>
+                <a:extLst>
+                  <a:ext uri="{0D108BD9-81ED-4DB2-BD59-A6C34878D82A}">
+                    <a16:rowId xmlns:a16="http://schemas.microsoft.com/office/drawing/2014/main" val="10000"/>
+                  </a:ext>
+                </a:extLst>
               </a:tr>
               <a:tr h="384048">
                 <a:tc>
@@ -23557,7 +23325,7 @@
                     <a:bodyPr/>
                     <a:lstStyle/>
                     <a:p>
-                      <a:pPr indent="0" marL="0">
+                      <a:pPr marL="0" indent="0">
                         <a:buNone/>
                       </a:pPr>
                       <a:r>
@@ -23625,7 +23393,7 @@
                     <a:bodyPr/>
                     <a:lstStyle/>
                     <a:p>
-                      <a:pPr indent="0" marL="0">
+                      <a:pPr marL="0" indent="0">
                         <a:buNone/>
                       </a:pPr>
                       <a:r>
@@ -23693,7 +23461,7 @@
                     <a:bodyPr/>
                     <a:lstStyle/>
                     <a:p>
-                      <a:pPr indent="0" marL="0">
+                      <a:pPr marL="0" indent="0">
                         <a:buNone/>
                       </a:pPr>
                       <a:r>
@@ -23761,7 +23529,7 @@
                     <a:bodyPr/>
                     <a:lstStyle/>
                     <a:p>
-                      <a:pPr indent="0" marL="0">
+                      <a:pPr marL="0" indent="0">
                         <a:buNone/>
                       </a:pPr>
                       <a:r>
@@ -23824,6 +23592,11 @@
                     </a:solidFill>
                   </a:tcPr>
                 </a:tc>
+                <a:extLst>
+                  <a:ext uri="{0D108BD9-81ED-4DB2-BD59-A6C34878D82A}">
+                    <a16:rowId xmlns:a16="http://schemas.microsoft.com/office/drawing/2014/main" val="10001"/>
+                  </a:ext>
+                </a:extLst>
               </a:tr>
               <a:tr h="384048">
                 <a:tc>
@@ -23831,7 +23604,7 @@
                     <a:bodyPr/>
                     <a:lstStyle/>
                     <a:p>
-                      <a:pPr indent="0" marL="0">
+                      <a:pPr marL="0" indent="0">
                         <a:buNone/>
                       </a:pPr>
                       <a:r>
@@ -23899,7 +23672,7 @@
                     <a:bodyPr/>
                     <a:lstStyle/>
                     <a:p>
-                      <a:pPr indent="0" marL="0">
+                      <a:pPr marL="0" indent="0">
                         <a:buNone/>
                       </a:pPr>
                       <a:r>
@@ -23967,7 +23740,7 @@
                     <a:bodyPr/>
                     <a:lstStyle/>
                     <a:p>
-                      <a:pPr indent="0" marL="0">
+                      <a:pPr marL="0" indent="0">
                         <a:buNone/>
                       </a:pPr>
                       <a:r>
@@ -24035,7 +23808,7 @@
                     <a:bodyPr/>
                     <a:lstStyle/>
                     <a:p>
-                      <a:pPr indent="0" marL="0">
+                      <a:pPr marL="0" indent="0">
                         <a:buNone/>
                       </a:pPr>
                       <a:r>
@@ -24098,6 +23871,11 @@
                     </a:solidFill>
                   </a:tcPr>
                 </a:tc>
+                <a:extLst>
+                  <a:ext uri="{0D108BD9-81ED-4DB2-BD59-A6C34878D82A}">
+                    <a16:rowId xmlns:a16="http://schemas.microsoft.com/office/drawing/2014/main" val="10002"/>
+                  </a:ext>
+                </a:extLst>
               </a:tr>
               <a:tr h="384048">
                 <a:tc>
@@ -24105,7 +23883,7 @@
                     <a:bodyPr/>
                     <a:lstStyle/>
                     <a:p>
-                      <a:pPr indent="0" marL="0">
+                      <a:pPr marL="0" indent="0">
                         <a:buNone/>
                       </a:pPr>
                       <a:r>
@@ -24173,7 +23951,7 @@
                     <a:bodyPr/>
                     <a:lstStyle/>
                     <a:p>
-                      <a:pPr indent="0" marL="0">
+                      <a:pPr marL="0" indent="0">
                         <a:buNone/>
                       </a:pPr>
                       <a:r>
@@ -24241,7 +24019,7 @@
                     <a:bodyPr/>
                     <a:lstStyle/>
                     <a:p>
-                      <a:pPr indent="0" marL="0">
+                      <a:pPr marL="0" indent="0">
                         <a:buNone/>
                       </a:pPr>
                       <a:r>
@@ -24309,7 +24087,7 @@
                     <a:bodyPr/>
                     <a:lstStyle/>
                     <a:p>
-                      <a:pPr indent="0" marL="0">
+                      <a:pPr marL="0" indent="0">
                         <a:buNone/>
                       </a:pPr>
                       <a:r>
@@ -24372,6 +24150,11 @@
                     </a:solidFill>
                   </a:tcPr>
                 </a:tc>
+                <a:extLst>
+                  <a:ext uri="{0D108BD9-81ED-4DB2-BD59-A6C34878D82A}">
+                    <a16:rowId xmlns:a16="http://schemas.microsoft.com/office/drawing/2014/main" val="10003"/>
+                  </a:ext>
+                </a:extLst>
               </a:tr>
               <a:tr h="384048">
                 <a:tc>
@@ -24379,7 +24162,7 @@
                     <a:bodyPr/>
                     <a:lstStyle/>
                     <a:p>
-                      <a:pPr indent="0" marL="0">
+                      <a:pPr marL="0" indent="0">
                         <a:buNone/>
                       </a:pPr>
                       <a:r>
@@ -24447,7 +24230,7 @@
                     <a:bodyPr/>
                     <a:lstStyle/>
                     <a:p>
-                      <a:pPr indent="0" marL="0">
+                      <a:pPr marL="0" indent="0">
                         <a:buNone/>
                       </a:pPr>
                       <a:r>
@@ -24515,7 +24298,7 @@
                     <a:bodyPr/>
                     <a:lstStyle/>
                     <a:p>
-                      <a:pPr indent="0" marL="0">
+                      <a:pPr marL="0" indent="0">
                         <a:buNone/>
                       </a:pPr>
                       <a:r>
@@ -24583,7 +24366,7 @@
                     <a:bodyPr/>
                     <a:lstStyle/>
                     <a:p>
-                      <a:pPr indent="0" marL="0">
+                      <a:pPr marL="0" indent="0">
                         <a:buNone/>
                       </a:pPr>
                       <a:r>
@@ -24646,6 +24429,11 @@
                     </a:solidFill>
                   </a:tcPr>
                 </a:tc>
+                <a:extLst>
+                  <a:ext uri="{0D108BD9-81ED-4DB2-BD59-A6C34878D82A}">
+                    <a16:rowId xmlns:a16="http://schemas.microsoft.com/office/drawing/2014/main" val="10004"/>
+                  </a:ext>
+                </a:extLst>
               </a:tr>
               <a:tr h="384048">
                 <a:tc>
@@ -24653,7 +24441,7 @@
                     <a:bodyPr/>
                     <a:lstStyle/>
                     <a:p>
-                      <a:pPr indent="0" marL="0">
+                      <a:pPr marL="0" indent="0">
                         <a:buNone/>
                       </a:pPr>
                       <a:r>
@@ -24721,7 +24509,7 @@
                     <a:bodyPr/>
                     <a:lstStyle/>
                     <a:p>
-                      <a:pPr indent="0" marL="0">
+                      <a:pPr marL="0" indent="0">
                         <a:buNone/>
                       </a:pPr>
                       <a:r>
@@ -24789,7 +24577,7 @@
                     <a:bodyPr/>
                     <a:lstStyle/>
                     <a:p>
-                      <a:pPr indent="0" marL="0">
+                      <a:pPr marL="0" indent="0">
                         <a:buNone/>
                       </a:pPr>
                       <a:r>
@@ -24857,7 +24645,7 @@
                     <a:bodyPr/>
                     <a:lstStyle/>
                     <a:p>
-                      <a:pPr indent="0" marL="0">
+                      <a:pPr marL="0" indent="0">
                         <a:buNone/>
                       </a:pPr>
                       <a:r>
@@ -24920,6 +24708,11 @@
                     </a:solidFill>
                   </a:tcPr>
                 </a:tc>
+                <a:extLst>
+                  <a:ext uri="{0D108BD9-81ED-4DB2-BD59-A6C34878D82A}">
+                    <a16:rowId xmlns:a16="http://schemas.microsoft.com/office/drawing/2014/main" val="10005"/>
+                  </a:ext>
+                </a:extLst>
               </a:tr>
               <a:tr h="384048">
                 <a:tc>
@@ -24927,7 +24720,7 @@
                     <a:bodyPr/>
                     <a:lstStyle/>
                     <a:p>
-                      <a:pPr indent="0" marL="0">
+                      <a:pPr marL="0" indent="0">
                         <a:buNone/>
                       </a:pPr>
                       <a:r>
@@ -24995,7 +24788,7 @@
                     <a:bodyPr/>
                     <a:lstStyle/>
                     <a:p>
-                      <a:pPr indent="0" marL="0">
+                      <a:pPr marL="0" indent="0">
                         <a:buNone/>
                       </a:pPr>
                       <a:r>
@@ -25063,7 +24856,7 @@
                     <a:bodyPr/>
                     <a:lstStyle/>
                     <a:p>
-                      <a:pPr indent="0" marL="0">
+                      <a:pPr marL="0" indent="0">
                         <a:buNone/>
                       </a:pPr>
                       <a:r>
@@ -25131,7 +24924,7 @@
                     <a:bodyPr/>
                     <a:lstStyle/>
                     <a:p>
-                      <a:pPr indent="0" marL="0">
+                      <a:pPr marL="0" indent="0">
                         <a:buNone/>
                       </a:pPr>
                       <a:r>
@@ -25194,6 +24987,11 @@
                     </a:solidFill>
                   </a:tcPr>
                 </a:tc>
+                <a:extLst>
+                  <a:ext uri="{0D108BD9-81ED-4DB2-BD59-A6C34878D82A}">
+                    <a16:rowId xmlns:a16="http://schemas.microsoft.com/office/drawing/2014/main" val="10006"/>
+                  </a:ext>
+                </a:extLst>
               </a:tr>
             </a:tbl>
           </a:graphicData>
@@ -25228,7 +25026,7 @@
       </p:sp>
       <p:sp>
         <p:nvSpPr>
-          <p:cNvPr id="8" name="Shape 5"/>
+          <p:cNvPr id="6" name="Shape 5"/>
           <p:cNvSpPr/>
           <p:nvPr/>
         </p:nvSpPr>
@@ -25274,7 +25072,7 @@
           <a:bodyPr wrap="square" lIns="0" tIns="0" rIns="0" bIns="0" rtlCol="0" anchor="ctr"/>
           <a:lstStyle/>
           <a:p>
-            <a:pPr indent="0" marL="0">
+            <a:pPr marL="0" indent="0">
               <a:buNone/>
             </a:pPr>
             <a:r>
@@ -25315,11 +25113,41 @@
             <a:tbl>
               <a:tblPr/>
               <a:tblGrid>
-                <a:gridCol w="777240"/>
-                <a:gridCol w="685800"/>
-                <a:gridCol w="640080"/>
-                <a:gridCol w="548640"/>
-                <a:gridCol w="685800"/>
+                <a:gridCol w="777240">
+                  <a:extLst>
+                    <a:ext uri="{9D8B030D-6E8A-4147-A177-3AD203B41FA5}">
+                      <a16:colId xmlns:a16="http://schemas.microsoft.com/office/drawing/2014/main" val="20000"/>
+                    </a:ext>
+                  </a:extLst>
+                </a:gridCol>
+                <a:gridCol w="685800">
+                  <a:extLst>
+                    <a:ext uri="{9D8B030D-6E8A-4147-A177-3AD203B41FA5}">
+                      <a16:colId xmlns:a16="http://schemas.microsoft.com/office/drawing/2014/main" val="20001"/>
+                    </a:ext>
+                  </a:extLst>
+                </a:gridCol>
+                <a:gridCol w="640080">
+                  <a:extLst>
+                    <a:ext uri="{9D8B030D-6E8A-4147-A177-3AD203B41FA5}">
+                      <a16:colId xmlns:a16="http://schemas.microsoft.com/office/drawing/2014/main" val="20002"/>
+                    </a:ext>
+                  </a:extLst>
+                </a:gridCol>
+                <a:gridCol w="548640">
+                  <a:extLst>
+                    <a:ext uri="{9D8B030D-6E8A-4147-A177-3AD203B41FA5}">
+                      <a16:colId xmlns:a16="http://schemas.microsoft.com/office/drawing/2014/main" val="20003"/>
+                    </a:ext>
+                  </a:extLst>
+                </a:gridCol>
+                <a:gridCol w="685800">
+                  <a:extLst>
+                    <a:ext uri="{9D8B030D-6E8A-4147-A177-3AD203B41FA5}">
+                      <a16:colId xmlns:a16="http://schemas.microsoft.com/office/drawing/2014/main" val="20004"/>
+                    </a:ext>
+                  </a:extLst>
+                </a:gridCol>
               </a:tblGrid>
               <a:tr h="274320">
                 <a:tc>
@@ -25327,7 +25155,7 @@
                     <a:bodyPr/>
                     <a:lstStyle/>
                     <a:p>
-                      <a:pPr algn="ctr" indent="0" marL="0">
+                      <a:pPr marL="0" indent="0" algn="ctr">
                         <a:buNone/>
                       </a:pPr>
                       <a:r>
@@ -25395,7 +25223,7 @@
                     <a:bodyPr/>
                     <a:lstStyle/>
                     <a:p>
-                      <a:pPr algn="ctr" indent="0" marL="0">
+                      <a:pPr marL="0" indent="0" algn="ctr">
                         <a:buNone/>
                       </a:pPr>
                       <a:r>
@@ -25463,7 +25291,7 @@
                     <a:bodyPr/>
                     <a:lstStyle/>
                     <a:p>
-                      <a:pPr algn="ctr" indent="0" marL="0">
+                      <a:pPr marL="0" indent="0" algn="ctr">
                         <a:buNone/>
                       </a:pPr>
                       <a:r>
@@ -25531,7 +25359,7 @@
                     <a:bodyPr/>
                     <a:lstStyle/>
                     <a:p>
-                      <a:pPr algn="ctr" indent="0" marL="0">
+                      <a:pPr marL="0" indent="0" algn="ctr">
                         <a:buNone/>
                       </a:pPr>
                       <a:r>
@@ -25599,7 +25427,7 @@
                     <a:bodyPr/>
                     <a:lstStyle/>
                     <a:p>
-                      <a:pPr algn="ctr" indent="0" marL="0">
+                      <a:pPr marL="0" indent="0" algn="ctr">
                         <a:buNone/>
                       </a:pPr>
                       <a:r>
@@ -25662,6 +25490,11 @@
                     </a:solidFill>
                   </a:tcPr>
                 </a:tc>
+                <a:extLst>
+                  <a:ext uri="{0D108BD9-81ED-4DB2-BD59-A6C34878D82A}">
+                    <a16:rowId xmlns:a16="http://schemas.microsoft.com/office/drawing/2014/main" val="10000"/>
+                  </a:ext>
+                </a:extLst>
               </a:tr>
               <a:tr h="274320">
                 <a:tc>
@@ -25669,7 +25502,7 @@
                     <a:bodyPr/>
                     <a:lstStyle/>
                     <a:p>
-                      <a:pPr algn="ctr" indent="0" marL="0">
+                      <a:pPr marL="0" indent="0" algn="ctr">
                         <a:buNone/>
                       </a:pPr>
                       <a:r>
@@ -25737,7 +25570,7 @@
                     <a:bodyPr/>
                     <a:lstStyle/>
                     <a:p>
-                      <a:pPr algn="ctr" indent="0" marL="0">
+                      <a:pPr marL="0" indent="0" algn="ctr">
                         <a:buNone/>
                       </a:pPr>
                       <a:r>
@@ -25805,7 +25638,7 @@
                     <a:bodyPr/>
                     <a:lstStyle/>
                     <a:p>
-                      <a:pPr algn="ctr" indent="0" marL="0">
+                      <a:pPr marL="0" indent="0" algn="ctr">
                         <a:buNone/>
                       </a:pPr>
                       <a:r>
@@ -25873,7 +25706,7 @@
                     <a:bodyPr/>
                     <a:lstStyle/>
                     <a:p>
-                      <a:pPr algn="ctr" indent="0" marL="0">
+                      <a:pPr marL="0" indent="0" algn="ctr">
                         <a:buNone/>
                       </a:pPr>
                       <a:r>
@@ -25941,7 +25774,7 @@
                     <a:bodyPr/>
                     <a:lstStyle/>
                     <a:p>
-                      <a:pPr algn="ctr" indent="0" marL="0">
+                      <a:pPr marL="0" indent="0" algn="ctr">
                         <a:buNone/>
                       </a:pPr>
                       <a:r>
@@ -26004,6 +25837,11 @@
                     </a:solidFill>
                   </a:tcPr>
                 </a:tc>
+                <a:extLst>
+                  <a:ext uri="{0D108BD9-81ED-4DB2-BD59-A6C34878D82A}">
+                    <a16:rowId xmlns:a16="http://schemas.microsoft.com/office/drawing/2014/main" val="10001"/>
+                  </a:ext>
+                </a:extLst>
               </a:tr>
               <a:tr h="274320">
                 <a:tc>
@@ -26011,7 +25849,7 @@
                     <a:bodyPr/>
                     <a:lstStyle/>
                     <a:p>
-                      <a:pPr algn="ctr" indent="0" marL="0">
+                      <a:pPr marL="0" indent="0" algn="ctr">
                         <a:buNone/>
                       </a:pPr>
                       <a:r>
@@ -26079,7 +25917,7 @@
                     <a:bodyPr/>
                     <a:lstStyle/>
                     <a:p>
-                      <a:pPr algn="ctr" indent="0" marL="0">
+                      <a:pPr marL="0" indent="0" algn="ctr">
                         <a:buNone/>
                       </a:pPr>
                       <a:r>
@@ -26147,7 +25985,7 @@
                     <a:bodyPr/>
                     <a:lstStyle/>
                     <a:p>
-                      <a:pPr algn="ctr" indent="0" marL="0">
+                      <a:pPr marL="0" indent="0" algn="ctr">
                         <a:buNone/>
                       </a:pPr>
                       <a:r>
@@ -26215,7 +26053,7 @@
                     <a:bodyPr/>
                     <a:lstStyle/>
                     <a:p>
-                      <a:pPr algn="ctr" indent="0" marL="0">
+                      <a:pPr marL="0" indent="0" algn="ctr">
                         <a:buNone/>
                       </a:pPr>
                       <a:r>
@@ -26283,7 +26121,7 @@
                     <a:bodyPr/>
                     <a:lstStyle/>
                     <a:p>
-                      <a:pPr algn="ctr" indent="0" marL="0">
+                      <a:pPr marL="0" indent="0" algn="ctr">
                         <a:buNone/>
                       </a:pPr>
                       <a:r>
@@ -26346,6 +26184,11 @@
                     </a:solidFill>
                   </a:tcPr>
                 </a:tc>
+                <a:extLst>
+                  <a:ext uri="{0D108BD9-81ED-4DB2-BD59-A6C34878D82A}">
+                    <a16:rowId xmlns:a16="http://schemas.microsoft.com/office/drawing/2014/main" val="10002"/>
+                  </a:ext>
+                </a:extLst>
               </a:tr>
               <a:tr h="274320">
                 <a:tc>
@@ -26353,7 +26196,7 @@
                     <a:bodyPr/>
                     <a:lstStyle/>
                     <a:p>
-                      <a:pPr algn="ctr" indent="0" marL="0">
+                      <a:pPr marL="0" indent="0" algn="ctr">
                         <a:buNone/>
                       </a:pPr>
                       <a:r>
@@ -26421,7 +26264,7 @@
                     <a:bodyPr/>
                     <a:lstStyle/>
                     <a:p>
-                      <a:pPr algn="ctr" indent="0" marL="0">
+                      <a:pPr marL="0" indent="0" algn="ctr">
                         <a:buNone/>
                       </a:pPr>
                       <a:r>
@@ -26489,7 +26332,7 @@
                     <a:bodyPr/>
                     <a:lstStyle/>
                     <a:p>
-                      <a:pPr algn="ctr" indent="0" marL="0">
+                      <a:pPr marL="0" indent="0" algn="ctr">
                         <a:buNone/>
                       </a:pPr>
                       <a:r>
@@ -26557,7 +26400,7 @@
                     <a:bodyPr/>
                     <a:lstStyle/>
                     <a:p>
-                      <a:pPr algn="ctr" indent="0" marL="0">
+                      <a:pPr marL="0" indent="0" algn="ctr">
                         <a:buNone/>
                       </a:pPr>
                       <a:r>
@@ -26625,7 +26468,7 @@
                     <a:bodyPr/>
                     <a:lstStyle/>
                     <a:p>
-                      <a:pPr algn="ctr" indent="0" marL="0">
+                      <a:pPr marL="0" indent="0" algn="ctr">
                         <a:buNone/>
                       </a:pPr>
                       <a:r>
@@ -26688,6 +26531,11 @@
                     </a:solidFill>
                   </a:tcPr>
                 </a:tc>
+                <a:extLst>
+                  <a:ext uri="{0D108BD9-81ED-4DB2-BD59-A6C34878D82A}">
+                    <a16:rowId xmlns:a16="http://schemas.microsoft.com/office/drawing/2014/main" val="10003"/>
+                  </a:ext>
+                </a:extLst>
               </a:tr>
               <a:tr h="274320">
                 <a:tc>
@@ -26695,7 +26543,7 @@
                     <a:bodyPr/>
                     <a:lstStyle/>
                     <a:p>
-                      <a:pPr algn="ctr" indent="0" marL="0">
+                      <a:pPr marL="0" indent="0" algn="ctr">
                         <a:buNone/>
                       </a:pPr>
                       <a:r>
@@ -26763,7 +26611,7 @@
                     <a:bodyPr/>
                     <a:lstStyle/>
                     <a:p>
-                      <a:pPr algn="ctr" indent="0" marL="0">
+                      <a:pPr marL="0" indent="0" algn="ctr">
                         <a:buNone/>
                       </a:pPr>
                       <a:r>
@@ -26831,7 +26679,7 @@
                     <a:bodyPr/>
                     <a:lstStyle/>
                     <a:p>
-                      <a:pPr algn="ctr" indent="0" marL="0">
+                      <a:pPr marL="0" indent="0" algn="ctr">
                         <a:buNone/>
                       </a:pPr>
                       <a:r>
@@ -26899,7 +26747,7 @@
                     <a:bodyPr/>
                     <a:lstStyle/>
                     <a:p>
-                      <a:pPr algn="ctr" indent="0" marL="0">
+                      <a:pPr marL="0" indent="0" algn="ctr">
                         <a:buNone/>
                       </a:pPr>
                       <a:r>
@@ -26967,7 +26815,7 @@
                     <a:bodyPr/>
                     <a:lstStyle/>
                     <a:p>
-                      <a:pPr algn="ctr" indent="0" marL="0">
+                      <a:pPr marL="0" indent="0" algn="ctr">
                         <a:buNone/>
                       </a:pPr>
                       <a:r>
@@ -27030,6 +26878,11 @@
                     </a:solidFill>
                   </a:tcPr>
                 </a:tc>
+                <a:extLst>
+                  <a:ext uri="{0D108BD9-81ED-4DB2-BD59-A6C34878D82A}">
+                    <a16:rowId xmlns:a16="http://schemas.microsoft.com/office/drawing/2014/main" val="10004"/>
+                  </a:ext>
+                </a:extLst>
               </a:tr>
             </a:tbl>
           </a:graphicData>
@@ -27056,7 +26909,7 @@
           <a:bodyPr wrap="square" lIns="0" tIns="0" rIns="0" bIns="0" rtlCol="0" anchor="t"/>
           <a:lstStyle/>
           <a:p>
-            <a:pPr algn="ctr" indent="0" marL="0">
+            <a:pPr marL="0" indent="0" algn="ctr">
               <a:spcAft>
                 <a:spcPts val="400"/>
               </a:spcAft>
@@ -27073,12 +26926,6 @@
               </a:rPr>
               <a:t>azul = X</a:t>
             </a:r>
-            <a:pPr algn="ctr" indent="0" marL="0">
-              <a:spcAft>
-                <a:spcPts val="400"/>
-              </a:spcAft>
-              <a:buNone/>
-            </a:pPr>
             <a:r>
               <a:rPr lang="en-US" sz="1150" dirty="0">
                 <a:solidFill>
@@ -27090,12 +26937,6 @@
               </a:rPr>
               <a:t>   ·   </a:t>
             </a:r>
-            <a:pPr algn="ctr" indent="0" marL="0">
-              <a:spcAft>
-                <a:spcPts val="400"/>
-              </a:spcAft>
-              <a:buNone/>
-            </a:pPr>
             <a:r>
               <a:rPr lang="en-US" sz="1150" b="1" dirty="0">
                 <a:solidFill>
@@ -27186,7 +27027,7 @@
           <a:bodyPr wrap="square" lIns="0" tIns="0" rIns="0" bIns="0" rtlCol="0" anchor="ctr"/>
           <a:lstStyle/>
           <a:p>
-            <a:pPr indent="0" marL="0">
+            <a:pPr marL="0" indent="0">
               <a:buNone/>
             </a:pPr>
             <a:r>
@@ -27206,7 +27047,7 @@
       </p:sp>
       <p:sp>
         <p:nvSpPr>
-          <p:cNvPr id="15" name="Text 11"/>
+          <p:cNvPr id="10" name="Text 11"/>
           <p:cNvSpPr txBox="1"/>
           <p:nvPr/>
         </p:nvSpPr>
@@ -27225,7 +27066,7 @@
           <a:bodyPr wrap="square" lIns="0" tIns="0" rIns="0" bIns="0" rtlCol="0" anchor="t"/>
           <a:lstStyle/>
           <a:p>
-            <a:pPr indent="0" marL="0">
+            <a:pPr marL="0" indent="0">
               <a:spcAft>
                 <a:spcPts val="400"/>
               </a:spcAft>
@@ -27321,7 +27162,7 @@
           <a:bodyPr wrap="square" lIns="0" tIns="0" rIns="0" bIns="0" rtlCol="0" anchor="ctr"/>
           <a:lstStyle/>
           <a:p>
-            <a:pPr indent="0" marL="0">
+            <a:pPr marL="0" indent="0">
               <a:buNone/>
             </a:pPr>
             <a:r>
@@ -27360,7 +27201,7 @@
           <a:bodyPr wrap="square" lIns="0" tIns="0" rIns="0" bIns="0" rtlCol="0" anchor="t"/>
           <a:lstStyle/>
           <a:p>
-            <a:pPr indent="0" marL="0">
+            <a:pPr marL="0" indent="0">
               <a:spcAft>
                 <a:spcPts val="400"/>
               </a:spcAft>
@@ -27397,6 +27238,7 @@
         <a:solidFill>
           <a:srgbClr val="F5F7FB"/>
         </a:solidFill>
+        <a:effectLst/>
       </p:bgPr>
     </p:bg>
     <p:spTree>
@@ -27461,11 +27303,11 @@
           <a:bodyPr wrap="square" lIns="0" tIns="0" rIns="0" bIns="0" rtlCol="0" anchor="ctr"/>
           <a:lstStyle/>
           <a:p>
-            <a:pPr algn="ctr" indent="0" marL="0">
+            <a:pPr marL="0" indent="0" algn="ctr">
               <a:buNone/>
             </a:pPr>
             <a:r>
-              <a:rPr lang="en-US" sz="1100" b="1" spc="150" kern="0" dirty="0">
+              <a:rPr lang="en-US" sz="1100" b="1" kern="0" spc="150" dirty="0">
                 <a:solidFill>
                   <a:srgbClr val="FFFFFF"/>
                 </a:solidFill>
@@ -27500,7 +27342,7 @@
           <a:bodyPr wrap="square" lIns="0" tIns="0" rIns="0" bIns="0" rtlCol="0" anchor="ctr"/>
           <a:lstStyle/>
           <a:p>
-            <a:pPr indent="0" marL="0">
+            <a:pPr marL="0" indent="0">
               <a:buNone/>
             </a:pPr>
             <a:r>
@@ -27539,7 +27381,7 @@
           <a:bodyPr wrap="square" lIns="0" tIns="0" rIns="0" bIns="0" rtlCol="0" anchor="ctr"/>
           <a:lstStyle/>
           <a:p>
-            <a:pPr indent="0" marL="0">
+            <a:pPr marL="0" indent="0">
               <a:buNone/>
             </a:pPr>
             <a:r>
@@ -27632,11 +27474,11 @@
           <a:bodyPr wrap="square" lIns="0" tIns="0" rIns="0" bIns="0" rtlCol="0" anchor="ctr"/>
           <a:lstStyle/>
           <a:p>
-            <a:pPr algn="ctr" indent="0" marL="0">
+            <a:pPr marL="0" indent="0" algn="ctr">
               <a:buNone/>
             </a:pPr>
             <a:r>
-              <a:rPr lang="en-US" sz="1000" b="1" spc="100" kern="0" dirty="0">
+              <a:rPr lang="en-US" sz="1000" b="1" kern="0" spc="100" dirty="0">
                 <a:solidFill>
                   <a:srgbClr val="FFFFFF"/>
                 </a:solidFill>
@@ -27671,7 +27513,7 @@
           <a:bodyPr wrap="square" lIns="0" tIns="0" rIns="0" bIns="0" rtlCol="0" anchor="ctr"/>
           <a:lstStyle/>
           <a:p>
-            <a:pPr indent="0" marL="0">
+            <a:pPr marL="0" indent="0">
               <a:buNone/>
             </a:pPr>
             <a:r>
@@ -27710,7 +27552,7 @@
           <a:bodyPr wrap="square" lIns="0" tIns="0" rIns="0" bIns="0" rtlCol="0" anchor="ctr"/>
           <a:lstStyle/>
           <a:p>
-            <a:pPr indent="0" marL="0">
+            <a:pPr marL="0" indent="0">
               <a:buNone/>
             </a:pPr>
             <a:r>
@@ -27724,9 +27566,6 @@
               </a:rPr>
               <a:t>predice </a:t>
             </a:r>
-            <a:pPr indent="0" marL="0">
-              <a:buNone/>
-            </a:pPr>
             <a:r>
               <a:rPr lang="en-US" sz="1400" b="1" dirty="0">
                 <a:solidFill>
@@ -27790,7 +27629,7 @@
           <a:bodyPr wrap="square" lIns="0" tIns="0" rIns="0" bIns="0" rtlCol="0" anchor="ctr"/>
           <a:lstStyle/>
           <a:p>
-            <a:pPr indent="0" marL="0">
+            <a:pPr marL="0" indent="0">
               <a:spcAft>
                 <a:spcPts val="400"/>
               </a:spcAft>
@@ -27832,7 +27671,7 @@
           <a:bodyPr wrap="square" lIns="0" tIns="0" rIns="0" bIns="0" rtlCol="0" anchor="ctr"/>
           <a:lstStyle/>
           <a:p>
-            <a:pPr indent="0" marL="0">
+            <a:pPr marL="0" indent="0">
               <a:buNone/>
             </a:pPr>
             <a:r>
@@ -27925,11 +27764,11 @@
           <a:bodyPr wrap="square" lIns="0" tIns="0" rIns="0" bIns="0" rtlCol="0" anchor="ctr"/>
           <a:lstStyle/>
           <a:p>
-            <a:pPr algn="ctr" indent="0" marL="0">
+            <a:pPr marL="0" indent="0" algn="ctr">
               <a:buNone/>
             </a:pPr>
             <a:r>
-              <a:rPr lang="en-US" sz="1000" b="1" spc="100" kern="0" dirty="0">
+              <a:rPr lang="en-US" sz="1000" b="1" kern="0" spc="100" dirty="0">
                 <a:solidFill>
                   <a:srgbClr val="FFFFFF"/>
                 </a:solidFill>
@@ -27964,7 +27803,7 @@
           <a:bodyPr wrap="square" lIns="0" tIns="0" rIns="0" bIns="0" rtlCol="0" anchor="ctr"/>
           <a:lstStyle/>
           <a:p>
-            <a:pPr indent="0" marL="0">
+            <a:pPr marL="0" indent="0">
               <a:buNone/>
             </a:pPr>
             <a:r>
@@ -28003,7 +27842,7 @@
           <a:bodyPr wrap="square" lIns="0" tIns="0" rIns="0" bIns="0" rtlCol="0" anchor="ctr"/>
           <a:lstStyle/>
           <a:p>
-            <a:pPr indent="0" marL="0">
+            <a:pPr marL="0" indent="0">
               <a:buNone/>
             </a:pPr>
             <a:r>
@@ -28017,9 +27856,6 @@
               </a:rPr>
               <a:t>predice </a:t>
             </a:r>
-            <a:pPr indent="0" marL="0">
-              <a:buNone/>
-            </a:pPr>
             <a:r>
               <a:rPr lang="en-US" sz="1400" b="1" dirty="0">
                 <a:solidFill>
@@ -28083,7 +27919,7 @@
           <a:bodyPr wrap="square" lIns="0" tIns="0" rIns="0" bIns="0" rtlCol="0" anchor="ctr"/>
           <a:lstStyle/>
           <a:p>
-            <a:pPr indent="0" marL="0">
+            <a:pPr marL="0" indent="0">
               <a:spcAft>
                 <a:spcPts val="400"/>
               </a:spcAft>
@@ -28125,7 +27961,7 @@
           <a:bodyPr wrap="square" lIns="0" tIns="0" rIns="0" bIns="0" rtlCol="0" anchor="ctr"/>
           <a:lstStyle/>
           <a:p>
-            <a:pPr indent="0" marL="0">
+            <a:pPr marL="0" indent="0">
               <a:buNone/>
             </a:pPr>
             <a:r>
@@ -28218,11 +28054,11 @@
           <a:bodyPr wrap="square" lIns="0" tIns="0" rIns="0" bIns="0" rtlCol="0" anchor="ctr"/>
           <a:lstStyle/>
           <a:p>
-            <a:pPr algn="ctr" indent="0" marL="0">
+            <a:pPr marL="0" indent="0" algn="ctr">
               <a:buNone/>
             </a:pPr>
             <a:r>
-              <a:rPr lang="en-US" sz="1000" b="1" spc="100" kern="0" dirty="0">
+              <a:rPr lang="en-US" sz="1000" b="1" kern="0" spc="100" dirty="0">
                 <a:solidFill>
                   <a:srgbClr val="FFFFFF"/>
                 </a:solidFill>
@@ -28257,7 +28093,7 @@
           <a:bodyPr wrap="square" lIns="0" tIns="0" rIns="0" bIns="0" rtlCol="0" anchor="ctr"/>
           <a:lstStyle/>
           <a:p>
-            <a:pPr indent="0" marL="0">
+            <a:pPr marL="0" indent="0">
               <a:buNone/>
             </a:pPr>
             <a:r>
@@ -28296,7 +28132,7 @@
           <a:bodyPr wrap="square" lIns="0" tIns="0" rIns="0" bIns="0" rtlCol="0" anchor="ctr"/>
           <a:lstStyle/>
           <a:p>
-            <a:pPr indent="0" marL="0">
+            <a:pPr marL="0" indent="0">
               <a:buNone/>
             </a:pPr>
             <a:r>
@@ -28310,9 +28146,6 @@
               </a:rPr>
               <a:t>predice </a:t>
             </a:r>
-            <a:pPr indent="0" marL="0">
-              <a:buNone/>
-            </a:pPr>
             <a:r>
               <a:rPr lang="en-US" sz="1400" b="1" dirty="0">
                 <a:solidFill>
@@ -28376,7 +28209,7 @@
           <a:bodyPr wrap="square" lIns="0" tIns="0" rIns="0" bIns="0" rtlCol="0" anchor="ctr"/>
           <a:lstStyle/>
           <a:p>
-            <a:pPr indent="0" marL="0">
+            <a:pPr marL="0" indent="0">
               <a:spcAft>
                 <a:spcPts val="400"/>
               </a:spcAft>
@@ -28418,7 +28251,7 @@
           <a:bodyPr wrap="square" lIns="0" tIns="0" rIns="0" bIns="0" rtlCol="0" anchor="ctr"/>
           <a:lstStyle/>
           <a:p>
-            <a:pPr indent="0" marL="0">
+            <a:pPr marL="0" indent="0">
               <a:buNone/>
             </a:pPr>
             <a:r>
@@ -28484,7 +28317,7 @@
           <a:bodyPr wrap="square" lIns="0" tIns="0" rIns="0" bIns="0" rtlCol="0" anchor="ctr"/>
           <a:lstStyle/>
           <a:p>
-            <a:pPr indent="0" marL="0">
+            <a:pPr marL="0" indent="0">
               <a:spcAft>
                 <a:spcPts val="400"/>
               </a:spcAft>
@@ -28501,12 +28334,6 @@
               </a:rPr>
               <a:t>¿Y el Módulo 4? </a:t>
             </a:r>
-            <a:pPr indent="0" marL="0">
-              <a:spcAft>
-                <a:spcPts val="400"/>
-              </a:spcAft>
-              <a:buNone/>
-            </a:pPr>
             <a:r>
               <a:rPr lang="en-US" sz="1250" dirty="0">
                 <a:solidFill>
@@ -28538,6 +28365,7 @@
         <a:solidFill>
           <a:srgbClr val="F5F7FB"/>
         </a:solidFill>
+        <a:effectLst/>
       </p:bgPr>
     </p:bg>
     <p:spTree>
@@ -28602,11 +28430,11 @@
           <a:bodyPr wrap="square" lIns="0" tIns="0" rIns="0" bIns="0" rtlCol="0" anchor="ctr"/>
           <a:lstStyle/>
           <a:p>
-            <a:pPr algn="ctr" indent="0" marL="0">
+            <a:pPr marL="0" indent="0" algn="ctr">
               <a:buNone/>
             </a:pPr>
             <a:r>
-              <a:rPr lang="en-US" sz="1100" b="1" spc="150" kern="0" dirty="0">
+              <a:rPr lang="en-US" sz="1100" b="1" kern="0" spc="150" dirty="0">
                 <a:solidFill>
                   <a:srgbClr val="FFFFFF"/>
                 </a:solidFill>
@@ -28641,7 +28469,7 @@
           <a:bodyPr wrap="square" lIns="0" tIns="0" rIns="0" bIns="0" rtlCol="0" anchor="ctr"/>
           <a:lstStyle/>
           <a:p>
-            <a:pPr indent="0" marL="0">
+            <a:pPr marL="0" indent="0">
               <a:buNone/>
             </a:pPr>
             <a:r>
@@ -28680,7 +28508,7 @@
           <a:bodyPr wrap="square" lIns="0" tIns="0" rIns="0" bIns="0" rtlCol="0" anchor="ctr"/>
           <a:lstStyle/>
           <a:p>
-            <a:pPr indent="0" marL="0">
+            <a:pPr marL="0" indent="0">
               <a:buNone/>
             </a:pPr>
             <a:r>
@@ -28721,10 +28549,34 @@
             <a:tbl>
               <a:tblPr/>
               <a:tblGrid>
-                <a:gridCol w="457200"/>
-                <a:gridCol w="6309360"/>
-                <a:gridCol w="1600200"/>
-                <a:gridCol w="2816352"/>
+                <a:gridCol w="457200">
+                  <a:extLst>
+                    <a:ext uri="{9D8B030D-6E8A-4147-A177-3AD203B41FA5}">
+                      <a16:colId xmlns:a16="http://schemas.microsoft.com/office/drawing/2014/main" val="20000"/>
+                    </a:ext>
+                  </a:extLst>
+                </a:gridCol>
+                <a:gridCol w="6309360">
+                  <a:extLst>
+                    <a:ext uri="{9D8B030D-6E8A-4147-A177-3AD203B41FA5}">
+                      <a16:colId xmlns:a16="http://schemas.microsoft.com/office/drawing/2014/main" val="20001"/>
+                    </a:ext>
+                  </a:extLst>
+                </a:gridCol>
+                <a:gridCol w="1600200">
+                  <a:extLst>
+                    <a:ext uri="{9D8B030D-6E8A-4147-A177-3AD203B41FA5}">
+                      <a16:colId xmlns:a16="http://schemas.microsoft.com/office/drawing/2014/main" val="20002"/>
+                    </a:ext>
+                  </a:extLst>
+                </a:gridCol>
+                <a:gridCol w="2816352">
+                  <a:extLst>
+                    <a:ext uri="{9D8B030D-6E8A-4147-A177-3AD203B41FA5}">
+                      <a16:colId xmlns:a16="http://schemas.microsoft.com/office/drawing/2014/main" val="20003"/>
+                    </a:ext>
+                  </a:extLst>
+                </a:gridCol>
               </a:tblGrid>
               <a:tr h="457200">
                 <a:tc>
@@ -28732,7 +28584,7 @@
                     <a:bodyPr/>
                     <a:lstStyle/>
                     <a:p>
-                      <a:pPr indent="0" marL="0">
+                      <a:pPr marL="0" indent="0">
                         <a:buNone/>
                       </a:pPr>
                       <a:endParaRPr lang="en-US" sz="1150" dirty="0">
@@ -28789,7 +28641,7 @@
                     <a:bodyPr/>
                     <a:lstStyle/>
                     <a:p>
-                      <a:pPr indent="0" marL="0">
+                      <a:pPr marL="0" indent="0">
                         <a:buNone/>
                       </a:pPr>
                       <a:r>
@@ -28857,7 +28709,7 @@
                     <a:bodyPr/>
                     <a:lstStyle/>
                     <a:p>
-                      <a:pPr indent="0" marL="0">
+                      <a:pPr marL="0" indent="0">
                         <a:buNone/>
                       </a:pPr>
                       <a:r>
@@ -28925,7 +28777,7 @@
                     <a:bodyPr/>
                     <a:lstStyle/>
                     <a:p>
-                      <a:pPr indent="0" marL="0">
+                      <a:pPr marL="0" indent="0">
                         <a:buNone/>
                       </a:pPr>
                       <a:r>
@@ -28988,6 +28840,11 @@
                     </a:solidFill>
                   </a:tcPr>
                 </a:tc>
+                <a:extLst>
+                  <a:ext uri="{0D108BD9-81ED-4DB2-BD59-A6C34878D82A}">
+                    <a16:rowId xmlns:a16="http://schemas.microsoft.com/office/drawing/2014/main" val="10000"/>
+                  </a:ext>
+                </a:extLst>
               </a:tr>
               <a:tr h="457200">
                 <a:tc>
@@ -28995,7 +28852,7 @@
                     <a:bodyPr/>
                     <a:lstStyle/>
                     <a:p>
-                      <a:pPr algn="ctr" indent="0" marL="0">
+                      <a:pPr marL="0" indent="0" algn="ctr">
                         <a:buNone/>
                       </a:pPr>
                       <a:r>
@@ -29063,7 +28920,7 @@
                     <a:bodyPr/>
                     <a:lstStyle/>
                     <a:p>
-                      <a:pPr indent="0" marL="0">
+                      <a:pPr marL="0" indent="0">
                         <a:buNone/>
                       </a:pPr>
                       <a:r>
@@ -29131,7 +28988,7 @@
                     <a:bodyPr/>
                     <a:lstStyle/>
                     <a:p>
-                      <a:pPr indent="0" marL="0">
+                      <a:pPr marL="0" indent="0">
                         <a:buNone/>
                       </a:pPr>
                       <a:r>
@@ -29199,7 +29056,7 @@
                     <a:bodyPr/>
                     <a:lstStyle/>
                     <a:p>
-                      <a:pPr indent="0" marL="0">
+                      <a:pPr marL="0" indent="0">
                         <a:buNone/>
                       </a:pPr>
                       <a:r>
@@ -29262,6 +29119,11 @@
                     </a:solidFill>
                   </a:tcPr>
                 </a:tc>
+                <a:extLst>
+                  <a:ext uri="{0D108BD9-81ED-4DB2-BD59-A6C34878D82A}">
+                    <a16:rowId xmlns:a16="http://schemas.microsoft.com/office/drawing/2014/main" val="10001"/>
+                  </a:ext>
+                </a:extLst>
               </a:tr>
               <a:tr h="457200">
                 <a:tc>
@@ -29269,7 +29131,7 @@
                     <a:bodyPr/>
                     <a:lstStyle/>
                     <a:p>
-                      <a:pPr algn="ctr" indent="0" marL="0">
+                      <a:pPr marL="0" indent="0" algn="ctr">
                         <a:buNone/>
                       </a:pPr>
                       <a:r>
@@ -29337,7 +29199,7 @@
                     <a:bodyPr/>
                     <a:lstStyle/>
                     <a:p>
-                      <a:pPr indent="0" marL="0">
+                      <a:pPr marL="0" indent="0">
                         <a:buNone/>
                       </a:pPr>
                       <a:r>
@@ -29405,7 +29267,7 @@
                     <a:bodyPr/>
                     <a:lstStyle/>
                     <a:p>
-                      <a:pPr indent="0" marL="0">
+                      <a:pPr marL="0" indent="0">
                         <a:buNone/>
                       </a:pPr>
                       <a:r>
@@ -29473,7 +29335,7 @@
                     <a:bodyPr/>
                     <a:lstStyle/>
                     <a:p>
-                      <a:pPr indent="0" marL="0">
+                      <a:pPr marL="0" indent="0">
                         <a:buNone/>
                       </a:pPr>
                       <a:r>
@@ -29536,6 +29398,11 @@
                     </a:solidFill>
                   </a:tcPr>
                 </a:tc>
+                <a:extLst>
+                  <a:ext uri="{0D108BD9-81ED-4DB2-BD59-A6C34878D82A}">
+                    <a16:rowId xmlns:a16="http://schemas.microsoft.com/office/drawing/2014/main" val="10002"/>
+                  </a:ext>
+                </a:extLst>
               </a:tr>
               <a:tr h="457200">
                 <a:tc>
@@ -29543,7 +29410,7 @@
                     <a:bodyPr/>
                     <a:lstStyle/>
                     <a:p>
-                      <a:pPr algn="ctr" indent="0" marL="0">
+                      <a:pPr marL="0" indent="0" algn="ctr">
                         <a:buNone/>
                       </a:pPr>
                       <a:r>
@@ -29611,7 +29478,7 @@
                     <a:bodyPr/>
                     <a:lstStyle/>
                     <a:p>
-                      <a:pPr indent="0" marL="0">
+                      <a:pPr marL="0" indent="0">
                         <a:buNone/>
                       </a:pPr>
                       <a:r>
@@ -29679,7 +29546,7 @@
                     <a:bodyPr/>
                     <a:lstStyle/>
                     <a:p>
-                      <a:pPr indent="0" marL="0">
+                      <a:pPr marL="0" indent="0">
                         <a:buNone/>
                       </a:pPr>
                       <a:r>
@@ -29747,7 +29614,7 @@
                     <a:bodyPr/>
                     <a:lstStyle/>
                     <a:p>
-                      <a:pPr indent="0" marL="0">
+                      <a:pPr marL="0" indent="0">
                         <a:buNone/>
                       </a:pPr>
                       <a:r>
@@ -29810,6 +29677,11 @@
                     </a:solidFill>
                   </a:tcPr>
                 </a:tc>
+                <a:extLst>
+                  <a:ext uri="{0D108BD9-81ED-4DB2-BD59-A6C34878D82A}">
+                    <a16:rowId xmlns:a16="http://schemas.microsoft.com/office/drawing/2014/main" val="10003"/>
+                  </a:ext>
+                </a:extLst>
               </a:tr>
               <a:tr h="457200">
                 <a:tc>
@@ -29817,7 +29689,7 @@
                     <a:bodyPr/>
                     <a:lstStyle/>
                     <a:p>
-                      <a:pPr algn="ctr" indent="0" marL="0">
+                      <a:pPr marL="0" indent="0" algn="ctr">
                         <a:buNone/>
                       </a:pPr>
                       <a:r>
@@ -29885,7 +29757,7 @@
                     <a:bodyPr/>
                     <a:lstStyle/>
                     <a:p>
-                      <a:pPr indent="0" marL="0">
+                      <a:pPr marL="0" indent="0">
                         <a:buNone/>
                       </a:pPr>
                       <a:r>
@@ -29953,7 +29825,7 @@
                     <a:bodyPr/>
                     <a:lstStyle/>
                     <a:p>
-                      <a:pPr indent="0" marL="0">
+                      <a:pPr marL="0" indent="0">
                         <a:buNone/>
                       </a:pPr>
                       <a:r>
@@ -30021,7 +29893,7 @@
                     <a:bodyPr/>
                     <a:lstStyle/>
                     <a:p>
-                      <a:pPr indent="0" marL="0">
+                      <a:pPr marL="0" indent="0">
                         <a:buNone/>
                       </a:pPr>
                       <a:r>
@@ -30084,6 +29956,11 @@
                     </a:solidFill>
                   </a:tcPr>
                 </a:tc>
+                <a:extLst>
+                  <a:ext uri="{0D108BD9-81ED-4DB2-BD59-A6C34878D82A}">
+                    <a16:rowId xmlns:a16="http://schemas.microsoft.com/office/drawing/2014/main" val="10004"/>
+                  </a:ext>
+                </a:extLst>
               </a:tr>
               <a:tr h="457200">
                 <a:tc>
@@ -30091,7 +29968,7 @@
                     <a:bodyPr/>
                     <a:lstStyle/>
                     <a:p>
-                      <a:pPr algn="ctr" indent="0" marL="0">
+                      <a:pPr marL="0" indent="0" algn="ctr">
                         <a:buNone/>
                       </a:pPr>
                       <a:r>
@@ -30159,7 +30036,7 @@
                     <a:bodyPr/>
                     <a:lstStyle/>
                     <a:p>
-                      <a:pPr indent="0" marL="0">
+                      <a:pPr marL="0" indent="0">
                         <a:buNone/>
                       </a:pPr>
                       <a:r>
@@ -30227,7 +30104,7 @@
                     <a:bodyPr/>
                     <a:lstStyle/>
                     <a:p>
-                      <a:pPr indent="0" marL="0">
+                      <a:pPr marL="0" indent="0">
                         <a:buNone/>
                       </a:pPr>
                       <a:r>
@@ -30295,7 +30172,7 @@
                     <a:bodyPr/>
                     <a:lstStyle/>
                     <a:p>
-                      <a:pPr indent="0" marL="0">
+                      <a:pPr marL="0" indent="0">
                         <a:buNone/>
                       </a:pPr>
                       <a:r>
@@ -30358,6 +30235,11 @@
                     </a:solidFill>
                   </a:tcPr>
                 </a:tc>
+                <a:extLst>
+                  <a:ext uri="{0D108BD9-81ED-4DB2-BD59-A6C34878D82A}">
+                    <a16:rowId xmlns:a16="http://schemas.microsoft.com/office/drawing/2014/main" val="10005"/>
+                  </a:ext>
+                </a:extLst>
               </a:tr>
               <a:tr h="457200">
                 <a:tc>
@@ -30365,7 +30247,7 @@
                     <a:bodyPr/>
                     <a:lstStyle/>
                     <a:p>
-                      <a:pPr algn="ctr" indent="0" marL="0">
+                      <a:pPr marL="0" indent="0" algn="ctr">
                         <a:buNone/>
                       </a:pPr>
                       <a:r>
@@ -30433,7 +30315,7 @@
                     <a:bodyPr/>
                     <a:lstStyle/>
                     <a:p>
-                      <a:pPr indent="0" marL="0">
+                      <a:pPr marL="0" indent="0">
                         <a:buNone/>
                       </a:pPr>
                       <a:r>
@@ -30501,7 +30383,7 @@
                     <a:bodyPr/>
                     <a:lstStyle/>
                     <a:p>
-                      <a:pPr indent="0" marL="0">
+                      <a:pPr marL="0" indent="0">
                         <a:buNone/>
                       </a:pPr>
                       <a:r>
@@ -30569,7 +30451,7 @@
                     <a:bodyPr/>
                     <a:lstStyle/>
                     <a:p>
-                      <a:pPr indent="0" marL="0">
+                      <a:pPr marL="0" indent="0">
                         <a:buNone/>
                       </a:pPr>
                       <a:r>
@@ -30632,6 +30514,11 @@
                     </a:solidFill>
                   </a:tcPr>
                 </a:tc>
+                <a:extLst>
+                  <a:ext uri="{0D108BD9-81ED-4DB2-BD59-A6C34878D82A}">
+                    <a16:rowId xmlns:a16="http://schemas.microsoft.com/office/drawing/2014/main" val="10006"/>
+                  </a:ext>
+                </a:extLst>
               </a:tr>
             </a:tbl>
           </a:graphicData>
@@ -30685,7 +30572,7 @@
           <a:bodyPr wrap="square" lIns="0" tIns="0" rIns="0" bIns="0" rtlCol="0" anchor="ctr"/>
           <a:lstStyle/>
           <a:p>
-            <a:pPr indent="0" marL="0">
+            <a:pPr marL="0" indent="0">
               <a:spcAft>
                 <a:spcPts val="400"/>
               </a:spcAft>
@@ -30702,12 +30589,6 @@
               </a:rPr>
               <a:t>La que más se falla es la (d). </a:t>
             </a:r>
-            <a:pPr indent="0" marL="0">
-              <a:spcAft>
-                <a:spcPts val="400"/>
-              </a:spcAft>
-              <a:buNone/>
-            </a:pPr>
             <a:r>
               <a:rPr lang="en-US" sz="1300" dirty="0">
                 <a:solidFill>
@@ -31024,4 +30905,319 @@
     </a:ext>
   </a:extLst>
 </a:theme>
+</file>
+
+<file path=ppt/theme/theme2.xml><?xml version="1.0" encoding="utf-8"?>
+<a:theme xmlns:a="http://schemas.openxmlformats.org/drawingml/2006/main" name="Office Theme">
+  <a:themeElements>
+    <a:clrScheme name="Office">
+      <a:dk1>
+        <a:sysClr val="windowText" lastClr="000000"/>
+      </a:dk1>
+      <a:lt1>
+        <a:sysClr val="window" lastClr="FFFFFF"/>
+      </a:lt1>
+      <a:dk2>
+        <a:srgbClr val="0E2841"/>
+      </a:dk2>
+      <a:lt2>
+        <a:srgbClr val="E8E8E8"/>
+      </a:lt2>
+      <a:accent1>
+        <a:srgbClr val="156082"/>
+      </a:accent1>
+      <a:accent2>
+        <a:srgbClr val="E97132"/>
+      </a:accent2>
+      <a:accent3>
+        <a:srgbClr val="196B24"/>
+      </a:accent3>
+      <a:accent4>
+        <a:srgbClr val="0F9ED5"/>
+      </a:accent4>
+      <a:accent5>
+        <a:srgbClr val="A02B93"/>
+      </a:accent5>
+      <a:accent6>
+        <a:srgbClr val="4EA72E"/>
+      </a:accent6>
+      <a:hlink>
+        <a:srgbClr val="467886"/>
+      </a:hlink>
+      <a:folHlink>
+        <a:srgbClr val="96607D"/>
+      </a:folHlink>
+    </a:clrScheme>
+    <a:fontScheme name="Office">
+      <a:majorFont>
+        <a:latin typeface="Aptos Display" panose="02110004020202020204"/>
+        <a:ea typeface=""/>
+        <a:cs typeface=""/>
+        <a:font script="Jpan" typeface="游ゴシック Light"/>
+        <a:font script="Hang" typeface="맑은 고딕"/>
+        <a:font script="Hans" typeface="等线 Light"/>
+        <a:font script="Hant" typeface="新細明體"/>
+        <a:font script="Arab" typeface="Times New Roman"/>
+        <a:font script="Hebr" typeface="Times New Roman"/>
+        <a:font script="Thai" typeface="Angsana New"/>
+        <a:font script="Ethi" typeface="Nyala"/>
+        <a:font script="Beng" typeface="Vrinda"/>
+        <a:font script="Gujr" typeface="Shruti"/>
+        <a:font script="Khmr" typeface="MoolBoran"/>
+        <a:font script="Knda" typeface="Tunga"/>
+        <a:font script="Guru" typeface="Raavi"/>
+        <a:font script="Cans" typeface="Euphemia"/>
+        <a:font script="Cher" typeface="Plantagenet Cherokee"/>
+        <a:font script="Yiii" typeface="Microsoft Yi Baiti"/>
+        <a:font script="Tibt" typeface="Microsoft Himalaya"/>
+        <a:font script="Thaa" typeface="MV Boli"/>
+        <a:font script="Deva" typeface="Mangal"/>
+        <a:font script="Telu" typeface="Gautami"/>
+        <a:font script="Taml" typeface="Latha"/>
+        <a:font script="Syrc" typeface="Estrangelo Edessa"/>
+        <a:font script="Orya" typeface="Kalinga"/>
+        <a:font script="Mlym" typeface="Kartika"/>
+        <a:font script="Laoo" typeface="DokChampa"/>
+        <a:font script="Sinh" typeface="Iskoola Pota"/>
+        <a:font script="Mong" typeface="Mongolian Baiti"/>
+        <a:font script="Viet" typeface="Times New Roman"/>
+        <a:font script="Uigh" typeface="Microsoft Uighur"/>
+        <a:font script="Geor" typeface="Sylfaen"/>
+        <a:font script="Armn" typeface="Arial"/>
+        <a:font script="Bugi" typeface="Leelawadee UI"/>
+        <a:font script="Bopo" typeface="Microsoft JhengHei"/>
+        <a:font script="Java" typeface="Javanese Text"/>
+        <a:font script="Lisu" typeface="Segoe UI"/>
+        <a:font script="Mymr" typeface="Myanmar Text"/>
+        <a:font script="Nkoo" typeface="Ebrima"/>
+        <a:font script="Olck" typeface="Nirmala UI"/>
+        <a:font script="Osma" typeface="Ebrima"/>
+        <a:font script="Phag" typeface="Phagspa"/>
+        <a:font script="Syrn" typeface="Estrangelo Edessa"/>
+        <a:font script="Syrj" typeface="Estrangelo Edessa"/>
+        <a:font script="Syre" typeface="Estrangelo Edessa"/>
+        <a:font script="Sora" typeface="Nirmala UI"/>
+        <a:font script="Tale" typeface="Microsoft Tai Le"/>
+        <a:font script="Talu" typeface="Microsoft New Tai Lue"/>
+        <a:font script="Tfng" typeface="Ebrima"/>
+      </a:majorFont>
+      <a:minorFont>
+        <a:latin typeface="Aptos" panose="02110004020202020204"/>
+        <a:ea typeface=""/>
+        <a:cs typeface=""/>
+        <a:font script="Jpan" typeface="游ゴシック"/>
+        <a:font script="Hang" typeface="맑은 고딕"/>
+        <a:font script="Hans" typeface="等线"/>
+        <a:font script="Hant" typeface="新細明體"/>
+        <a:font script="Arab" typeface="Arial"/>
+        <a:font script="Hebr" typeface="Arial"/>
+        <a:font script="Thai" typeface="Cordia New"/>
+        <a:font script="Ethi" typeface="Nyala"/>
+        <a:font script="Beng" typeface="Vrinda"/>
+        <a:font script="Gujr" typeface="Shruti"/>
+        <a:font script="Khmr" typeface="DaunPenh"/>
+        <a:font script="Knda" typeface="Tunga"/>
+        <a:font script="Guru" typeface="Raavi"/>
+        <a:font script="Cans" typeface="Euphemia"/>
+        <a:font script="Cher" typeface="Plantagenet Cherokee"/>
+        <a:font script="Yiii" typeface="Microsoft Yi Baiti"/>
+        <a:font script="Tibt" typeface="Microsoft Himalaya"/>
+        <a:font script="Thaa" typeface="MV Boli"/>
+        <a:font script="Deva" typeface="Mangal"/>
+        <a:font script="Telu" typeface="Gautami"/>
+        <a:font script="Taml" typeface="Latha"/>
+        <a:font script="Syrc" typeface="Estrangelo Edessa"/>
+        <a:font script="Orya" typeface="Kalinga"/>
+        <a:font script="Mlym" typeface="Kartika"/>
+        <a:font script="Laoo" typeface="DokChampa"/>
+        <a:font script="Sinh" typeface="Iskoola Pota"/>
+        <a:font script="Mong" typeface="Mongolian Baiti"/>
+        <a:font script="Viet" typeface="Arial"/>
+        <a:font script="Uigh" typeface="Microsoft Uighur"/>
+        <a:font script="Geor" typeface="Sylfaen"/>
+        <a:font script="Armn" typeface="Arial"/>
+        <a:font script="Bugi" typeface="Leelawadee UI"/>
+        <a:font script="Bopo" typeface="Microsoft JhengHei"/>
+        <a:font script="Java" typeface="Javanese Text"/>
+        <a:font script="Lisu" typeface="Segoe UI"/>
+        <a:font script="Mymr" typeface="Myanmar Text"/>
+        <a:font script="Nkoo" typeface="Ebrima"/>
+        <a:font script="Olck" typeface="Nirmala UI"/>
+        <a:font script="Osma" typeface="Ebrima"/>
+        <a:font script="Phag" typeface="Phagspa"/>
+        <a:font script="Syrn" typeface="Estrangelo Edessa"/>
+        <a:font script="Syrj" typeface="Estrangelo Edessa"/>
+        <a:font script="Syre" typeface="Estrangelo Edessa"/>
+        <a:font script="Sora" typeface="Nirmala UI"/>
+        <a:font script="Tale" typeface="Microsoft Tai Le"/>
+        <a:font script="Talu" typeface="Microsoft New Tai Lue"/>
+        <a:font script="Tfng" typeface="Ebrima"/>
+      </a:minorFont>
+    </a:fontScheme>
+    <a:fmtScheme name="Office">
+      <a:fillStyleLst>
+        <a:solidFill>
+          <a:schemeClr val="phClr"/>
+        </a:solidFill>
+        <a:gradFill rotWithShape="1">
+          <a:gsLst>
+            <a:gs pos="0">
+              <a:schemeClr val="phClr">
+                <a:lumMod val="110000"/>
+                <a:satMod val="105000"/>
+                <a:tint val="67000"/>
+              </a:schemeClr>
+            </a:gs>
+            <a:gs pos="50000">
+              <a:schemeClr val="phClr">
+                <a:lumMod val="105000"/>
+                <a:satMod val="103000"/>
+                <a:tint val="73000"/>
+              </a:schemeClr>
+            </a:gs>
+            <a:gs pos="100000">
+              <a:schemeClr val="phClr">
+                <a:lumMod val="105000"/>
+                <a:satMod val="109000"/>
+                <a:tint val="81000"/>
+              </a:schemeClr>
+            </a:gs>
+          </a:gsLst>
+          <a:lin ang="5400000" scaled="0"/>
+        </a:gradFill>
+        <a:gradFill rotWithShape="1">
+          <a:gsLst>
+            <a:gs pos="0">
+              <a:schemeClr val="phClr">
+                <a:satMod val="103000"/>
+                <a:lumMod val="102000"/>
+                <a:tint val="94000"/>
+              </a:schemeClr>
+            </a:gs>
+            <a:gs pos="50000">
+              <a:schemeClr val="phClr">
+                <a:satMod val="110000"/>
+                <a:lumMod val="100000"/>
+                <a:shade val="100000"/>
+              </a:schemeClr>
+            </a:gs>
+            <a:gs pos="100000">
+              <a:schemeClr val="phClr">
+                <a:lumMod val="99000"/>
+                <a:satMod val="120000"/>
+                <a:shade val="78000"/>
+              </a:schemeClr>
+            </a:gs>
+          </a:gsLst>
+          <a:lin ang="5400000" scaled="0"/>
+        </a:gradFill>
+      </a:fillStyleLst>
+      <a:lnStyleLst>
+        <a:ln w="12700" cap="flat" cmpd="sng" algn="ctr">
+          <a:solidFill>
+            <a:schemeClr val="phClr"/>
+          </a:solidFill>
+          <a:prstDash val="solid"/>
+          <a:miter lim="800000"/>
+        </a:ln>
+        <a:ln w="19050" cap="flat" cmpd="sng" algn="ctr">
+          <a:solidFill>
+            <a:schemeClr val="phClr"/>
+          </a:solidFill>
+          <a:prstDash val="solid"/>
+          <a:miter lim="800000"/>
+        </a:ln>
+        <a:ln w="25400" cap="flat" cmpd="sng" algn="ctr">
+          <a:solidFill>
+            <a:schemeClr val="phClr"/>
+          </a:solidFill>
+          <a:prstDash val="solid"/>
+          <a:miter lim="800000"/>
+        </a:ln>
+      </a:lnStyleLst>
+      <a:effectStyleLst>
+        <a:effectStyle>
+          <a:effectLst/>
+        </a:effectStyle>
+        <a:effectStyle>
+          <a:effectLst/>
+        </a:effectStyle>
+        <a:effectStyle>
+          <a:effectLst>
+            <a:outerShdw blurRad="57150" dist="19050" dir="5400000" algn="ctr" rotWithShape="0">
+              <a:srgbClr val="000000">
+                <a:alpha val="63000"/>
+              </a:srgbClr>
+            </a:outerShdw>
+          </a:effectLst>
+        </a:effectStyle>
+      </a:effectStyleLst>
+      <a:bgFillStyleLst>
+        <a:solidFill>
+          <a:schemeClr val="phClr"/>
+        </a:solidFill>
+        <a:solidFill>
+          <a:schemeClr val="phClr">
+            <a:tint val="95000"/>
+            <a:satMod val="170000"/>
+          </a:schemeClr>
+        </a:solidFill>
+        <a:gradFill rotWithShape="1">
+          <a:gsLst>
+            <a:gs pos="0">
+              <a:schemeClr val="phClr">
+                <a:tint val="93000"/>
+                <a:satMod val="150000"/>
+                <a:shade val="98000"/>
+                <a:lumMod val="102000"/>
+              </a:schemeClr>
+            </a:gs>
+            <a:gs pos="50000">
+              <a:schemeClr val="phClr">
+                <a:tint val="98000"/>
+                <a:satMod val="130000"/>
+                <a:shade val="90000"/>
+                <a:lumMod val="103000"/>
+              </a:schemeClr>
+            </a:gs>
+            <a:gs pos="100000">
+              <a:schemeClr val="phClr">
+                <a:shade val="63000"/>
+                <a:satMod val="120000"/>
+              </a:schemeClr>
+            </a:gs>
+          </a:gsLst>
+          <a:lin ang="5400000" scaled="0"/>
+        </a:gradFill>
+      </a:bgFillStyleLst>
+    </a:fmtScheme>
+  </a:themeElements>
+  <a:objectDefaults>
+    <a:lnDef>
+      <a:spPr/>
+      <a:bodyPr/>
+      <a:lstStyle/>
+      <a:style>
+        <a:lnRef idx="2">
+          <a:schemeClr val="accent1"/>
+        </a:lnRef>
+        <a:fillRef idx="0">
+          <a:schemeClr val="accent1"/>
+        </a:fillRef>
+        <a:effectRef idx="1">
+          <a:schemeClr val="accent1"/>
+        </a:effectRef>
+        <a:fontRef idx="minor">
+          <a:schemeClr val="tx1"/>
+        </a:fontRef>
+      </a:style>
+    </a:lnDef>
+  </a:objectDefaults>
+  <a:extraClrSchemeLst/>
+  <a:extLst>
+    <a:ext uri="{05A4C25C-085E-4340-85A3-A5531E510DB2}">
+      <thm15:themeFamily xmlns:thm15="http://schemas.microsoft.com/office/thememl/2012/main" name="Office Theme" id="{2E142A2C-CD16-42D6-873A-C26D2A0506FA}" vid="{1BDDFF52-6CD6-40A5-AB3C-68EB2F1E4D0A}"/>
+    </a:ext>
+  </a:extLst>
+</a:theme>
 </file>